--- a/docs/presentation/presentation.pptx
+++ b/docs/presentation/presentation.pptx
@@ -1,27 +1,30 @@
 
 <file path=ppt/presentation.xml><?xml version="1.0" encoding="utf-8"?>
-<p:presentation xmlns:a="http://schemas.openxmlformats.org/drawingml/2006/main" xmlns:r="http://schemas.openxmlformats.org/officeDocument/2006/relationships" xmlns:p="http://schemas.openxmlformats.org/presentationml/2006/main" saveSubsetFonts="1" autoCompressPictures="0">
+<p:presentation xmlns:a="http://schemas.openxmlformats.org/drawingml/2006/main" xmlns:r="http://schemas.openxmlformats.org/officeDocument/2006/relationships" xmlns:p="http://schemas.openxmlformats.org/presentationml/2006/main" autoCompressPictures="0">
   <p:sldMasterIdLst>
     <p:sldMasterId id="2147483648" r:id="rId1"/>
   </p:sldMasterIdLst>
+  <p:notesMasterIdLst>
+    <p:notesMasterId r:id="rId4"/>
+  </p:notesMasterIdLst>
   <p:sldIdLst>
-    <p:sldId id="256" r:id="rId7"/>
-    <p:sldId id="257" r:id="rId9"/>
-    <p:sldId id="258" r:id="rId10"/>
-    <p:sldId id="259" r:id="rId11"/>
-    <p:sldId id="260" r:id="rId12"/>
-    <p:sldId id="261" r:id="rId13"/>
-    <p:sldId id="262" r:id="rId14"/>
-    <p:sldId id="263" r:id="rId15"/>
-    <p:sldId id="264" r:id="rId16"/>
-    <p:sldId id="265" r:id="rId17"/>
-    <p:sldId id="266" r:id="rId18"/>
-    <p:sldId id="267" r:id="rId19"/>
-    <p:sldId id="268" r:id="rId20"/>
-    <p:sldId id="269" r:id="rId21"/>
-    <p:sldId id="270" r:id="rId22"/>
+    <p:sldId id="256" r:id="rId3"/>
+    <p:sldId id="257" r:id="rId5"/>
+    <p:sldId id="258" r:id="rId6"/>
+    <p:sldId id="259" r:id="rId7"/>
+    <p:sldId id="260" r:id="rId8"/>
+    <p:sldId id="261" r:id="rId9"/>
+    <p:sldId id="262" r:id="rId10"/>
+    <p:sldId id="263" r:id="rId11"/>
+    <p:sldId id="264" r:id="rId12"/>
+    <p:sldId id="265" r:id="rId13"/>
+    <p:sldId id="266" r:id="rId14"/>
+    <p:sldId id="267" r:id="rId15"/>
+    <p:sldId id="268" r:id="rId16"/>
+    <p:sldId id="269" r:id="rId17"/>
+    <p:sldId id="270" r:id="rId18"/>
   </p:sldIdLst>
-  <p:sldSz cx="12191695" cy="6858000" type="screen4x3"/>
+  <p:sldSz cx="12191365" cy="6858000" type="screen4x3"/>
   <p:notesSz cx="6858000" cy="9144000"/>
   <p:defaultTextStyle>
     <a:defPPr>
@@ -118,11 +121,27 @@
       </a:defRPr>
     </a:lvl9pPr>
   </p:defaultTextStyle>
+  <p:extLst>
+    <p:ext uri="{EFAFB233-063F-42B5-8137-9DF3F51BA10A}">
+      <p15:sldGuideLst xmlns:p15="http://schemas.microsoft.com/office/powerpoint/2012/main">
+        <p15:guide id="1" orient="horz" pos="2137" userDrawn="1">
+          <p15:clr>
+            <a:srgbClr val="A4A3A4"/>
+          </p15:clr>
+        </p15:guide>
+        <p15:guide id="2" pos="2880" userDrawn="1">
+          <p15:clr>
+            <a:srgbClr val="A4A3A4"/>
+          </p15:clr>
+        </p15:guide>
+      </p15:sldGuideLst>
+    </p:ext>
+  </p:extLst>
 </p:presentation>
 </file>
 
 <file path=ppt/notesMasters/notesMaster1.xml><?xml version="1.0" encoding="utf-8"?>
-<p:notesMaster xmlns:a="http://schemas.openxmlformats.org/drawingml/2006/main" xmlns:p="http://schemas.openxmlformats.org/presentationml/2006/main" xmlns:r="http://schemas.openxmlformats.org/officeDocument/2006/relationships">
+<p:notesMaster xmlns:a="http://schemas.openxmlformats.org/drawingml/2006/main" xmlns:r="http://schemas.openxmlformats.org/officeDocument/2006/relationships" xmlns:p="http://schemas.openxmlformats.org/presentationml/2006/main">
   <p:cSld>
     <p:bg>
       <p:bgRef idx="1001">
@@ -203,7 +222,6 @@
           <a:p>
             <a:fld id="{0F89C1C7-3DCD-1040-A9CF-14679D8B5DDD}" type="datetimeFigureOut">
               <a:rPr lang="en-US" smtClean="0"/>
-              <a:t>10/17/16</a:t>
             </a:fld>
             <a:endParaRPr lang="en-US"/>
           </a:p>
@@ -270,6 +288,7 @@
               <a:rPr lang="en-US" smtClean="0"/>
               <a:t>Click to edit Master text styles</a:t>
             </a:r>
+            <a:endParaRPr lang="en-US" smtClean="0"/>
           </a:p>
           <a:p>
             <a:pPr lvl="1"/>
@@ -277,6 +296,7 @@
               <a:rPr lang="en-US" smtClean="0"/>
               <a:t>Second level</a:t>
             </a:r>
+            <a:endParaRPr lang="en-US" smtClean="0"/>
           </a:p>
           <a:p>
             <a:pPr lvl="2"/>
@@ -284,6 +304,7 @@
               <a:rPr lang="en-US" smtClean="0"/>
               <a:t>Third level</a:t>
             </a:r>
+            <a:endParaRPr lang="en-US" smtClean="0"/>
           </a:p>
           <a:p>
             <a:pPr lvl="3"/>
@@ -291,6 +312,7 @@
               <a:rPr lang="en-US" smtClean="0"/>
               <a:t>Fourth level</a:t>
             </a:r>
+            <a:endParaRPr lang="en-US" smtClean="0"/>
           </a:p>
           <a:p>
             <a:pPr lvl="4"/>
@@ -362,18 +384,12 @@
           <a:p>
             <a:fld id="{BB5E49A5-4136-284D-997B-48E1D791AD67}" type="slidenum">
               <a:rPr lang="en-US" smtClean="0"/>
-              <a:t>‹#›</a:t>
             </a:fld>
             <a:endParaRPr lang="en-US"/>
           </a:p>
         </p:txBody>
       </p:sp>
     </p:spTree>
-    <p:extLst>
-      <p:ext uri="{BB962C8B-B14F-4D97-AF65-F5344CB8AC3E}">
-        <p14:creationId xmlns:p14="http://schemas.microsoft.com/office/powerpoint/2010/main" val="2623252185"/>
-      </p:ext>
-    </p:extLst>
   </p:cSld>
   <p:clrMap bg1="lt1" tx1="dk1" bg2="lt2" tx2="dk2" accent1="accent1" accent2="accent2" accent3="accent3" accent4="accent4" accent5="accent5" accent6="accent6" hlink="hlink" folHlink="folHlink"/>
   <p:notesStyle>
@@ -472,7 +488,7 @@
 </file>
 
 <file path=ppt/notesSlides/notesSlide1.xml><?xml version="1.0" encoding="utf-8"?>
-<p:notes xmlns:a="http://schemas.openxmlformats.org/drawingml/2006/main" xmlns:p="http://schemas.openxmlformats.org/presentationml/2006/main" xmlns:r="http://schemas.openxmlformats.org/officeDocument/2006/relationships">
+<p:notes xmlns:a="http://schemas.openxmlformats.org/drawingml/2006/main" xmlns:r="http://schemas.openxmlformats.org/officeDocument/2006/relationships" xmlns:p="http://schemas.openxmlformats.org/presentationml/2006/main">
   <p:cSld>
     <p:spTree>
       <p:nvGrpSpPr>
@@ -507,7 +523,7 @@
             <a:spLocks noGrp="1"/>
           </p:cNvSpPr>
           <p:nvPr>
-            <p:ph type="body" idx="3" sz="quarter"/>
+            <p:ph type="body" sz="quarter" idx="3"/>
           </p:nvPr>
         </p:nvSpPr>
         <p:spPr/>
@@ -528,7 +544,7 @@
             <a:spLocks noGrp="1"/>
           </p:cNvSpPr>
           <p:nvPr>
-            <p:ph type="sldNum" idx="5" sz="quarter"/>
+            <p:ph type="sldNum" sz="quarter" idx="5"/>
           </p:nvPr>
         </p:nvSpPr>
         <p:spPr/>
@@ -542,7 +558,7 @@
 </file>
 
 <file path=ppt/notesSlides/notesSlide10.xml><?xml version="1.0" encoding="utf-8"?>
-<p:notes xmlns:a="http://schemas.openxmlformats.org/drawingml/2006/main" xmlns:p="http://schemas.openxmlformats.org/presentationml/2006/main" xmlns:r="http://schemas.openxmlformats.org/officeDocument/2006/relationships">
+<p:notes xmlns:a="http://schemas.openxmlformats.org/drawingml/2006/main" xmlns:r="http://schemas.openxmlformats.org/officeDocument/2006/relationships" xmlns:p="http://schemas.openxmlformats.org/presentationml/2006/main">
   <p:cSld>
     <p:spTree>
       <p:nvGrpSpPr>
@@ -577,7 +593,7 @@
             <a:spLocks noGrp="1"/>
           </p:cNvSpPr>
           <p:nvPr>
-            <p:ph type="body" idx="3" sz="quarter"/>
+            <p:ph type="body" sz="quarter" idx="3"/>
           </p:nvPr>
         </p:nvSpPr>
         <p:spPr/>
@@ -598,7 +614,7 @@
             <a:spLocks noGrp="1"/>
           </p:cNvSpPr>
           <p:nvPr>
-            <p:ph type="sldNum" idx="5" sz="quarter"/>
+            <p:ph type="sldNum" sz="quarter" idx="5"/>
           </p:nvPr>
         </p:nvSpPr>
         <p:spPr/>
@@ -612,7 +628,7 @@
 </file>
 
 <file path=ppt/notesSlides/notesSlide11.xml><?xml version="1.0" encoding="utf-8"?>
-<p:notes xmlns:a="http://schemas.openxmlformats.org/drawingml/2006/main" xmlns:p="http://schemas.openxmlformats.org/presentationml/2006/main" xmlns:r="http://schemas.openxmlformats.org/officeDocument/2006/relationships">
+<p:notes xmlns:a="http://schemas.openxmlformats.org/drawingml/2006/main" xmlns:r="http://schemas.openxmlformats.org/officeDocument/2006/relationships" xmlns:p="http://schemas.openxmlformats.org/presentationml/2006/main">
   <p:cSld>
     <p:spTree>
       <p:nvGrpSpPr>
@@ -647,7 +663,7 @@
             <a:spLocks noGrp="1"/>
           </p:cNvSpPr>
           <p:nvPr>
-            <p:ph type="body" idx="3" sz="quarter"/>
+            <p:ph type="body" sz="quarter" idx="3"/>
           </p:nvPr>
         </p:nvSpPr>
         <p:spPr/>
@@ -668,7 +684,7 @@
             <a:spLocks noGrp="1"/>
           </p:cNvSpPr>
           <p:nvPr>
-            <p:ph type="sldNum" idx="5" sz="quarter"/>
+            <p:ph type="sldNum" sz="quarter" idx="5"/>
           </p:nvPr>
         </p:nvSpPr>
         <p:spPr/>
@@ -682,7 +698,7 @@
 </file>
 
 <file path=ppt/notesSlides/notesSlide12.xml><?xml version="1.0" encoding="utf-8"?>
-<p:notes xmlns:a="http://schemas.openxmlformats.org/drawingml/2006/main" xmlns:p="http://schemas.openxmlformats.org/presentationml/2006/main" xmlns:r="http://schemas.openxmlformats.org/officeDocument/2006/relationships">
+<p:notes xmlns:a="http://schemas.openxmlformats.org/drawingml/2006/main" xmlns:r="http://schemas.openxmlformats.org/officeDocument/2006/relationships" xmlns:p="http://schemas.openxmlformats.org/presentationml/2006/main">
   <p:cSld>
     <p:spTree>
       <p:nvGrpSpPr>
@@ -717,7 +733,7 @@
             <a:spLocks noGrp="1"/>
           </p:cNvSpPr>
           <p:nvPr>
-            <p:ph type="body" idx="3" sz="quarter"/>
+            <p:ph type="body" sz="quarter" idx="3"/>
           </p:nvPr>
         </p:nvSpPr>
         <p:spPr/>
@@ -738,7 +754,7 @@
             <a:spLocks noGrp="1"/>
           </p:cNvSpPr>
           <p:nvPr>
-            <p:ph type="sldNum" idx="5" sz="quarter"/>
+            <p:ph type="sldNum" sz="quarter" idx="5"/>
           </p:nvPr>
         </p:nvSpPr>
         <p:spPr/>
@@ -752,7 +768,7 @@
 </file>
 
 <file path=ppt/notesSlides/notesSlide13.xml><?xml version="1.0" encoding="utf-8"?>
-<p:notes xmlns:a="http://schemas.openxmlformats.org/drawingml/2006/main" xmlns:p="http://schemas.openxmlformats.org/presentationml/2006/main" xmlns:r="http://schemas.openxmlformats.org/officeDocument/2006/relationships">
+<p:notes xmlns:a="http://schemas.openxmlformats.org/drawingml/2006/main" xmlns:r="http://schemas.openxmlformats.org/officeDocument/2006/relationships" xmlns:p="http://schemas.openxmlformats.org/presentationml/2006/main">
   <p:cSld>
     <p:spTree>
       <p:nvGrpSpPr>
@@ -787,7 +803,7 @@
             <a:spLocks noGrp="1"/>
           </p:cNvSpPr>
           <p:nvPr>
-            <p:ph type="body" idx="3" sz="quarter"/>
+            <p:ph type="body" sz="quarter" idx="3"/>
           </p:nvPr>
         </p:nvSpPr>
         <p:spPr/>
@@ -808,7 +824,7 @@
             <a:spLocks noGrp="1"/>
           </p:cNvSpPr>
           <p:nvPr>
-            <p:ph type="sldNum" idx="5" sz="quarter"/>
+            <p:ph type="sldNum" sz="quarter" idx="5"/>
           </p:nvPr>
         </p:nvSpPr>
         <p:spPr/>
@@ -822,7 +838,7 @@
 </file>
 
 <file path=ppt/notesSlides/notesSlide14.xml><?xml version="1.0" encoding="utf-8"?>
-<p:notes xmlns:a="http://schemas.openxmlformats.org/drawingml/2006/main" xmlns:p="http://schemas.openxmlformats.org/presentationml/2006/main" xmlns:r="http://schemas.openxmlformats.org/officeDocument/2006/relationships">
+<p:notes xmlns:a="http://schemas.openxmlformats.org/drawingml/2006/main" xmlns:r="http://schemas.openxmlformats.org/officeDocument/2006/relationships" xmlns:p="http://schemas.openxmlformats.org/presentationml/2006/main">
   <p:cSld>
     <p:spTree>
       <p:nvGrpSpPr>
@@ -857,7 +873,7 @@
             <a:spLocks noGrp="1"/>
           </p:cNvSpPr>
           <p:nvPr>
-            <p:ph type="body" idx="3" sz="quarter"/>
+            <p:ph type="body" sz="quarter" idx="3"/>
           </p:nvPr>
         </p:nvSpPr>
         <p:spPr/>
@@ -878,7 +894,7 @@
             <a:spLocks noGrp="1"/>
           </p:cNvSpPr>
           <p:nvPr>
-            <p:ph type="sldNum" idx="5" sz="quarter"/>
+            <p:ph type="sldNum" sz="quarter" idx="5"/>
           </p:nvPr>
         </p:nvSpPr>
         <p:spPr/>
@@ -892,7 +908,7 @@
 </file>
 
 <file path=ppt/notesSlides/notesSlide15.xml><?xml version="1.0" encoding="utf-8"?>
-<p:notes xmlns:a="http://schemas.openxmlformats.org/drawingml/2006/main" xmlns:p="http://schemas.openxmlformats.org/presentationml/2006/main" xmlns:r="http://schemas.openxmlformats.org/officeDocument/2006/relationships">
+<p:notes xmlns:a="http://schemas.openxmlformats.org/drawingml/2006/main" xmlns:r="http://schemas.openxmlformats.org/officeDocument/2006/relationships" xmlns:p="http://schemas.openxmlformats.org/presentationml/2006/main">
   <p:cSld>
     <p:spTree>
       <p:nvGrpSpPr>
@@ -927,7 +943,7 @@
             <a:spLocks noGrp="1"/>
           </p:cNvSpPr>
           <p:nvPr>
-            <p:ph type="body" idx="3" sz="quarter"/>
+            <p:ph type="body" sz="quarter" idx="3"/>
           </p:nvPr>
         </p:nvSpPr>
         <p:spPr/>
@@ -948,7 +964,7 @@
             <a:spLocks noGrp="1"/>
           </p:cNvSpPr>
           <p:nvPr>
-            <p:ph type="sldNum" idx="5" sz="quarter"/>
+            <p:ph type="sldNum" sz="quarter" idx="5"/>
           </p:nvPr>
         </p:nvSpPr>
         <p:spPr/>
@@ -962,7 +978,7 @@
 </file>
 
 <file path=ppt/notesSlides/notesSlide2.xml><?xml version="1.0" encoding="utf-8"?>
-<p:notes xmlns:a="http://schemas.openxmlformats.org/drawingml/2006/main" xmlns:p="http://schemas.openxmlformats.org/presentationml/2006/main" xmlns:r="http://schemas.openxmlformats.org/officeDocument/2006/relationships">
+<p:notes xmlns:a="http://schemas.openxmlformats.org/drawingml/2006/main" xmlns:r="http://schemas.openxmlformats.org/officeDocument/2006/relationships" xmlns:p="http://schemas.openxmlformats.org/presentationml/2006/main">
   <p:cSld>
     <p:spTree>
       <p:nvGrpSpPr>
@@ -997,7 +1013,7 @@
             <a:spLocks noGrp="1"/>
           </p:cNvSpPr>
           <p:nvPr>
-            <p:ph type="body" idx="3" sz="quarter"/>
+            <p:ph type="body" sz="quarter" idx="3"/>
           </p:nvPr>
         </p:nvSpPr>
         <p:spPr/>
@@ -1018,7 +1034,7 @@
             <a:spLocks noGrp="1"/>
           </p:cNvSpPr>
           <p:nvPr>
-            <p:ph type="sldNum" idx="5" sz="quarter"/>
+            <p:ph type="sldNum" sz="quarter" idx="5"/>
           </p:nvPr>
         </p:nvSpPr>
         <p:spPr/>
@@ -1032,7 +1048,7 @@
 </file>
 
 <file path=ppt/notesSlides/notesSlide3.xml><?xml version="1.0" encoding="utf-8"?>
-<p:notes xmlns:a="http://schemas.openxmlformats.org/drawingml/2006/main" xmlns:p="http://schemas.openxmlformats.org/presentationml/2006/main" xmlns:r="http://schemas.openxmlformats.org/officeDocument/2006/relationships">
+<p:notes xmlns:a="http://schemas.openxmlformats.org/drawingml/2006/main" xmlns:r="http://schemas.openxmlformats.org/officeDocument/2006/relationships" xmlns:p="http://schemas.openxmlformats.org/presentationml/2006/main">
   <p:cSld>
     <p:spTree>
       <p:nvGrpSpPr>
@@ -1067,7 +1083,7 @@
             <a:spLocks noGrp="1"/>
           </p:cNvSpPr>
           <p:nvPr>
-            <p:ph type="body" idx="3" sz="quarter"/>
+            <p:ph type="body" sz="quarter" idx="3"/>
           </p:nvPr>
         </p:nvSpPr>
         <p:spPr/>
@@ -1088,7 +1104,7 @@
             <a:spLocks noGrp="1"/>
           </p:cNvSpPr>
           <p:nvPr>
-            <p:ph type="sldNum" idx="5" sz="quarter"/>
+            <p:ph type="sldNum" sz="quarter" idx="5"/>
           </p:nvPr>
         </p:nvSpPr>
         <p:spPr/>
@@ -1102,7 +1118,7 @@
 </file>
 
 <file path=ppt/notesSlides/notesSlide4.xml><?xml version="1.0" encoding="utf-8"?>
-<p:notes xmlns:a="http://schemas.openxmlformats.org/drawingml/2006/main" xmlns:p="http://schemas.openxmlformats.org/presentationml/2006/main" xmlns:r="http://schemas.openxmlformats.org/officeDocument/2006/relationships">
+<p:notes xmlns:a="http://schemas.openxmlformats.org/drawingml/2006/main" xmlns:r="http://schemas.openxmlformats.org/officeDocument/2006/relationships" xmlns:p="http://schemas.openxmlformats.org/presentationml/2006/main">
   <p:cSld>
     <p:spTree>
       <p:nvGrpSpPr>
@@ -1137,7 +1153,7 @@
             <a:spLocks noGrp="1"/>
           </p:cNvSpPr>
           <p:nvPr>
-            <p:ph type="body" idx="3" sz="quarter"/>
+            <p:ph type="body" sz="quarter" idx="3"/>
           </p:nvPr>
         </p:nvSpPr>
         <p:spPr/>
@@ -1158,7 +1174,7 @@
             <a:spLocks noGrp="1"/>
           </p:cNvSpPr>
           <p:nvPr>
-            <p:ph type="sldNum" idx="5" sz="quarter"/>
+            <p:ph type="sldNum" sz="quarter" idx="5"/>
           </p:nvPr>
         </p:nvSpPr>
         <p:spPr/>
@@ -1172,7 +1188,7 @@
 </file>
 
 <file path=ppt/notesSlides/notesSlide5.xml><?xml version="1.0" encoding="utf-8"?>
-<p:notes xmlns:a="http://schemas.openxmlformats.org/drawingml/2006/main" xmlns:p="http://schemas.openxmlformats.org/presentationml/2006/main" xmlns:r="http://schemas.openxmlformats.org/officeDocument/2006/relationships">
+<p:notes xmlns:a="http://schemas.openxmlformats.org/drawingml/2006/main" xmlns:r="http://schemas.openxmlformats.org/officeDocument/2006/relationships" xmlns:p="http://schemas.openxmlformats.org/presentationml/2006/main">
   <p:cSld>
     <p:spTree>
       <p:nvGrpSpPr>
@@ -1207,7 +1223,7 @@
             <a:spLocks noGrp="1"/>
           </p:cNvSpPr>
           <p:nvPr>
-            <p:ph type="body" idx="3" sz="quarter"/>
+            <p:ph type="body" sz="quarter" idx="3"/>
           </p:nvPr>
         </p:nvSpPr>
         <p:spPr/>
@@ -1228,7 +1244,7 @@
             <a:spLocks noGrp="1"/>
           </p:cNvSpPr>
           <p:nvPr>
-            <p:ph type="sldNum" idx="5" sz="quarter"/>
+            <p:ph type="sldNum" sz="quarter" idx="5"/>
           </p:nvPr>
         </p:nvSpPr>
         <p:spPr/>
@@ -1242,7 +1258,7 @@
 </file>
 
 <file path=ppt/notesSlides/notesSlide6.xml><?xml version="1.0" encoding="utf-8"?>
-<p:notes xmlns:a="http://schemas.openxmlformats.org/drawingml/2006/main" xmlns:p="http://schemas.openxmlformats.org/presentationml/2006/main" xmlns:r="http://schemas.openxmlformats.org/officeDocument/2006/relationships">
+<p:notes xmlns:a="http://schemas.openxmlformats.org/drawingml/2006/main" xmlns:r="http://schemas.openxmlformats.org/officeDocument/2006/relationships" xmlns:p="http://schemas.openxmlformats.org/presentationml/2006/main">
   <p:cSld>
     <p:spTree>
       <p:nvGrpSpPr>
@@ -1277,7 +1293,7 @@
             <a:spLocks noGrp="1"/>
           </p:cNvSpPr>
           <p:nvPr>
-            <p:ph type="body" idx="3" sz="quarter"/>
+            <p:ph type="body" sz="quarter" idx="3"/>
           </p:nvPr>
         </p:nvSpPr>
         <p:spPr/>
@@ -1298,7 +1314,7 @@
             <a:spLocks noGrp="1"/>
           </p:cNvSpPr>
           <p:nvPr>
-            <p:ph type="sldNum" idx="5" sz="quarter"/>
+            <p:ph type="sldNum" sz="quarter" idx="5"/>
           </p:nvPr>
         </p:nvSpPr>
         <p:spPr/>
@@ -1312,7 +1328,7 @@
 </file>
 
 <file path=ppt/notesSlides/notesSlide7.xml><?xml version="1.0" encoding="utf-8"?>
-<p:notes xmlns:a="http://schemas.openxmlformats.org/drawingml/2006/main" xmlns:p="http://schemas.openxmlformats.org/presentationml/2006/main" xmlns:r="http://schemas.openxmlformats.org/officeDocument/2006/relationships">
+<p:notes xmlns:a="http://schemas.openxmlformats.org/drawingml/2006/main" xmlns:r="http://schemas.openxmlformats.org/officeDocument/2006/relationships" xmlns:p="http://schemas.openxmlformats.org/presentationml/2006/main">
   <p:cSld>
     <p:spTree>
       <p:nvGrpSpPr>
@@ -1347,7 +1363,7 @@
             <a:spLocks noGrp="1"/>
           </p:cNvSpPr>
           <p:nvPr>
-            <p:ph type="body" idx="3" sz="quarter"/>
+            <p:ph type="body" sz="quarter" idx="3"/>
           </p:nvPr>
         </p:nvSpPr>
         <p:spPr/>
@@ -1368,7 +1384,7 @@
             <a:spLocks noGrp="1"/>
           </p:cNvSpPr>
           <p:nvPr>
-            <p:ph type="sldNum" idx="5" sz="quarter"/>
+            <p:ph type="sldNum" sz="quarter" idx="5"/>
           </p:nvPr>
         </p:nvSpPr>
         <p:spPr/>
@@ -1382,7 +1398,7 @@
 </file>
 
 <file path=ppt/notesSlides/notesSlide8.xml><?xml version="1.0" encoding="utf-8"?>
-<p:notes xmlns:a="http://schemas.openxmlformats.org/drawingml/2006/main" xmlns:p="http://schemas.openxmlformats.org/presentationml/2006/main" xmlns:r="http://schemas.openxmlformats.org/officeDocument/2006/relationships">
+<p:notes xmlns:a="http://schemas.openxmlformats.org/drawingml/2006/main" xmlns:r="http://schemas.openxmlformats.org/officeDocument/2006/relationships" xmlns:p="http://schemas.openxmlformats.org/presentationml/2006/main">
   <p:cSld>
     <p:spTree>
       <p:nvGrpSpPr>
@@ -1417,7 +1433,7 @@
             <a:spLocks noGrp="1"/>
           </p:cNvSpPr>
           <p:nvPr>
-            <p:ph type="body" idx="3" sz="quarter"/>
+            <p:ph type="body" sz="quarter" idx="3"/>
           </p:nvPr>
         </p:nvSpPr>
         <p:spPr/>
@@ -1438,7 +1454,7 @@
             <a:spLocks noGrp="1"/>
           </p:cNvSpPr>
           <p:nvPr>
-            <p:ph type="sldNum" idx="5" sz="quarter"/>
+            <p:ph type="sldNum" sz="quarter" idx="5"/>
           </p:nvPr>
         </p:nvSpPr>
         <p:spPr/>
@@ -1452,7 +1468,7 @@
 </file>
 
 <file path=ppt/notesSlides/notesSlide9.xml><?xml version="1.0" encoding="utf-8"?>
-<p:notes xmlns:a="http://schemas.openxmlformats.org/drawingml/2006/main" xmlns:p="http://schemas.openxmlformats.org/presentationml/2006/main" xmlns:r="http://schemas.openxmlformats.org/officeDocument/2006/relationships">
+<p:notes xmlns:a="http://schemas.openxmlformats.org/drawingml/2006/main" xmlns:r="http://schemas.openxmlformats.org/officeDocument/2006/relationships" xmlns:p="http://schemas.openxmlformats.org/presentationml/2006/main">
   <p:cSld>
     <p:spTree>
       <p:nvGrpSpPr>
@@ -1487,7 +1503,7 @@
             <a:spLocks noGrp="1"/>
           </p:cNvSpPr>
           <p:nvPr>
-            <p:ph type="body" idx="3" sz="quarter"/>
+            <p:ph type="body" sz="quarter" idx="3"/>
           </p:nvPr>
         </p:nvSpPr>
         <p:spPr/>
@@ -1508,7 +1524,7 @@
             <a:spLocks noGrp="1"/>
           </p:cNvSpPr>
           <p:nvPr>
-            <p:ph type="sldNum" idx="5" sz="quarter"/>
+            <p:ph type="sldNum" sz="quarter" idx="5"/>
           </p:nvPr>
         </p:nvSpPr>
         <p:spPr/>
@@ -1702,7 +1718,6 @@
           <a:p>
             <a:fld id="{5BCAD085-E8A6-8845-BD4E-CB4CCA059FC4}" type="datetimeFigureOut">
               <a:rPr lang="en-US" smtClean="0"/>
-              <a:t>1/27/13</a:t>
             </a:fld>
             <a:endParaRPr lang="en-US"/>
           </a:p>
@@ -1744,18 +1759,12 @@
           <a:p>
             <a:fld id="{C1FF6DA9-008F-8B48-92A6-B652298478BF}" type="slidenum">
               <a:rPr lang="en-US" smtClean="0"/>
-              <a:t>‹#›</a:t>
             </a:fld>
             <a:endParaRPr lang="en-US"/>
           </a:p>
         </p:txBody>
       </p:sp>
     </p:spTree>
-    <p:extLst>
-      <p:ext uri="{BB962C8B-B14F-4D97-AF65-F5344CB8AC3E}">
-        <p14:creationId xmlns:p14="http://schemas.microsoft.com/office/powerpoint/2010/main" val="3168075583"/>
-      </p:ext>
-    </p:extLst>
   </p:cSld>
   <p:clrMapOvr>
     <a:masterClrMapping/>
@@ -1823,6 +1832,7 @@
               <a:rPr lang="en-US" smtClean="0"/>
               <a:t>Click to edit Master text styles</a:t>
             </a:r>
+            <a:endParaRPr lang="en-US" smtClean="0"/>
           </a:p>
           <a:p>
             <a:pPr lvl="1"/>
@@ -1830,6 +1840,7 @@
               <a:rPr lang="en-US" smtClean="0"/>
               <a:t>Second level</a:t>
             </a:r>
+            <a:endParaRPr lang="en-US" smtClean="0"/>
           </a:p>
           <a:p>
             <a:pPr lvl="2"/>
@@ -1837,6 +1848,7 @@
               <a:rPr lang="en-US" smtClean="0"/>
               <a:t>Third level</a:t>
             </a:r>
+            <a:endParaRPr lang="en-US" smtClean="0"/>
           </a:p>
           <a:p>
             <a:pPr lvl="3"/>
@@ -1844,6 +1856,7 @@
               <a:rPr lang="en-US" smtClean="0"/>
               <a:t>Fourth level</a:t>
             </a:r>
+            <a:endParaRPr lang="en-US" smtClean="0"/>
           </a:p>
           <a:p>
             <a:pPr lvl="4"/>
@@ -1872,7 +1885,6 @@
           <a:p>
             <a:fld id="{5BCAD085-E8A6-8845-BD4E-CB4CCA059FC4}" type="datetimeFigureOut">
               <a:rPr lang="en-US" smtClean="0"/>
-              <a:t>1/27/13</a:t>
             </a:fld>
             <a:endParaRPr lang="en-US"/>
           </a:p>
@@ -1914,18 +1926,12 @@
           <a:p>
             <a:fld id="{C1FF6DA9-008F-8B48-92A6-B652298478BF}" type="slidenum">
               <a:rPr lang="en-US" smtClean="0"/>
-              <a:t>‹#›</a:t>
             </a:fld>
             <a:endParaRPr lang="en-US"/>
           </a:p>
         </p:txBody>
       </p:sp>
     </p:spTree>
-    <p:extLst>
-      <p:ext uri="{BB962C8B-B14F-4D97-AF65-F5344CB8AC3E}">
-        <p14:creationId xmlns:p14="http://schemas.microsoft.com/office/powerpoint/2010/main" val="2910927964"/>
-      </p:ext>
-    </p:extLst>
   </p:cSld>
   <p:clrMapOvr>
     <a:masterClrMapping/>
@@ -2003,6 +2009,7 @@
               <a:rPr lang="en-US" smtClean="0"/>
               <a:t>Click to edit Master text styles</a:t>
             </a:r>
+            <a:endParaRPr lang="en-US" smtClean="0"/>
           </a:p>
           <a:p>
             <a:pPr lvl="1"/>
@@ -2010,6 +2017,7 @@
               <a:rPr lang="en-US" smtClean="0"/>
               <a:t>Second level</a:t>
             </a:r>
+            <a:endParaRPr lang="en-US" smtClean="0"/>
           </a:p>
           <a:p>
             <a:pPr lvl="2"/>
@@ -2017,6 +2025,7 @@
               <a:rPr lang="en-US" smtClean="0"/>
               <a:t>Third level</a:t>
             </a:r>
+            <a:endParaRPr lang="en-US" smtClean="0"/>
           </a:p>
           <a:p>
             <a:pPr lvl="3"/>
@@ -2024,6 +2033,7 @@
               <a:rPr lang="en-US" smtClean="0"/>
               <a:t>Fourth level</a:t>
             </a:r>
+            <a:endParaRPr lang="en-US" smtClean="0"/>
           </a:p>
           <a:p>
             <a:pPr lvl="4"/>
@@ -2052,7 +2062,6 @@
           <a:p>
             <a:fld id="{5BCAD085-E8A6-8845-BD4E-CB4CCA059FC4}" type="datetimeFigureOut">
               <a:rPr lang="en-US" smtClean="0"/>
-              <a:t>1/27/13</a:t>
             </a:fld>
             <a:endParaRPr lang="en-US"/>
           </a:p>
@@ -2094,18 +2103,12 @@
           <a:p>
             <a:fld id="{C1FF6DA9-008F-8B48-92A6-B652298478BF}" type="slidenum">
               <a:rPr lang="en-US" smtClean="0"/>
-              <a:t>‹#›</a:t>
             </a:fld>
             <a:endParaRPr lang="en-US"/>
           </a:p>
         </p:txBody>
       </p:sp>
     </p:spTree>
-    <p:extLst>
-      <p:ext uri="{BB962C8B-B14F-4D97-AF65-F5344CB8AC3E}">
-        <p14:creationId xmlns:p14="http://schemas.microsoft.com/office/powerpoint/2010/main" val="3612223792"/>
-      </p:ext>
-    </p:extLst>
   </p:cSld>
   <p:clrMapOvr>
     <a:masterClrMapping/>
@@ -2173,6 +2176,7 @@
               <a:rPr lang="en-US" smtClean="0"/>
               <a:t>Click to edit Master text styles</a:t>
             </a:r>
+            <a:endParaRPr lang="en-US" smtClean="0"/>
           </a:p>
           <a:p>
             <a:pPr lvl="1"/>
@@ -2180,6 +2184,7 @@
               <a:rPr lang="en-US" smtClean="0"/>
               <a:t>Second level</a:t>
             </a:r>
+            <a:endParaRPr lang="en-US" smtClean="0"/>
           </a:p>
           <a:p>
             <a:pPr lvl="2"/>
@@ -2187,6 +2192,7 @@
               <a:rPr lang="en-US" smtClean="0"/>
               <a:t>Third level</a:t>
             </a:r>
+            <a:endParaRPr lang="en-US" smtClean="0"/>
           </a:p>
           <a:p>
             <a:pPr lvl="3"/>
@@ -2194,6 +2200,7 @@
               <a:rPr lang="en-US" smtClean="0"/>
               <a:t>Fourth level</a:t>
             </a:r>
+            <a:endParaRPr lang="en-US" smtClean="0"/>
           </a:p>
           <a:p>
             <a:pPr lvl="4"/>
@@ -2222,7 +2229,6 @@
           <a:p>
             <a:fld id="{5BCAD085-E8A6-8845-BD4E-CB4CCA059FC4}" type="datetimeFigureOut">
               <a:rPr lang="en-US" smtClean="0"/>
-              <a:t>1/27/13</a:t>
             </a:fld>
             <a:endParaRPr lang="en-US"/>
           </a:p>
@@ -2264,18 +2270,12 @@
           <a:p>
             <a:fld id="{C1FF6DA9-008F-8B48-92A6-B652298478BF}" type="slidenum">
               <a:rPr lang="en-US" smtClean="0"/>
-              <a:t>‹#›</a:t>
             </a:fld>
             <a:endParaRPr lang="en-US"/>
           </a:p>
         </p:txBody>
       </p:sp>
     </p:spTree>
-    <p:extLst>
-      <p:ext uri="{BB962C8B-B14F-4D97-AF65-F5344CB8AC3E}">
-        <p14:creationId xmlns:p14="http://schemas.microsoft.com/office/powerpoint/2010/main" val="2614314258"/>
-      </p:ext>
-    </p:extLst>
   </p:cSld>
   <p:clrMapOvr>
     <a:masterClrMapping/>
@@ -2448,6 +2448,7 @@
               <a:rPr lang="en-US" smtClean="0"/>
               <a:t>Click to edit Master text styles</a:t>
             </a:r>
+            <a:endParaRPr lang="en-US" smtClean="0"/>
           </a:p>
         </p:txBody>
       </p:sp>
@@ -2468,7 +2469,6 @@
           <a:p>
             <a:fld id="{5BCAD085-E8A6-8845-BD4E-CB4CCA059FC4}" type="datetimeFigureOut">
               <a:rPr lang="en-US" smtClean="0"/>
-              <a:t>1/27/13</a:t>
             </a:fld>
             <a:endParaRPr lang="en-US"/>
           </a:p>
@@ -2510,18 +2510,12 @@
           <a:p>
             <a:fld id="{C1FF6DA9-008F-8B48-92A6-B652298478BF}" type="slidenum">
               <a:rPr lang="en-US" smtClean="0"/>
-              <a:t>‹#›</a:t>
             </a:fld>
             <a:endParaRPr lang="en-US"/>
           </a:p>
         </p:txBody>
       </p:sp>
     </p:spTree>
-    <p:extLst>
-      <p:ext uri="{BB962C8B-B14F-4D97-AF65-F5344CB8AC3E}">
-        <p14:creationId xmlns:p14="http://schemas.microsoft.com/office/powerpoint/2010/main" val="960648375"/>
-      </p:ext>
-    </p:extLst>
   </p:cSld>
   <p:clrMapOvr>
     <a:masterClrMapping/>
@@ -2622,6 +2616,7 @@
               <a:rPr lang="en-US" smtClean="0"/>
               <a:t>Click to edit Master text styles</a:t>
             </a:r>
+            <a:endParaRPr lang="en-US" smtClean="0"/>
           </a:p>
           <a:p>
             <a:pPr lvl="1"/>
@@ -2629,6 +2624,7 @@
               <a:rPr lang="en-US" smtClean="0"/>
               <a:t>Second level</a:t>
             </a:r>
+            <a:endParaRPr lang="en-US" smtClean="0"/>
           </a:p>
           <a:p>
             <a:pPr lvl="2"/>
@@ -2636,6 +2632,7 @@
               <a:rPr lang="en-US" smtClean="0"/>
               <a:t>Third level</a:t>
             </a:r>
+            <a:endParaRPr lang="en-US" smtClean="0"/>
           </a:p>
           <a:p>
             <a:pPr lvl="3"/>
@@ -2643,6 +2640,7 @@
               <a:rPr lang="en-US" smtClean="0"/>
               <a:t>Fourth level</a:t>
             </a:r>
+            <a:endParaRPr lang="en-US" smtClean="0"/>
           </a:p>
           <a:p>
             <a:pPr lvl="4"/>
@@ -2707,6 +2705,7 @@
               <a:rPr lang="en-US" smtClean="0"/>
               <a:t>Click to edit Master text styles</a:t>
             </a:r>
+            <a:endParaRPr lang="en-US" smtClean="0"/>
           </a:p>
           <a:p>
             <a:pPr lvl="1"/>
@@ -2714,6 +2713,7 @@
               <a:rPr lang="en-US" smtClean="0"/>
               <a:t>Second level</a:t>
             </a:r>
+            <a:endParaRPr lang="en-US" smtClean="0"/>
           </a:p>
           <a:p>
             <a:pPr lvl="2"/>
@@ -2721,6 +2721,7 @@
               <a:rPr lang="en-US" smtClean="0"/>
               <a:t>Third level</a:t>
             </a:r>
+            <a:endParaRPr lang="en-US" smtClean="0"/>
           </a:p>
           <a:p>
             <a:pPr lvl="3"/>
@@ -2728,6 +2729,7 @@
               <a:rPr lang="en-US" smtClean="0"/>
               <a:t>Fourth level</a:t>
             </a:r>
+            <a:endParaRPr lang="en-US" smtClean="0"/>
           </a:p>
           <a:p>
             <a:pPr lvl="4"/>
@@ -2756,7 +2758,6 @@
           <a:p>
             <a:fld id="{5BCAD085-E8A6-8845-BD4E-CB4CCA059FC4}" type="datetimeFigureOut">
               <a:rPr lang="en-US" smtClean="0"/>
-              <a:t>1/27/13</a:t>
             </a:fld>
             <a:endParaRPr lang="en-US"/>
           </a:p>
@@ -2798,18 +2799,12 @@
           <a:p>
             <a:fld id="{C1FF6DA9-008F-8B48-92A6-B652298478BF}" type="slidenum">
               <a:rPr lang="en-US" smtClean="0"/>
-              <a:t>‹#›</a:t>
             </a:fld>
             <a:endParaRPr lang="en-US"/>
           </a:p>
         </p:txBody>
       </p:sp>
     </p:spTree>
-    <p:extLst>
-      <p:ext uri="{BB962C8B-B14F-4D97-AF65-F5344CB8AC3E}">
-        <p14:creationId xmlns:p14="http://schemas.microsoft.com/office/powerpoint/2010/main" val="2782244947"/>
-      </p:ext>
-    </p:extLst>
   </p:cSld>
   <p:clrMapOvr>
     <a:masterClrMapping/>
@@ -2923,6 +2918,7 @@
               <a:rPr lang="en-US" smtClean="0"/>
               <a:t>Click to edit Master text styles</a:t>
             </a:r>
+            <a:endParaRPr lang="en-US" smtClean="0"/>
           </a:p>
         </p:txBody>
       </p:sp>
@@ -2979,6 +2975,7 @@
               <a:rPr lang="en-US" smtClean="0"/>
               <a:t>Click to edit Master text styles</a:t>
             </a:r>
+            <a:endParaRPr lang="en-US" smtClean="0"/>
           </a:p>
           <a:p>
             <a:pPr lvl="1"/>
@@ -2986,6 +2983,7 @@
               <a:rPr lang="en-US" smtClean="0"/>
               <a:t>Second level</a:t>
             </a:r>
+            <a:endParaRPr lang="en-US" smtClean="0"/>
           </a:p>
           <a:p>
             <a:pPr lvl="2"/>
@@ -2993,6 +2991,7 @@
               <a:rPr lang="en-US" smtClean="0"/>
               <a:t>Third level</a:t>
             </a:r>
+            <a:endParaRPr lang="en-US" smtClean="0"/>
           </a:p>
           <a:p>
             <a:pPr lvl="3"/>
@@ -3000,6 +2999,7 @@
               <a:rPr lang="en-US" smtClean="0"/>
               <a:t>Fourth level</a:t>
             </a:r>
+            <a:endParaRPr lang="en-US" smtClean="0"/>
           </a:p>
           <a:p>
             <a:pPr lvl="4"/>
@@ -3073,6 +3073,7 @@
               <a:rPr lang="en-US" smtClean="0"/>
               <a:t>Click to edit Master text styles</a:t>
             </a:r>
+            <a:endParaRPr lang="en-US" smtClean="0"/>
           </a:p>
         </p:txBody>
       </p:sp>
@@ -3129,6 +3130,7 @@
               <a:rPr lang="en-US" smtClean="0"/>
               <a:t>Click to edit Master text styles</a:t>
             </a:r>
+            <a:endParaRPr lang="en-US" smtClean="0"/>
           </a:p>
           <a:p>
             <a:pPr lvl="1"/>
@@ -3136,6 +3138,7 @@
               <a:rPr lang="en-US" smtClean="0"/>
               <a:t>Second level</a:t>
             </a:r>
+            <a:endParaRPr lang="en-US" smtClean="0"/>
           </a:p>
           <a:p>
             <a:pPr lvl="2"/>
@@ -3143,6 +3146,7 @@
               <a:rPr lang="en-US" smtClean="0"/>
               <a:t>Third level</a:t>
             </a:r>
+            <a:endParaRPr lang="en-US" smtClean="0"/>
           </a:p>
           <a:p>
             <a:pPr lvl="3"/>
@@ -3150,6 +3154,7 @@
               <a:rPr lang="en-US" smtClean="0"/>
               <a:t>Fourth level</a:t>
             </a:r>
+            <a:endParaRPr lang="en-US" smtClean="0"/>
           </a:p>
           <a:p>
             <a:pPr lvl="4"/>
@@ -3178,7 +3183,6 @@
           <a:p>
             <a:fld id="{5BCAD085-E8A6-8845-BD4E-CB4CCA059FC4}" type="datetimeFigureOut">
               <a:rPr lang="en-US" smtClean="0"/>
-              <a:t>1/27/13</a:t>
             </a:fld>
             <a:endParaRPr lang="en-US"/>
           </a:p>
@@ -3220,18 +3224,12 @@
           <a:p>
             <a:fld id="{C1FF6DA9-008F-8B48-92A6-B652298478BF}" type="slidenum">
               <a:rPr lang="en-US" smtClean="0"/>
-              <a:t>‹#›</a:t>
             </a:fld>
             <a:endParaRPr lang="en-US"/>
           </a:p>
         </p:txBody>
       </p:sp>
     </p:spTree>
-    <p:extLst>
-      <p:ext uri="{BB962C8B-B14F-4D97-AF65-F5344CB8AC3E}">
-        <p14:creationId xmlns:p14="http://schemas.microsoft.com/office/powerpoint/2010/main" val="990158736"/>
-      </p:ext>
-    </p:extLst>
   </p:cSld>
   <p:clrMapOvr>
     <a:masterClrMapping/>
@@ -3296,7 +3294,6 @@
           <a:p>
             <a:fld id="{5BCAD085-E8A6-8845-BD4E-CB4CCA059FC4}" type="datetimeFigureOut">
               <a:rPr lang="en-US" smtClean="0"/>
-              <a:t>1/27/13</a:t>
             </a:fld>
             <a:endParaRPr lang="en-US"/>
           </a:p>
@@ -3338,18 +3335,12 @@
           <a:p>
             <a:fld id="{C1FF6DA9-008F-8B48-92A6-B652298478BF}" type="slidenum">
               <a:rPr lang="en-US" smtClean="0"/>
-              <a:t>‹#›</a:t>
             </a:fld>
             <a:endParaRPr lang="en-US"/>
           </a:p>
         </p:txBody>
       </p:sp>
     </p:spTree>
-    <p:extLst>
-      <p:ext uri="{BB962C8B-B14F-4D97-AF65-F5344CB8AC3E}">
-        <p14:creationId xmlns:p14="http://schemas.microsoft.com/office/powerpoint/2010/main" val="727027711"/>
-      </p:ext>
-    </p:extLst>
   </p:cSld>
   <p:clrMapOvr>
     <a:masterClrMapping/>
@@ -3391,7 +3382,6 @@
           <a:p>
             <a:fld id="{5BCAD085-E8A6-8845-BD4E-CB4CCA059FC4}" type="datetimeFigureOut">
               <a:rPr lang="en-US" smtClean="0"/>
-              <a:t>1/27/13</a:t>
             </a:fld>
             <a:endParaRPr lang="en-US"/>
           </a:p>
@@ -3433,18 +3423,12 @@
           <a:p>
             <a:fld id="{C1FF6DA9-008F-8B48-92A6-B652298478BF}" type="slidenum">
               <a:rPr lang="en-US" smtClean="0"/>
-              <a:t>‹#›</a:t>
             </a:fld>
             <a:endParaRPr lang="en-US"/>
           </a:p>
         </p:txBody>
       </p:sp>
     </p:spTree>
-    <p:extLst>
-      <p:ext uri="{BB962C8B-B14F-4D97-AF65-F5344CB8AC3E}">
-        <p14:creationId xmlns:p14="http://schemas.microsoft.com/office/powerpoint/2010/main" val="1212999818"/>
-      </p:ext>
-    </p:extLst>
   </p:cSld>
   <p:clrMapOvr>
     <a:masterClrMapping/>
@@ -3554,6 +3538,7 @@
               <a:rPr lang="en-US" smtClean="0"/>
               <a:t>Click to edit Master text styles</a:t>
             </a:r>
+            <a:endParaRPr lang="en-US" smtClean="0"/>
           </a:p>
           <a:p>
             <a:pPr lvl="1"/>
@@ -3561,6 +3546,7 @@
               <a:rPr lang="en-US" smtClean="0"/>
               <a:t>Second level</a:t>
             </a:r>
+            <a:endParaRPr lang="en-US" smtClean="0"/>
           </a:p>
           <a:p>
             <a:pPr lvl="2"/>
@@ -3568,6 +3554,7 @@
               <a:rPr lang="en-US" smtClean="0"/>
               <a:t>Third level</a:t>
             </a:r>
+            <a:endParaRPr lang="en-US" smtClean="0"/>
           </a:p>
           <a:p>
             <a:pPr lvl="3"/>
@@ -3575,6 +3562,7 @@
               <a:rPr lang="en-US" smtClean="0"/>
               <a:t>Fourth level</a:t>
             </a:r>
+            <a:endParaRPr lang="en-US" smtClean="0"/>
           </a:p>
           <a:p>
             <a:pPr lvl="4"/>
@@ -3648,6 +3636,7 @@
               <a:rPr lang="en-US" smtClean="0"/>
               <a:t>Click to edit Master text styles</a:t>
             </a:r>
+            <a:endParaRPr lang="en-US" smtClean="0"/>
           </a:p>
         </p:txBody>
       </p:sp>
@@ -3668,7 +3657,6 @@
           <a:p>
             <a:fld id="{5BCAD085-E8A6-8845-BD4E-CB4CCA059FC4}" type="datetimeFigureOut">
               <a:rPr lang="en-US" smtClean="0"/>
-              <a:t>1/27/13</a:t>
             </a:fld>
             <a:endParaRPr lang="en-US"/>
           </a:p>
@@ -3710,18 +3698,12 @@
           <a:p>
             <a:fld id="{C1FF6DA9-008F-8B48-92A6-B652298478BF}" type="slidenum">
               <a:rPr lang="en-US" smtClean="0"/>
-              <a:t>‹#›</a:t>
             </a:fld>
             <a:endParaRPr lang="en-US"/>
           </a:p>
         </p:txBody>
       </p:sp>
     </p:spTree>
-    <p:extLst>
-      <p:ext uri="{BB962C8B-B14F-4D97-AF65-F5344CB8AC3E}">
-        <p14:creationId xmlns:p14="http://schemas.microsoft.com/office/powerpoint/2010/main" val="1840726560"/>
-      </p:ext>
-    </p:extLst>
   </p:cSld>
   <p:clrMapOvr>
     <a:masterClrMapping/>
@@ -3901,6 +3883,7 @@
               <a:rPr lang="en-US" smtClean="0"/>
               <a:t>Click to edit Master text styles</a:t>
             </a:r>
+            <a:endParaRPr lang="en-US" smtClean="0"/>
           </a:p>
         </p:txBody>
       </p:sp>
@@ -3921,7 +3904,6 @@
           <a:p>
             <a:fld id="{5BCAD085-E8A6-8845-BD4E-CB4CCA059FC4}" type="datetimeFigureOut">
               <a:rPr lang="en-US" smtClean="0"/>
-              <a:t>1/27/13</a:t>
             </a:fld>
             <a:endParaRPr lang="en-US"/>
           </a:p>
@@ -3963,18 +3945,12 @@
           <a:p>
             <a:fld id="{C1FF6DA9-008F-8B48-92A6-B652298478BF}" type="slidenum">
               <a:rPr lang="en-US" smtClean="0"/>
-              <a:t>‹#›</a:t>
             </a:fld>
             <a:endParaRPr lang="en-US"/>
           </a:p>
         </p:txBody>
       </p:sp>
     </p:spTree>
-    <p:extLst>
-      <p:ext uri="{BB962C8B-B14F-4D97-AF65-F5344CB8AC3E}">
-        <p14:creationId xmlns:p14="http://schemas.microsoft.com/office/powerpoint/2010/main" val="3889236939"/>
-      </p:ext>
-    </p:extLst>
   </p:cSld>
   <p:clrMapOvr>
     <a:masterClrMapping/>
@@ -4067,6 +4043,7 @@
               <a:rPr lang="en-US" smtClean="0"/>
               <a:t>Click to edit Master text styles</a:t>
             </a:r>
+            <a:endParaRPr lang="en-US" smtClean="0"/>
           </a:p>
           <a:p>
             <a:pPr lvl="1"/>
@@ -4074,6 +4051,7 @@
               <a:rPr lang="en-US" smtClean="0"/>
               <a:t>Second level</a:t>
             </a:r>
+            <a:endParaRPr lang="en-US" smtClean="0"/>
           </a:p>
           <a:p>
             <a:pPr lvl="2"/>
@@ -4081,6 +4059,7 @@
               <a:rPr lang="en-US" smtClean="0"/>
               <a:t>Third level</a:t>
             </a:r>
+            <a:endParaRPr lang="en-US" smtClean="0"/>
           </a:p>
           <a:p>
             <a:pPr lvl="3"/>
@@ -4088,6 +4067,7 @@
               <a:rPr lang="en-US" smtClean="0"/>
               <a:t>Fourth level</a:t>
             </a:r>
+            <a:endParaRPr lang="en-US" smtClean="0"/>
           </a:p>
           <a:p>
             <a:pPr lvl="4"/>
@@ -4134,7 +4114,6 @@
           <a:p>
             <a:fld id="{5BCAD085-E8A6-8845-BD4E-CB4CCA059FC4}" type="datetimeFigureOut">
               <a:rPr lang="en-US" smtClean="0"/>
-              <a:t>1/27/13</a:t>
             </a:fld>
             <a:endParaRPr lang="en-US"/>
           </a:p>
@@ -4212,18 +4191,12 @@
           <a:p>
             <a:fld id="{C1FF6DA9-008F-8B48-92A6-B652298478BF}" type="slidenum">
               <a:rPr lang="en-US" smtClean="0"/>
-              <a:t>‹#›</a:t>
             </a:fld>
             <a:endParaRPr lang="en-US"/>
           </a:p>
         </p:txBody>
       </p:sp>
     </p:spTree>
-    <p:extLst>
-      <p:ext uri="{BB962C8B-B14F-4D97-AF65-F5344CB8AC3E}">
-        <p14:creationId xmlns:p14="http://schemas.microsoft.com/office/powerpoint/2010/main" val="2209977519"/>
-      </p:ext>
-    </p:extLst>
   </p:cSld>
   <p:clrMap bg1="lt1" tx1="dk1" bg2="lt2" tx2="dk2" accent1="accent1" accent2="accent2" accent3="accent3" accent4="accent4" accent5="accent5" accent6="accent6" hlink="hlink" folHlink="folHlink"/>
   <p:sldLayoutIdLst>
@@ -4261,7 +4234,7 @@
         <a:spcBef>
           <a:spcPct val="20000"/>
         </a:spcBef>
-        <a:buFont typeface="Arial"/>
+        <a:buFont typeface="Arial" panose="020B0604020202020204"/>
         <a:buChar char="•"/>
         <a:defRPr sz="3200" kern="1200">
           <a:solidFill>
@@ -4276,7 +4249,7 @@
         <a:spcBef>
           <a:spcPct val="20000"/>
         </a:spcBef>
-        <a:buFont typeface="Arial"/>
+        <a:buFont typeface="Arial" panose="020B0604020202020204"/>
         <a:buChar char="–"/>
         <a:defRPr sz="2800" kern="1200">
           <a:solidFill>
@@ -4291,7 +4264,7 @@
         <a:spcBef>
           <a:spcPct val="20000"/>
         </a:spcBef>
-        <a:buFont typeface="Arial"/>
+        <a:buFont typeface="Arial" panose="020B0604020202020204"/>
         <a:buChar char="•"/>
         <a:defRPr sz="2400" kern="1200">
           <a:solidFill>
@@ -4306,7 +4279,7 @@
         <a:spcBef>
           <a:spcPct val="20000"/>
         </a:spcBef>
-        <a:buFont typeface="Arial"/>
+        <a:buFont typeface="Arial" panose="020B0604020202020204"/>
         <a:buChar char="–"/>
         <a:defRPr sz="2000" kern="1200">
           <a:solidFill>
@@ -4321,7 +4294,7 @@
         <a:spcBef>
           <a:spcPct val="20000"/>
         </a:spcBef>
-        <a:buFont typeface="Arial"/>
+        <a:buFont typeface="Arial" panose="020B0604020202020204"/>
         <a:buChar char="»"/>
         <a:defRPr sz="2000" kern="1200">
           <a:solidFill>
@@ -4336,7 +4309,7 @@
         <a:spcBef>
           <a:spcPct val="20000"/>
         </a:spcBef>
-        <a:buFont typeface="Arial"/>
+        <a:buFont typeface="Arial" panose="020B0604020202020204"/>
         <a:buChar char="•"/>
         <a:defRPr sz="2000" kern="1200">
           <a:solidFill>
@@ -4351,7 +4324,7 @@
         <a:spcBef>
           <a:spcPct val="20000"/>
         </a:spcBef>
-        <a:buFont typeface="Arial"/>
+        <a:buFont typeface="Arial" panose="020B0604020202020204"/>
         <a:buChar char="•"/>
         <a:defRPr sz="2000" kern="1200">
           <a:solidFill>
@@ -4366,7 +4339,7 @@
         <a:spcBef>
           <a:spcPct val="20000"/>
         </a:spcBef>
-        <a:buFont typeface="Arial"/>
+        <a:buFont typeface="Arial" panose="020B0604020202020204"/>
         <a:buChar char="•"/>
         <a:defRPr sz="2000" kern="1200">
           <a:solidFill>
@@ -4381,7 +4354,7 @@
         <a:spcBef>
           <a:spcPct val="20000"/>
         </a:spcBef>
-        <a:buFont typeface="Arial"/>
+        <a:buFont typeface="Arial" panose="020B0604020202020204"/>
         <a:buChar char="•"/>
         <a:defRPr sz="2000" kern="1200">
           <a:solidFill>
@@ -4493,7 +4466,7 @@
 </file>
 
 <file path=ppt/slides/slide1.xml><?xml version="1.0" encoding="utf-8"?>
-<p:sld xmlns:a="http://schemas.openxmlformats.org/drawingml/2006/main" xmlns:p="http://schemas.openxmlformats.org/presentationml/2006/main" xmlns:r="http://schemas.openxmlformats.org/officeDocument/2006/relationships">
+<p:sld xmlns:a="http://schemas.openxmlformats.org/drawingml/2006/main" xmlns:r="http://schemas.openxmlformats.org/officeDocument/2006/relationships" xmlns:p="http://schemas.openxmlformats.org/presentationml/2006/main">
   <p:cSld>
     <p:bg>
       <p:bgPr>
@@ -4583,7 +4556,7 @@
                 <a:solidFill>
                   <a:srgbClr val="FFFFFF"/>
                 </a:solidFill>
-                <a:latin typeface="Segoe UI"/>
+                <a:latin typeface="Segoe UI" panose="020B0502040204020203"/>
               </a:defRPr>
             </a:pPr>
             <a:r>
@@ -4619,7 +4592,7 @@
                 <a:solidFill>
                   <a:srgbClr val="48CAE4"/>
                 </a:solidFill>
-                <a:latin typeface="Segoe UI"/>
+                <a:latin typeface="Segoe UI" panose="020B0502040204020203"/>
               </a:defRPr>
             </a:pPr>
             <a:r>
@@ -4699,7 +4672,7 @@
                 <a:solidFill>
                   <a:srgbClr val="E0E1DD"/>
                 </a:solidFill>
-                <a:latin typeface="Segoe UI"/>
+                <a:latin typeface="Segoe UI" panose="020B0502040204020203"/>
               </a:defRPr>
             </a:pPr>
             <a:r>
@@ -4783,7 +4756,7 @@
                 <a:solidFill>
                   <a:srgbClr val="48CAE4"/>
                 </a:solidFill>
-                <a:latin typeface="Segoe UI"/>
+                <a:latin typeface="Segoe UI" panose="020B0502040204020203"/>
               </a:defRPr>
             </a:pPr>
             <a:r>
@@ -4819,7 +4792,7 @@
                 <a:solidFill>
                   <a:srgbClr val="FFFFFF"/>
                 </a:solidFill>
-                <a:latin typeface="Segoe UI"/>
+                <a:latin typeface="Segoe UI" panose="020B0502040204020203"/>
               </a:defRPr>
             </a:pPr>
             <a:r>
@@ -4903,7 +4876,7 @@
                 <a:solidFill>
                   <a:srgbClr val="48CAE4"/>
                 </a:solidFill>
-                <a:latin typeface="Segoe UI"/>
+                <a:latin typeface="Segoe UI" panose="020B0502040204020203"/>
               </a:defRPr>
             </a:pPr>
             <a:r>
@@ -4939,7 +4912,7 @@
                 <a:solidFill>
                   <a:srgbClr val="FFFFFF"/>
                 </a:solidFill>
-                <a:latin typeface="Segoe UI"/>
+                <a:latin typeface="Segoe UI" panose="020B0502040204020203"/>
               </a:defRPr>
             </a:pPr>
             <a:r>
@@ -5023,7 +4996,7 @@
                 <a:solidFill>
                   <a:srgbClr val="48CAE4"/>
                 </a:solidFill>
-                <a:latin typeface="Segoe UI"/>
+                <a:latin typeface="Segoe UI" panose="020B0502040204020203"/>
               </a:defRPr>
             </a:pPr>
             <a:r>
@@ -5059,7 +5032,7 @@
                 <a:solidFill>
                   <a:srgbClr val="FFFFFF"/>
                 </a:solidFill>
-                <a:latin typeface="Segoe UI"/>
+                <a:latin typeface="Segoe UI" panose="020B0502040204020203"/>
               </a:defRPr>
             </a:pPr>
             <a:r>
@@ -5143,7 +5116,7 @@
                 <a:solidFill>
                   <a:srgbClr val="48CAE4"/>
                 </a:solidFill>
-                <a:latin typeface="Segoe UI"/>
+                <a:latin typeface="Segoe UI" panose="020B0502040204020203"/>
               </a:defRPr>
             </a:pPr>
             <a:r>
@@ -5179,7 +5152,7 @@
                 <a:solidFill>
                   <a:srgbClr val="FFFFFF"/>
                 </a:solidFill>
-                <a:latin typeface="Segoe UI"/>
+                <a:latin typeface="Segoe UI" panose="020B0502040204020203"/>
               </a:defRPr>
             </a:pPr>
             <a:r>
@@ -5215,7 +5188,7 @@
                 <a:solidFill>
                   <a:srgbClr val="8D99AE"/>
                 </a:solidFill>
-                <a:latin typeface="Segoe UI"/>
+                <a:latin typeface="Segoe UI" panose="020B0502040204020203"/>
               </a:defRPr>
             </a:pPr>
             <a:r>
@@ -5233,7 +5206,7 @@
 </file>
 
 <file path=ppt/slides/slide10.xml><?xml version="1.0" encoding="utf-8"?>
-<p:sld xmlns:a="http://schemas.openxmlformats.org/drawingml/2006/main" xmlns:p="http://schemas.openxmlformats.org/presentationml/2006/main" xmlns:r="http://schemas.openxmlformats.org/officeDocument/2006/relationships">
+<p:sld xmlns:a="http://schemas.openxmlformats.org/drawingml/2006/main" xmlns:r="http://schemas.openxmlformats.org/officeDocument/2006/relationships" xmlns:p="http://schemas.openxmlformats.org/presentationml/2006/main">
   <p:cSld>
     <p:bg>
       <p:bgPr>
@@ -5258,8 +5231,8 @@
         </p:nvSpPr>
         <p:spPr>
           <a:xfrm>
-            <a:off x="731520" y="457200"/>
-            <a:ext cx="7315200" cy="640080"/>
+            <a:off x="731520" y="355600"/>
+            <a:ext cx="9868535" cy="583565"/>
           </a:xfrm>
           <a:prstGeom prst="rect">
             <a:avLst/>
@@ -5277,7 +5250,7 @@
                 <a:solidFill>
                   <a:srgbClr val="FFFFFF"/>
                 </a:solidFill>
-                <a:latin typeface="Segoe UI"/>
+                <a:latin typeface="Segoe UI" panose="020B0502040204020203"/>
               </a:defRPr>
             </a:pPr>
             <a:r>
@@ -5338,7 +5311,7 @@
         </p:nvSpPr>
         <p:spPr>
           <a:xfrm>
-            <a:off x="731520" y="1371600"/>
+            <a:off x="731520" y="1334770"/>
             <a:ext cx="5943600" cy="4572000"/>
           </a:xfrm>
           <a:prstGeom prst="roundRect">
@@ -5386,7 +5359,7 @@
         </p:nvSpPr>
         <p:spPr>
           <a:xfrm>
-            <a:off x="914400" y="1463040"/>
+            <a:off x="914400" y="1306195"/>
             <a:ext cx="2743200" cy="274320"/>
           </a:xfrm>
           <a:prstGeom prst="rect">
@@ -5405,7 +5378,7 @@
                 <a:solidFill>
                   <a:srgbClr val="06D6A0"/>
                 </a:solidFill>
-                <a:latin typeface="Consolas"/>
+                <a:latin typeface="Consolas" panose="020B0609020204030204"/>
               </a:defRPr>
             </a:pPr>
             <a:r>
@@ -5422,7 +5395,7 @@
         </p:nvSpPr>
         <p:spPr>
           <a:xfrm>
-            <a:off x="914400" y="1783080"/>
+            <a:off x="914400" y="1626235"/>
             <a:ext cx="5577840" cy="201168"/>
           </a:xfrm>
           <a:prstGeom prst="rect">
@@ -5441,7 +5414,7 @@
                 <a:solidFill>
                   <a:srgbClr val="48CAE4"/>
                 </a:solidFill>
-                <a:latin typeface="Consolas"/>
+                <a:latin typeface="Consolas" panose="020B0609020204030204"/>
               </a:defRPr>
             </a:pPr>
             <a:r>
@@ -5458,7 +5431,7 @@
         </p:nvSpPr>
         <p:spPr>
           <a:xfrm>
-            <a:off x="914400" y="1984248"/>
+            <a:off x="914400" y="1777873"/>
             <a:ext cx="5577840" cy="201168"/>
           </a:xfrm>
           <a:prstGeom prst="rect">
@@ -5477,7 +5450,7 @@
                 <a:solidFill>
                   <a:srgbClr val="E0E1DD"/>
                 </a:solidFill>
-                <a:latin typeface="Consolas"/>
+                <a:latin typeface="Consolas" panose="020B0609020204030204"/>
               </a:defRPr>
             </a:pPr>
           </a:p>
@@ -5491,7 +5464,7 @@
         </p:nvSpPr>
         <p:spPr>
           <a:xfrm>
-            <a:off x="914400" y="2185416"/>
+            <a:off x="914400" y="2028571"/>
             <a:ext cx="5577840" cy="201168"/>
           </a:xfrm>
           <a:prstGeom prst="rect">
@@ -5510,7 +5483,7 @@
                 <a:solidFill>
                   <a:srgbClr val="8D99AE"/>
                 </a:solidFill>
-                <a:latin typeface="Consolas"/>
+                <a:latin typeface="Consolas" panose="020B0609020204030204"/>
               </a:defRPr>
             </a:pPr>
             <a:r>
@@ -5527,7 +5500,7 @@
         </p:nvSpPr>
         <p:spPr>
           <a:xfrm>
-            <a:off x="914400" y="2386584"/>
+            <a:off x="914400" y="2229739"/>
             <a:ext cx="5577840" cy="201168"/>
           </a:xfrm>
           <a:prstGeom prst="rect">
@@ -5546,7 +5519,7 @@
                 <a:solidFill>
                   <a:srgbClr val="06D6A0"/>
                 </a:solidFill>
-                <a:latin typeface="Consolas"/>
+                <a:latin typeface="Consolas" panose="020B0609020204030204"/>
               </a:defRPr>
             </a:pPr>
             <a:r>
@@ -5563,7 +5536,7 @@
         </p:nvSpPr>
         <p:spPr>
           <a:xfrm>
-            <a:off x="914400" y="2587752"/>
+            <a:off x="914400" y="2381377"/>
             <a:ext cx="5577840" cy="201168"/>
           </a:xfrm>
           <a:prstGeom prst="rect">
@@ -5582,7 +5555,7 @@
                 <a:solidFill>
                   <a:srgbClr val="E0E1DD"/>
                 </a:solidFill>
-                <a:latin typeface="Consolas"/>
+                <a:latin typeface="Consolas" panose="020B0609020204030204"/>
               </a:defRPr>
             </a:pPr>
           </a:p>
@@ -5596,7 +5569,7 @@
         </p:nvSpPr>
         <p:spPr>
           <a:xfrm>
-            <a:off x="914400" y="2788920"/>
+            <a:off x="914400" y="2632075"/>
             <a:ext cx="5577840" cy="201168"/>
           </a:xfrm>
           <a:prstGeom prst="rect">
@@ -5615,7 +5588,7 @@
                 <a:solidFill>
                   <a:srgbClr val="06D6A0"/>
                 </a:solidFill>
-                <a:latin typeface="Consolas"/>
+                <a:latin typeface="Consolas" panose="020B0609020204030204"/>
               </a:defRPr>
             </a:pPr>
             <a:r>
@@ -5632,7 +5605,7 @@
         </p:nvSpPr>
         <p:spPr>
           <a:xfrm>
-            <a:off x="914400" y="2990088"/>
+            <a:off x="914400" y="2833243"/>
             <a:ext cx="5577840" cy="201168"/>
           </a:xfrm>
           <a:prstGeom prst="rect">
@@ -5651,7 +5624,7 @@
                 <a:solidFill>
                   <a:srgbClr val="06D6A0"/>
                 </a:solidFill>
-                <a:latin typeface="Consolas"/>
+                <a:latin typeface="Consolas" panose="020B0609020204030204"/>
               </a:defRPr>
             </a:pPr>
             <a:r>
@@ -5668,7 +5641,7 @@
         </p:nvSpPr>
         <p:spPr>
           <a:xfrm>
-            <a:off x="914400" y="3191256"/>
+            <a:off x="914400" y="2984881"/>
             <a:ext cx="5577840" cy="201168"/>
           </a:xfrm>
           <a:prstGeom prst="rect">
@@ -5687,7 +5660,7 @@
                 <a:solidFill>
                   <a:srgbClr val="E0E1DD"/>
                 </a:solidFill>
-                <a:latin typeface="Consolas"/>
+                <a:latin typeface="Consolas" panose="020B0609020204030204"/>
               </a:defRPr>
             </a:pPr>
           </a:p>
@@ -5701,7 +5674,7 @@
         </p:nvSpPr>
         <p:spPr>
           <a:xfrm>
-            <a:off x="914400" y="3392424"/>
+            <a:off x="914400" y="3235579"/>
             <a:ext cx="5577840" cy="201168"/>
           </a:xfrm>
           <a:prstGeom prst="rect">
@@ -5720,7 +5693,7 @@
                 <a:solidFill>
                   <a:srgbClr val="06D6A0"/>
                 </a:solidFill>
-                <a:latin typeface="Consolas"/>
+                <a:latin typeface="Consolas" panose="020B0609020204030204"/>
               </a:defRPr>
             </a:pPr>
             <a:r>
@@ -5737,7 +5710,7 @@
         </p:nvSpPr>
         <p:spPr>
           <a:xfrm>
-            <a:off x="914400" y="3593591"/>
+            <a:off x="914400" y="3436746"/>
             <a:ext cx="5577840" cy="201168"/>
           </a:xfrm>
           <a:prstGeom prst="rect">
@@ -5756,7 +5729,7 @@
                 <a:solidFill>
                   <a:srgbClr val="06D6A0"/>
                 </a:solidFill>
-                <a:latin typeface="Consolas"/>
+                <a:latin typeface="Consolas" panose="020B0609020204030204"/>
               </a:defRPr>
             </a:pPr>
             <a:r>
@@ -5773,7 +5746,7 @@
         </p:nvSpPr>
         <p:spPr>
           <a:xfrm>
-            <a:off x="914400" y="3794760"/>
+            <a:off x="914400" y="3588385"/>
             <a:ext cx="5577840" cy="201168"/>
           </a:xfrm>
           <a:prstGeom prst="rect">
@@ -5792,7 +5765,7 @@
                 <a:solidFill>
                   <a:srgbClr val="E0E1DD"/>
                 </a:solidFill>
-                <a:latin typeface="Consolas"/>
+                <a:latin typeface="Consolas" panose="020B0609020204030204"/>
               </a:defRPr>
             </a:pPr>
           </a:p>
@@ -5806,7 +5779,7 @@
         </p:nvSpPr>
         <p:spPr>
           <a:xfrm>
-            <a:off x="914400" y="3995928"/>
+            <a:off x="914400" y="3839083"/>
             <a:ext cx="5577840" cy="201168"/>
           </a:xfrm>
           <a:prstGeom prst="rect">
@@ -5825,7 +5798,7 @@
                 <a:solidFill>
                   <a:srgbClr val="06D6A0"/>
                 </a:solidFill>
-                <a:latin typeface="Consolas"/>
+                <a:latin typeface="Consolas" panose="020B0609020204030204"/>
               </a:defRPr>
             </a:pPr>
             <a:r>
@@ -5842,7 +5815,7 @@
         </p:nvSpPr>
         <p:spPr>
           <a:xfrm>
-            <a:off x="914400" y="4197096"/>
+            <a:off x="914400" y="4040251"/>
             <a:ext cx="5577840" cy="201168"/>
           </a:xfrm>
           <a:prstGeom prst="rect">
@@ -5861,7 +5834,7 @@
                 <a:solidFill>
                   <a:srgbClr val="06D6A0"/>
                 </a:solidFill>
-                <a:latin typeface="Consolas"/>
+                <a:latin typeface="Consolas" panose="020B0609020204030204"/>
               </a:defRPr>
             </a:pPr>
             <a:r>
@@ -5878,7 +5851,7 @@
         </p:nvSpPr>
         <p:spPr>
           <a:xfrm>
-            <a:off x="914400" y="4398264"/>
+            <a:off x="914400" y="4241419"/>
             <a:ext cx="5577840" cy="201168"/>
           </a:xfrm>
           <a:prstGeom prst="rect">
@@ -5897,7 +5870,7 @@
                 <a:solidFill>
                   <a:srgbClr val="E0E1DD"/>
                 </a:solidFill>
-                <a:latin typeface="Consolas"/>
+                <a:latin typeface="Consolas" panose="020B0609020204030204"/>
               </a:defRPr>
             </a:pPr>
             <a:r>
@@ -5914,7 +5887,7 @@
         </p:nvSpPr>
         <p:spPr>
           <a:xfrm>
-            <a:off x="914400" y="4599432"/>
+            <a:off x="914400" y="4442587"/>
             <a:ext cx="5577840" cy="201168"/>
           </a:xfrm>
           <a:prstGeom prst="rect">
@@ -5933,7 +5906,7 @@
                 <a:solidFill>
                   <a:srgbClr val="E0E1DD"/>
                 </a:solidFill>
-                <a:latin typeface="Consolas"/>
+                <a:latin typeface="Consolas" panose="020B0609020204030204"/>
               </a:defRPr>
             </a:pPr>
             <a:r>
@@ -5950,7 +5923,7 @@
         </p:nvSpPr>
         <p:spPr>
           <a:xfrm>
-            <a:off x="914400" y="4800600"/>
+            <a:off x="914400" y="4643755"/>
             <a:ext cx="5577840" cy="201168"/>
           </a:xfrm>
           <a:prstGeom prst="rect">
@@ -5969,7 +5942,7 @@
                 <a:solidFill>
                   <a:srgbClr val="E0E1DD"/>
                 </a:solidFill>
-                <a:latin typeface="Consolas"/>
+                <a:latin typeface="Consolas" panose="020B0609020204030204"/>
               </a:defRPr>
             </a:pPr>
             <a:r>
@@ -5986,7 +5959,7 @@
         </p:nvSpPr>
         <p:spPr>
           <a:xfrm>
-            <a:off x="914400" y="5001768"/>
+            <a:off x="914400" y="4844923"/>
             <a:ext cx="5577840" cy="201168"/>
           </a:xfrm>
           <a:prstGeom prst="rect">
@@ -6005,7 +5978,7 @@
                 <a:solidFill>
                   <a:srgbClr val="E0E1DD"/>
                 </a:solidFill>
-                <a:latin typeface="Consolas"/>
+                <a:latin typeface="Consolas" panose="020B0609020204030204"/>
               </a:defRPr>
             </a:pPr>
             <a:r>
@@ -6022,7 +5995,7 @@
         </p:nvSpPr>
         <p:spPr>
           <a:xfrm>
-            <a:off x="914400" y="5202936"/>
+            <a:off x="914400" y="4996561"/>
             <a:ext cx="5577840" cy="201168"/>
           </a:xfrm>
           <a:prstGeom prst="rect">
@@ -6041,7 +6014,7 @@
                 <a:solidFill>
                   <a:srgbClr val="E0E1DD"/>
                 </a:solidFill>
-                <a:latin typeface="Consolas"/>
+                <a:latin typeface="Consolas" panose="020B0609020204030204"/>
               </a:defRPr>
             </a:pPr>
           </a:p>
@@ -6055,7 +6028,7 @@
         </p:nvSpPr>
         <p:spPr>
           <a:xfrm>
-            <a:off x="914400" y="5404104"/>
+            <a:off x="914400" y="5247259"/>
             <a:ext cx="5577840" cy="201168"/>
           </a:xfrm>
           <a:prstGeom prst="rect">
@@ -6074,7 +6047,7 @@
                 <a:solidFill>
                   <a:srgbClr val="06D6A0"/>
                 </a:solidFill>
-                <a:latin typeface="Consolas"/>
+                <a:latin typeface="Consolas" panose="020B0609020204030204"/>
               </a:defRPr>
             </a:pPr>
             <a:r>
@@ -6091,7 +6064,7 @@
         </p:nvSpPr>
         <p:spPr>
           <a:xfrm>
-            <a:off x="914400" y="5605272"/>
+            <a:off x="914400" y="5448427"/>
             <a:ext cx="5577840" cy="201168"/>
           </a:xfrm>
           <a:prstGeom prst="rect">
@@ -6110,7 +6083,7 @@
                 <a:solidFill>
                   <a:srgbClr val="06D6A0"/>
                 </a:solidFill>
-                <a:latin typeface="Consolas"/>
+                <a:latin typeface="Consolas" panose="020B0609020204030204"/>
               </a:defRPr>
             </a:pPr>
             <a:r>
@@ -6127,7 +6100,7 @@
         </p:nvSpPr>
         <p:spPr>
           <a:xfrm>
-            <a:off x="914400" y="5806440"/>
+            <a:off x="914400" y="5649595"/>
             <a:ext cx="5577840" cy="201168"/>
           </a:xfrm>
           <a:prstGeom prst="rect">
@@ -6146,7 +6119,7 @@
                 <a:solidFill>
                   <a:srgbClr val="06D6A0"/>
                 </a:solidFill>
-                <a:latin typeface="Consolas"/>
+                <a:latin typeface="Consolas" panose="020B0609020204030204"/>
               </a:defRPr>
             </a:pPr>
             <a:r>
@@ -6163,7 +6136,7 @@
         </p:nvSpPr>
         <p:spPr>
           <a:xfrm>
-            <a:off x="7132320" y="1371600"/>
+            <a:off x="7124065" y="874395"/>
             <a:ext cx="4572000" cy="457200"/>
           </a:xfrm>
           <a:prstGeom prst="rect">
@@ -6182,7 +6155,7 @@
                 <a:solidFill>
                   <a:srgbClr val="48CAE4"/>
                 </a:solidFill>
-                <a:latin typeface="Segoe UI"/>
+                <a:latin typeface="Segoe UI" panose="020B0502040204020203"/>
               </a:defRPr>
             </a:pPr>
             <a:r>
@@ -6199,8 +6172,8 @@
         </p:nvSpPr>
         <p:spPr>
           <a:xfrm>
-            <a:off x="7132320" y="2011680"/>
-            <a:ext cx="4480560" cy="640080"/>
+            <a:off x="7124065" y="1400810"/>
+            <a:ext cx="4479925" cy="829310"/>
           </a:xfrm>
           <a:prstGeom prst="roundRect">
             <a:avLst>
@@ -6247,7 +6220,7 @@
         </p:nvSpPr>
         <p:spPr>
           <a:xfrm>
-            <a:off x="7315200" y="2057400"/>
+            <a:off x="7306945" y="1626235"/>
             <a:ext cx="365760" cy="274320"/>
           </a:xfrm>
           <a:prstGeom prst="rect">
@@ -6266,7 +6239,7 @@
                 <a:solidFill>
                   <a:srgbClr val="FFFFFF"/>
                 </a:solidFill>
-                <a:latin typeface="Segoe UI"/>
+                <a:latin typeface="Segoe UI" panose="020B0502040204020203"/>
               </a:defRPr>
             </a:pPr>
             <a:r>
@@ -6283,7 +6256,7 @@
         </p:nvSpPr>
         <p:spPr>
           <a:xfrm>
-            <a:off x="7772400" y="2039112"/>
+            <a:off x="7764145" y="1428242"/>
             <a:ext cx="3657600" cy="274320"/>
           </a:xfrm>
           <a:prstGeom prst="rect">
@@ -6302,7 +6275,7 @@
                 <a:solidFill>
                   <a:srgbClr val="FFFFFF"/>
                 </a:solidFill>
-                <a:latin typeface="Segoe UI"/>
+                <a:latin typeface="Segoe UI" panose="020B0502040204020203"/>
               </a:defRPr>
             </a:pPr>
             <a:r>
@@ -6319,7 +6292,7 @@
         </p:nvSpPr>
         <p:spPr>
           <a:xfrm>
-            <a:off x="7772400" y="2331720"/>
+            <a:off x="7764145" y="1720850"/>
             <a:ext cx="3657600" cy="274320"/>
           </a:xfrm>
           <a:prstGeom prst="rect">
@@ -6338,7 +6311,7 @@
                 <a:solidFill>
                   <a:srgbClr val="8D99AE"/>
                 </a:solidFill>
-                <a:latin typeface="Segoe UI"/>
+                <a:latin typeface="Segoe UI" panose="020B0502040204020203"/>
               </a:defRPr>
             </a:pPr>
             <a:r>
@@ -6355,8 +6328,8 @@
         </p:nvSpPr>
         <p:spPr>
           <a:xfrm>
-            <a:off x="7132320" y="2788920"/>
-            <a:ext cx="4480560" cy="640080"/>
+            <a:off x="7124065" y="2277110"/>
+            <a:ext cx="4480560" cy="757555"/>
           </a:xfrm>
           <a:prstGeom prst="roundRect">
             <a:avLst>
@@ -6403,7 +6376,7 @@
         </p:nvSpPr>
         <p:spPr>
           <a:xfrm>
-            <a:off x="7315200" y="2834640"/>
+            <a:off x="7306945" y="2430780"/>
             <a:ext cx="365760" cy="274320"/>
           </a:xfrm>
           <a:prstGeom prst="rect">
@@ -6422,7 +6395,7 @@
                 <a:solidFill>
                   <a:srgbClr val="FFFFFF"/>
                 </a:solidFill>
-                <a:latin typeface="Segoe UI"/>
+                <a:latin typeface="Segoe UI" panose="020B0502040204020203"/>
               </a:defRPr>
             </a:pPr>
             <a:r>
@@ -6439,7 +6412,7 @@
         </p:nvSpPr>
         <p:spPr>
           <a:xfrm>
-            <a:off x="7772400" y="2816352"/>
+            <a:off x="7764145" y="2304542"/>
             <a:ext cx="3657600" cy="274320"/>
           </a:xfrm>
           <a:prstGeom prst="rect">
@@ -6458,7 +6431,7 @@
                 <a:solidFill>
                   <a:srgbClr val="FFFFFF"/>
                 </a:solidFill>
-                <a:latin typeface="Segoe UI"/>
+                <a:latin typeface="Segoe UI" panose="020B0502040204020203"/>
               </a:defRPr>
             </a:pPr>
             <a:r>
@@ -6475,7 +6448,7 @@
         </p:nvSpPr>
         <p:spPr>
           <a:xfrm>
-            <a:off x="7772400" y="3108960"/>
+            <a:off x="7764145" y="2597150"/>
             <a:ext cx="3657600" cy="274320"/>
           </a:xfrm>
           <a:prstGeom prst="rect">
@@ -6494,7 +6467,7 @@
                 <a:solidFill>
                   <a:srgbClr val="8D99AE"/>
                 </a:solidFill>
-                <a:latin typeface="Segoe UI"/>
+                <a:latin typeface="Segoe UI" panose="020B0502040204020203"/>
               </a:defRPr>
             </a:pPr>
             <a:r>
@@ -6511,8 +6484,8 @@
         </p:nvSpPr>
         <p:spPr>
           <a:xfrm>
-            <a:off x="7132320" y="3566160"/>
-            <a:ext cx="4480560" cy="640080"/>
+            <a:off x="7124065" y="3120390"/>
+            <a:ext cx="4480560" cy="718820"/>
           </a:xfrm>
           <a:prstGeom prst="roundRect">
             <a:avLst>
@@ -6559,7 +6532,7 @@
         </p:nvSpPr>
         <p:spPr>
           <a:xfrm>
-            <a:off x="7315200" y="3611880"/>
+            <a:off x="7306945" y="3235325"/>
             <a:ext cx="365760" cy="274320"/>
           </a:xfrm>
           <a:prstGeom prst="rect">
@@ -6578,7 +6551,7 @@
                 <a:solidFill>
                   <a:srgbClr val="FFFFFF"/>
                 </a:solidFill>
-                <a:latin typeface="Segoe UI"/>
+                <a:latin typeface="Segoe UI" panose="020B0502040204020203"/>
               </a:defRPr>
             </a:pPr>
             <a:r>
@@ -6595,7 +6568,7 @@
         </p:nvSpPr>
         <p:spPr>
           <a:xfrm>
-            <a:off x="7772400" y="3593592"/>
+            <a:off x="7764145" y="3147822"/>
             <a:ext cx="3657600" cy="274320"/>
           </a:xfrm>
           <a:prstGeom prst="rect">
@@ -6614,7 +6587,7 @@
                 <a:solidFill>
                   <a:srgbClr val="FFFFFF"/>
                 </a:solidFill>
-                <a:latin typeface="Segoe UI"/>
+                <a:latin typeface="Segoe UI" panose="020B0502040204020203"/>
               </a:defRPr>
             </a:pPr>
             <a:r>
@@ -6631,7 +6604,7 @@
         </p:nvSpPr>
         <p:spPr>
           <a:xfrm>
-            <a:off x="7772400" y="3886200"/>
+            <a:off x="7764145" y="3440430"/>
             <a:ext cx="3657600" cy="274320"/>
           </a:xfrm>
           <a:prstGeom prst="rect">
@@ -6650,7 +6623,7 @@
                 <a:solidFill>
                   <a:srgbClr val="8D99AE"/>
                 </a:solidFill>
-                <a:latin typeface="Segoe UI"/>
+                <a:latin typeface="Segoe UI" panose="020B0502040204020203"/>
               </a:defRPr>
             </a:pPr>
             <a:r>
@@ -6667,8 +6640,8 @@
         </p:nvSpPr>
         <p:spPr>
           <a:xfrm>
-            <a:off x="7132320" y="4343400"/>
-            <a:ext cx="4480560" cy="640080"/>
+            <a:off x="7124065" y="3914140"/>
+            <a:ext cx="4480560" cy="760095"/>
           </a:xfrm>
           <a:prstGeom prst="roundRect">
             <a:avLst>
@@ -6715,7 +6688,7 @@
         </p:nvSpPr>
         <p:spPr>
           <a:xfrm>
-            <a:off x="7315200" y="4389120"/>
+            <a:off x="7306945" y="4168140"/>
             <a:ext cx="365760" cy="274320"/>
           </a:xfrm>
           <a:prstGeom prst="rect">
@@ -6734,7 +6707,7 @@
                 <a:solidFill>
                   <a:srgbClr val="FFFFFF"/>
                 </a:solidFill>
-                <a:latin typeface="Segoe UI"/>
+                <a:latin typeface="Segoe UI" panose="020B0502040204020203"/>
               </a:defRPr>
             </a:pPr>
             <a:r>
@@ -6751,7 +6724,7 @@
         </p:nvSpPr>
         <p:spPr>
           <a:xfrm>
-            <a:off x="7772400" y="4370832"/>
+            <a:off x="7764145" y="3941572"/>
             <a:ext cx="3657600" cy="274320"/>
           </a:xfrm>
           <a:prstGeom prst="rect">
@@ -6770,7 +6743,7 @@
                 <a:solidFill>
                   <a:srgbClr val="FFFFFF"/>
                 </a:solidFill>
-                <a:latin typeface="Segoe UI"/>
+                <a:latin typeface="Segoe UI" panose="020B0502040204020203"/>
               </a:defRPr>
             </a:pPr>
             <a:r>
@@ -6787,7 +6760,7 @@
         </p:nvSpPr>
         <p:spPr>
           <a:xfrm>
-            <a:off x="7772400" y="4663440"/>
+            <a:off x="7764145" y="4215765"/>
             <a:ext cx="3657600" cy="274320"/>
           </a:xfrm>
           <a:prstGeom prst="rect">
@@ -6806,7 +6779,7 @@
                 <a:solidFill>
                   <a:srgbClr val="8D99AE"/>
                 </a:solidFill>
-                <a:latin typeface="Segoe UI"/>
+                <a:latin typeface="Segoe UI" panose="020B0502040204020203"/>
               </a:defRPr>
             </a:pPr>
             <a:r>
@@ -6823,8 +6796,8 @@
         </p:nvSpPr>
         <p:spPr>
           <a:xfrm>
-            <a:off x="7132320" y="5120640"/>
-            <a:ext cx="4480560" cy="640080"/>
+            <a:off x="7124065" y="4773930"/>
+            <a:ext cx="4480560" cy="691515"/>
           </a:xfrm>
           <a:prstGeom prst="roundRect">
             <a:avLst>
@@ -6871,7 +6844,7 @@
         </p:nvSpPr>
         <p:spPr>
           <a:xfrm>
-            <a:off x="7315200" y="5166360"/>
+            <a:off x="7306945" y="4923155"/>
             <a:ext cx="365760" cy="274320"/>
           </a:xfrm>
           <a:prstGeom prst="rect">
@@ -6890,7 +6863,7 @@
                 <a:solidFill>
                   <a:srgbClr val="FFFFFF"/>
                 </a:solidFill>
-                <a:latin typeface="Segoe UI"/>
+                <a:latin typeface="Segoe UI" panose="020B0502040204020203"/>
               </a:defRPr>
             </a:pPr>
             <a:r>
@@ -6907,7 +6880,7 @@
         </p:nvSpPr>
         <p:spPr>
           <a:xfrm>
-            <a:off x="7772400" y="5148072"/>
+            <a:off x="7764145" y="4801362"/>
             <a:ext cx="3657600" cy="274320"/>
           </a:xfrm>
           <a:prstGeom prst="rect">
@@ -6926,7 +6899,7 @@
                 <a:solidFill>
                   <a:srgbClr val="FFFFFF"/>
                 </a:solidFill>
-                <a:latin typeface="Segoe UI"/>
+                <a:latin typeface="Segoe UI" panose="020B0502040204020203"/>
               </a:defRPr>
             </a:pPr>
             <a:r>
@@ -6943,7 +6916,7 @@
         </p:nvSpPr>
         <p:spPr>
           <a:xfrm>
-            <a:off x="7772400" y="5440680"/>
+            <a:off x="7764145" y="5093970"/>
             <a:ext cx="3657600" cy="274320"/>
           </a:xfrm>
           <a:prstGeom prst="rect">
@@ -6962,7 +6935,7 @@
                 <a:solidFill>
                   <a:srgbClr val="8D99AE"/>
                 </a:solidFill>
-                <a:latin typeface="Segoe UI"/>
+                <a:latin typeface="Segoe UI" panose="020B0502040204020203"/>
               </a:defRPr>
             </a:pPr>
             <a:r>
@@ -6979,8 +6952,8 @@
         </p:nvSpPr>
         <p:spPr>
           <a:xfrm>
-            <a:off x="7132320" y="5897880"/>
-            <a:ext cx="4480560" cy="640080"/>
+            <a:off x="7124065" y="5597525"/>
+            <a:ext cx="4480560" cy="643255"/>
           </a:xfrm>
           <a:prstGeom prst="roundRect">
             <a:avLst>
@@ -7027,7 +7000,7 @@
         </p:nvSpPr>
         <p:spPr>
           <a:xfrm>
-            <a:off x="7315200" y="5943600"/>
+            <a:off x="7306945" y="5783580"/>
             <a:ext cx="365760" cy="274320"/>
           </a:xfrm>
           <a:prstGeom prst="rect">
@@ -7046,7 +7019,7 @@
                 <a:solidFill>
                   <a:srgbClr val="FFFFFF"/>
                 </a:solidFill>
-                <a:latin typeface="Segoe UI"/>
+                <a:latin typeface="Segoe UI" panose="020B0502040204020203"/>
               </a:defRPr>
             </a:pPr>
             <a:r>
@@ -7063,7 +7036,7 @@
         </p:nvSpPr>
         <p:spPr>
           <a:xfrm>
-            <a:off x="7772400" y="5925312"/>
+            <a:off x="7764145" y="5628132"/>
             <a:ext cx="3657600" cy="274320"/>
           </a:xfrm>
           <a:prstGeom prst="rect">
@@ -7082,7 +7055,7 @@
                 <a:solidFill>
                   <a:srgbClr val="FFFFFF"/>
                 </a:solidFill>
-                <a:latin typeface="Segoe UI"/>
+                <a:latin typeface="Segoe UI" panose="020B0502040204020203"/>
               </a:defRPr>
             </a:pPr>
             <a:r>
@@ -7099,7 +7072,7 @@
         </p:nvSpPr>
         <p:spPr>
           <a:xfrm>
-            <a:off x="7772400" y="6217920"/>
+            <a:off x="7764145" y="5920740"/>
             <a:ext cx="3657600" cy="274320"/>
           </a:xfrm>
           <a:prstGeom prst="rect">
@@ -7118,7 +7091,7 @@
                 <a:solidFill>
                   <a:srgbClr val="8D99AE"/>
                 </a:solidFill>
-                <a:latin typeface="Segoe UI"/>
+                <a:latin typeface="Segoe UI" panose="020B0502040204020203"/>
               </a:defRPr>
             </a:pPr>
             <a:r>
@@ -7135,7 +7108,7 @@
         </p:nvSpPr>
         <p:spPr>
           <a:xfrm>
-            <a:off x="11155680" y="6400800"/>
+            <a:off x="11155680" y="6466840"/>
             <a:ext cx="914400" cy="365760"/>
           </a:xfrm>
           <a:prstGeom prst="rect">
@@ -7154,7 +7127,7 @@
                 <a:solidFill>
                   <a:srgbClr val="8D99AE"/>
                 </a:solidFill>
-                <a:latin typeface="Segoe UI"/>
+                <a:latin typeface="Segoe UI" panose="020B0502040204020203"/>
               </a:defRPr>
             </a:pPr>
             <a:r>
@@ -7190,7 +7163,7 @@
                 <a:solidFill>
                   <a:srgbClr val="8D99AE"/>
                 </a:solidFill>
-                <a:latin typeface="Segoe UI"/>
+                <a:latin typeface="Segoe UI" panose="020B0502040204020203"/>
               </a:defRPr>
             </a:pPr>
             <a:r>
@@ -7208,7 +7181,7 @@
 </file>
 
 <file path=ppt/slides/slide11.xml><?xml version="1.0" encoding="utf-8"?>
-<p:sld xmlns:a="http://schemas.openxmlformats.org/drawingml/2006/main" xmlns:p="http://schemas.openxmlformats.org/presentationml/2006/main" xmlns:r="http://schemas.openxmlformats.org/officeDocument/2006/relationships">
+<p:sld xmlns:a="http://schemas.openxmlformats.org/drawingml/2006/main" xmlns:r="http://schemas.openxmlformats.org/officeDocument/2006/relationships" xmlns:p="http://schemas.openxmlformats.org/presentationml/2006/main">
   <p:cSld>
     <p:bg>
       <p:bgPr>
@@ -7252,7 +7225,7 @@
                 <a:solidFill>
                   <a:srgbClr val="FFFFFF"/>
                 </a:solidFill>
-                <a:latin typeface="Segoe UI"/>
+                <a:latin typeface="Segoe UI" panose="020B0502040204020203"/>
               </a:defRPr>
             </a:pPr>
             <a:r>
@@ -7288,7 +7261,7 @@
                 <a:solidFill>
                   <a:srgbClr val="48CAE4"/>
                 </a:solidFill>
-                <a:latin typeface="Segoe UI"/>
+                <a:latin typeface="Segoe UI" panose="020B0502040204020203"/>
               </a:defRPr>
             </a:pPr>
             <a:r>
@@ -7460,7 +7433,7 @@
                 <a:solidFill>
                   <a:srgbClr val="FFFFFF"/>
                 </a:solidFill>
-                <a:latin typeface="Segoe UI"/>
+                <a:latin typeface="Segoe UI" panose="020B0502040204020203"/>
               </a:defRPr>
             </a:pPr>
             <a:r>
@@ -7496,7 +7469,7 @@
                 <a:solidFill>
                   <a:srgbClr val="FFFFFF"/>
                 </a:solidFill>
-                <a:latin typeface="Segoe UI"/>
+                <a:latin typeface="Segoe UI" panose="020B0502040204020203"/>
               </a:defRPr>
             </a:pPr>
             <a:r>
@@ -7532,7 +7505,7 @@
                 <a:solidFill>
                   <a:srgbClr val="0077B6"/>
                 </a:solidFill>
-                <a:latin typeface="Segoe UI"/>
+                <a:latin typeface="Segoe UI" panose="020B0502040204020203"/>
               </a:defRPr>
             </a:pPr>
             <a:r>
@@ -7568,7 +7541,7 @@
                 <a:solidFill>
                   <a:srgbClr val="E0E1DD"/>
                 </a:solidFill>
-                <a:latin typeface="Segoe UI"/>
+                <a:latin typeface="Segoe UI" panose="020B0502040204020203"/>
               </a:defRPr>
             </a:pPr>
             <a:r>
@@ -7700,7 +7673,7 @@
                 <a:solidFill>
                   <a:srgbClr val="FFFFFF"/>
                 </a:solidFill>
-                <a:latin typeface="Segoe UI"/>
+                <a:latin typeface="Segoe UI" panose="020B0502040204020203"/>
               </a:defRPr>
             </a:pPr>
             <a:r>
@@ -7736,7 +7709,7 @@
                 <a:solidFill>
                   <a:srgbClr val="FFFFFF"/>
                 </a:solidFill>
-                <a:latin typeface="Segoe UI"/>
+                <a:latin typeface="Segoe UI" panose="020B0502040204020203"/>
               </a:defRPr>
             </a:pPr>
             <a:r>
@@ -7772,7 +7745,7 @@
                 <a:solidFill>
                   <a:srgbClr val="0096C7"/>
                 </a:solidFill>
-                <a:latin typeface="Segoe UI"/>
+                <a:latin typeface="Segoe UI" panose="020B0502040204020203"/>
               </a:defRPr>
             </a:pPr>
             <a:r>
@@ -7808,7 +7781,7 @@
                 <a:solidFill>
                   <a:srgbClr val="E0E1DD"/>
                 </a:solidFill>
-                <a:latin typeface="Segoe UI"/>
+                <a:latin typeface="Segoe UI" panose="020B0502040204020203"/>
               </a:defRPr>
             </a:pPr>
             <a:r>
@@ -7940,7 +7913,7 @@
                 <a:solidFill>
                   <a:srgbClr val="FFFFFF"/>
                 </a:solidFill>
-                <a:latin typeface="Segoe UI"/>
+                <a:latin typeface="Segoe UI" panose="020B0502040204020203"/>
               </a:defRPr>
             </a:pPr>
             <a:r>
@@ -7976,7 +7949,7 @@
                 <a:solidFill>
                   <a:srgbClr val="FFFFFF"/>
                 </a:solidFill>
-                <a:latin typeface="Segoe UI"/>
+                <a:latin typeface="Segoe UI" panose="020B0502040204020203"/>
               </a:defRPr>
             </a:pPr>
             <a:r>
@@ -8012,7 +7985,7 @@
                 <a:solidFill>
                   <a:srgbClr val="027787"/>
                 </a:solidFill>
-                <a:latin typeface="Segoe UI"/>
+                <a:latin typeface="Segoe UI" panose="020B0502040204020203"/>
               </a:defRPr>
             </a:pPr>
             <a:r>
@@ -8048,7 +8021,7 @@
                 <a:solidFill>
                   <a:srgbClr val="E0E1DD"/>
                 </a:solidFill>
-                <a:latin typeface="Segoe UI"/>
+                <a:latin typeface="Segoe UI" panose="020B0502040204020203"/>
               </a:defRPr>
             </a:pPr>
             <a:r>
@@ -8180,7 +8153,7 @@
                 <a:solidFill>
                   <a:srgbClr val="FFFFFF"/>
                 </a:solidFill>
-                <a:latin typeface="Segoe UI"/>
+                <a:latin typeface="Segoe UI" panose="020B0502040204020203"/>
               </a:defRPr>
             </a:pPr>
             <a:r>
@@ -8216,7 +8189,7 @@
                 <a:solidFill>
                   <a:srgbClr val="FFFFFF"/>
                 </a:solidFill>
-                <a:latin typeface="Segoe UI"/>
+                <a:latin typeface="Segoe UI" panose="020B0502040204020203"/>
               </a:defRPr>
             </a:pPr>
             <a:r>
@@ -8252,7 +8225,7 @@
                 <a:solidFill>
                   <a:srgbClr val="023047"/>
                 </a:solidFill>
-                <a:latin typeface="Segoe UI"/>
+                <a:latin typeface="Segoe UI" panose="020B0502040204020203"/>
               </a:defRPr>
             </a:pPr>
             <a:r>
@@ -8288,7 +8261,7 @@
                 <a:solidFill>
                   <a:srgbClr val="E0E1DD"/>
                 </a:solidFill>
-                <a:latin typeface="Segoe UI"/>
+                <a:latin typeface="Segoe UI" panose="020B0502040204020203"/>
               </a:defRPr>
             </a:pPr>
             <a:r>
@@ -8328,7 +8301,7 @@
                 <a:solidFill>
                   <a:srgbClr val="48CAE4"/>
                 </a:solidFill>
-                <a:latin typeface="Segoe UI"/>
+                <a:latin typeface="Segoe UI" panose="020B0502040204020203"/>
               </a:defRPr>
             </a:pPr>
             <a:r>
@@ -8370,7 +8343,7 @@
                           <a:solidFill>
                             <a:srgbClr val="FFFFFF"/>
                           </a:solidFill>
-                          <a:latin typeface="Segoe UI"/>
+                          <a:latin typeface="Segoe UI" panose="020B0502040204020203"/>
                         </a:defRPr>
                       </a:pPr>
                       <a:r>
@@ -8394,7 +8367,7 @@
                           <a:solidFill>
                             <a:srgbClr val="FFFFFF"/>
                           </a:solidFill>
-                          <a:latin typeface="Segoe UI"/>
+                          <a:latin typeface="Segoe UI" panose="020B0502040204020203"/>
                         </a:defRPr>
                       </a:pPr>
                       <a:r>
@@ -8420,7 +8393,7 @@
                           <a:solidFill>
                             <a:srgbClr val="E0E1DD"/>
                           </a:solidFill>
-                          <a:latin typeface="Segoe UI"/>
+                          <a:latin typeface="Segoe UI" panose="020B0502040204020203"/>
                         </a:defRPr>
                       </a:pPr>
                       <a:r>
@@ -8444,7 +8417,7 @@
                           <a:solidFill>
                             <a:srgbClr val="E0E1DD"/>
                           </a:solidFill>
-                          <a:latin typeface="Segoe UI"/>
+                          <a:latin typeface="Segoe UI" panose="020B0502040204020203"/>
                         </a:defRPr>
                       </a:pPr>
                       <a:r>
@@ -8470,7 +8443,7 @@
                           <a:solidFill>
                             <a:srgbClr val="E0E1DD"/>
                           </a:solidFill>
-                          <a:latin typeface="Segoe UI"/>
+                          <a:latin typeface="Segoe UI" panose="020B0502040204020203"/>
                         </a:defRPr>
                       </a:pPr>
                       <a:r>
@@ -8494,7 +8467,7 @@
                           <a:solidFill>
                             <a:srgbClr val="E0E1DD"/>
                           </a:solidFill>
-                          <a:latin typeface="Segoe UI"/>
+                          <a:latin typeface="Segoe UI" panose="020B0502040204020203"/>
                         </a:defRPr>
                       </a:pPr>
                       <a:r>
@@ -8520,7 +8493,7 @@
                           <a:solidFill>
                             <a:srgbClr val="E0E1DD"/>
                           </a:solidFill>
-                          <a:latin typeface="Segoe UI"/>
+                          <a:latin typeface="Segoe UI" panose="020B0502040204020203"/>
                         </a:defRPr>
                       </a:pPr>
                       <a:r>
@@ -8544,7 +8517,7 @@
                           <a:solidFill>
                             <a:srgbClr val="E0E1DD"/>
                           </a:solidFill>
-                          <a:latin typeface="Segoe UI"/>
+                          <a:latin typeface="Segoe UI" panose="020B0502040204020203"/>
                         </a:defRPr>
                       </a:pPr>
                       <a:r>
@@ -8570,7 +8543,7 @@
                           <a:solidFill>
                             <a:srgbClr val="E0E1DD"/>
                           </a:solidFill>
-                          <a:latin typeface="Segoe UI"/>
+                          <a:latin typeface="Segoe UI" panose="020B0502040204020203"/>
                         </a:defRPr>
                       </a:pPr>
                       <a:r>
@@ -8594,7 +8567,7 @@
                           <a:solidFill>
                             <a:srgbClr val="E0E1DD"/>
                           </a:solidFill>
-                          <a:latin typeface="Segoe UI"/>
+                          <a:latin typeface="Segoe UI" panose="020B0502040204020203"/>
                         </a:defRPr>
                       </a:pPr>
                       <a:r>
@@ -8640,7 +8613,7 @@
                 <a:solidFill>
                   <a:srgbClr val="8D99AE"/>
                 </a:solidFill>
-                <a:latin typeface="Segoe UI"/>
+                <a:latin typeface="Segoe UI" panose="020B0502040204020203"/>
               </a:defRPr>
             </a:pPr>
             <a:r>
@@ -8658,7 +8631,7 @@
 </file>
 
 <file path=ppt/slides/slide12.xml><?xml version="1.0" encoding="utf-8"?>
-<p:sld xmlns:a="http://schemas.openxmlformats.org/drawingml/2006/main" xmlns:p="http://schemas.openxmlformats.org/presentationml/2006/main" xmlns:r="http://schemas.openxmlformats.org/officeDocument/2006/relationships">
+<p:sld xmlns:a="http://schemas.openxmlformats.org/drawingml/2006/main" xmlns:r="http://schemas.openxmlformats.org/officeDocument/2006/relationships" xmlns:p="http://schemas.openxmlformats.org/presentationml/2006/main">
   <p:cSld>
     <p:bg>
       <p:bgPr>
@@ -8702,7 +8675,7 @@
                 <a:solidFill>
                   <a:srgbClr val="FFFFFF"/>
                 </a:solidFill>
-                <a:latin typeface="Segoe UI"/>
+                <a:latin typeface="Segoe UI" panose="020B0502040204020203"/>
               </a:defRPr>
             </a:pPr>
             <a:r>
@@ -8830,7 +8803,7 @@
                 <a:solidFill>
                   <a:srgbClr val="06D6A0"/>
                 </a:solidFill>
-                <a:latin typeface="Consolas"/>
+                <a:latin typeface="Consolas" panose="020B0609020204030204"/>
               </a:defRPr>
             </a:pPr>
             <a:r>
@@ -8866,7 +8839,7 @@
                 <a:solidFill>
                   <a:srgbClr val="06D6A0"/>
                 </a:solidFill>
-                <a:latin typeface="Consolas"/>
+                <a:latin typeface="Consolas" panose="020B0609020204030204"/>
               </a:defRPr>
             </a:pPr>
             <a:r>
@@ -8902,7 +8875,7 @@
                 <a:solidFill>
                   <a:srgbClr val="FFFFFF"/>
                 </a:solidFill>
-                <a:latin typeface="Consolas"/>
+                <a:latin typeface="Consolas" panose="020B0609020204030204"/>
               </a:defRPr>
             </a:pPr>
           </a:p>
@@ -8935,7 +8908,7 @@
                 <a:solidFill>
                   <a:srgbClr val="48CAE4"/>
                 </a:solidFill>
-                <a:latin typeface="Consolas"/>
+                <a:latin typeface="Consolas" panose="020B0609020204030204"/>
               </a:defRPr>
             </a:pPr>
             <a:r>
@@ -8971,7 +8944,7 @@
                 <a:solidFill>
                   <a:srgbClr val="FFFFFF"/>
                 </a:solidFill>
-                <a:latin typeface="Consolas"/>
+                <a:latin typeface="Consolas" panose="020B0609020204030204"/>
               </a:defRPr>
             </a:pPr>
           </a:p>
@@ -9004,7 +8977,7 @@
                 <a:solidFill>
                   <a:srgbClr val="E0E1DD"/>
                 </a:solidFill>
-                <a:latin typeface="Consolas"/>
+                <a:latin typeface="Consolas" panose="020B0609020204030204"/>
               </a:defRPr>
             </a:pPr>
             <a:r>
@@ -9040,7 +9013,7 @@
                 <a:solidFill>
                   <a:srgbClr val="E0E1DD"/>
                 </a:solidFill>
-                <a:latin typeface="Consolas"/>
+                <a:latin typeface="Consolas" panose="020B0609020204030204"/>
               </a:defRPr>
             </a:pPr>
             <a:r>
@@ -9076,7 +9049,7 @@
                 <a:solidFill>
                   <a:srgbClr val="48CAE4"/>
                 </a:solidFill>
-                <a:latin typeface="Consolas"/>
+                <a:latin typeface="Consolas" panose="020B0609020204030204"/>
               </a:defRPr>
             </a:pPr>
             <a:r>
@@ -9112,7 +9085,7 @@
                 <a:solidFill>
                   <a:srgbClr val="E0E1DD"/>
                 </a:solidFill>
-                <a:latin typeface="Consolas"/>
+                <a:latin typeface="Consolas" panose="020B0609020204030204"/>
               </a:defRPr>
             </a:pPr>
             <a:r>
@@ -9148,7 +9121,7 @@
                 <a:solidFill>
                   <a:srgbClr val="E0E1DD"/>
                 </a:solidFill>
-                <a:latin typeface="Consolas"/>
+                <a:latin typeface="Consolas" panose="020B0609020204030204"/>
               </a:defRPr>
             </a:pPr>
             <a:r>
@@ -9184,7 +9157,7 @@
                 <a:solidFill>
                   <a:srgbClr val="E0E1DD"/>
                 </a:solidFill>
-                <a:latin typeface="Consolas"/>
+                <a:latin typeface="Consolas" panose="020B0609020204030204"/>
               </a:defRPr>
             </a:pPr>
             <a:r>
@@ -9220,7 +9193,7 @@
                 <a:solidFill>
                   <a:srgbClr val="E0E1DD"/>
                 </a:solidFill>
-                <a:latin typeface="Consolas"/>
+                <a:latin typeface="Consolas" panose="020B0609020204030204"/>
               </a:defRPr>
             </a:pPr>
             <a:r>
@@ -9256,7 +9229,7 @@
                 <a:solidFill>
                   <a:srgbClr val="E0E1DD"/>
                 </a:solidFill>
-                <a:latin typeface="Consolas"/>
+                <a:latin typeface="Consolas" panose="020B0609020204030204"/>
               </a:defRPr>
             </a:pPr>
             <a:r>
@@ -9273,7 +9246,7 @@
         </p:nvSpPr>
         <p:spPr>
           <a:xfrm>
-            <a:off x="7498079" y="1371600"/>
+            <a:off x="7498079" y="914400"/>
             <a:ext cx="4114800" cy="457200"/>
           </a:xfrm>
           <a:prstGeom prst="rect">
@@ -9292,7 +9265,7 @@
                 <a:solidFill>
                   <a:srgbClr val="48CAE4"/>
                 </a:solidFill>
-                <a:latin typeface="Segoe UI"/>
+                <a:latin typeface="Segoe UI" panose="020B0502040204020203"/>
               </a:defRPr>
             </a:pPr>
             <a:r>
@@ -9309,7 +9282,7 @@
         </p:nvSpPr>
         <p:spPr>
           <a:xfrm>
-            <a:off x="7498079" y="2011680"/>
+            <a:off x="7498079" y="1450340"/>
             <a:ext cx="4114800" cy="457200"/>
           </a:xfrm>
           <a:prstGeom prst="roundRect">
@@ -9357,7 +9330,7 @@
         </p:nvSpPr>
         <p:spPr>
           <a:xfrm>
-            <a:off x="7635240" y="2084832"/>
+            <a:off x="7635240" y="1523492"/>
             <a:ext cx="365760" cy="274320"/>
           </a:xfrm>
           <a:prstGeom prst="rect">
@@ -9376,7 +9349,7 @@
                 <a:solidFill>
                   <a:srgbClr val="06D6A0"/>
                 </a:solidFill>
-                <a:latin typeface="Segoe UI"/>
+                <a:latin typeface="Segoe UI" panose="020B0502040204020203"/>
               </a:defRPr>
             </a:pPr>
             <a:r>
@@ -9393,7 +9366,7 @@
         </p:nvSpPr>
         <p:spPr>
           <a:xfrm>
-            <a:off x="8001000" y="2084832"/>
+            <a:off x="8001000" y="1523492"/>
             <a:ext cx="2011680" cy="274320"/>
           </a:xfrm>
           <a:prstGeom prst="rect">
@@ -9412,7 +9385,7 @@
                 <a:solidFill>
                   <a:srgbClr val="FFFFFF"/>
                 </a:solidFill>
-                <a:latin typeface="Consolas"/>
+                <a:latin typeface="Consolas" panose="020B0609020204030204"/>
               </a:defRPr>
             </a:pPr>
             <a:r>
@@ -9429,7 +9402,7 @@
         </p:nvSpPr>
         <p:spPr>
           <a:xfrm>
-            <a:off x="10149840" y="2084832"/>
+            <a:off x="10149840" y="1523492"/>
             <a:ext cx="1371600" cy="274320"/>
           </a:xfrm>
           <a:prstGeom prst="rect">
@@ -9448,7 +9421,7 @@
                 <a:solidFill>
                   <a:srgbClr val="06D6A0"/>
                 </a:solidFill>
-                <a:latin typeface="Segoe UI"/>
+                <a:latin typeface="Segoe UI" panose="020B0502040204020203"/>
               </a:defRPr>
             </a:pPr>
             <a:r>
@@ -9465,7 +9438,7 @@
         </p:nvSpPr>
         <p:spPr>
           <a:xfrm>
-            <a:off x="7498079" y="2606040"/>
+            <a:off x="7498079" y="2044700"/>
             <a:ext cx="4114800" cy="457200"/>
           </a:xfrm>
           <a:prstGeom prst="roundRect">
@@ -9513,7 +9486,7 @@
         </p:nvSpPr>
         <p:spPr>
           <a:xfrm>
-            <a:off x="7635240" y="2679192"/>
+            <a:off x="7635240" y="2117852"/>
             <a:ext cx="365760" cy="274320"/>
           </a:xfrm>
           <a:prstGeom prst="rect">
@@ -9532,7 +9505,7 @@
                 <a:solidFill>
                   <a:srgbClr val="06D6A0"/>
                 </a:solidFill>
-                <a:latin typeface="Segoe UI"/>
+                <a:latin typeface="Segoe UI" panose="020B0502040204020203"/>
               </a:defRPr>
             </a:pPr>
             <a:r>
@@ -9549,7 +9522,7 @@
         </p:nvSpPr>
         <p:spPr>
           <a:xfrm>
-            <a:off x="8001000" y="2679192"/>
+            <a:off x="8001000" y="2117852"/>
             <a:ext cx="2011680" cy="274320"/>
           </a:xfrm>
           <a:prstGeom prst="rect">
@@ -9568,7 +9541,7 @@
                 <a:solidFill>
                   <a:srgbClr val="FFFFFF"/>
                 </a:solidFill>
-                <a:latin typeface="Consolas"/>
+                <a:latin typeface="Consolas" panose="020B0609020204030204"/>
               </a:defRPr>
             </a:pPr>
             <a:r>
@@ -9585,7 +9558,7 @@
         </p:nvSpPr>
         <p:spPr>
           <a:xfrm>
-            <a:off x="10149840" y="2679192"/>
+            <a:off x="10149840" y="2117852"/>
             <a:ext cx="1371600" cy="274320"/>
           </a:xfrm>
           <a:prstGeom prst="rect">
@@ -9604,7 +9577,7 @@
                 <a:solidFill>
                   <a:srgbClr val="06D6A0"/>
                 </a:solidFill>
-                <a:latin typeface="Segoe UI"/>
+                <a:latin typeface="Segoe UI" panose="020B0502040204020203"/>
               </a:defRPr>
             </a:pPr>
             <a:r>
@@ -9621,7 +9594,7 @@
         </p:nvSpPr>
         <p:spPr>
           <a:xfrm>
-            <a:off x="7498079" y="3200400"/>
+            <a:off x="7498079" y="2639060"/>
             <a:ext cx="4114800" cy="457200"/>
           </a:xfrm>
           <a:prstGeom prst="roundRect">
@@ -9669,7 +9642,7 @@
         </p:nvSpPr>
         <p:spPr>
           <a:xfrm>
-            <a:off x="7635240" y="3273552"/>
+            <a:off x="7635240" y="2712212"/>
             <a:ext cx="365760" cy="274320"/>
           </a:xfrm>
           <a:prstGeom prst="rect">
@@ -9688,7 +9661,7 @@
                 <a:solidFill>
                   <a:srgbClr val="06D6A0"/>
                 </a:solidFill>
-                <a:latin typeface="Segoe UI"/>
+                <a:latin typeface="Segoe UI" panose="020B0502040204020203"/>
               </a:defRPr>
             </a:pPr>
             <a:r>
@@ -9705,7 +9678,7 @@
         </p:nvSpPr>
         <p:spPr>
           <a:xfrm>
-            <a:off x="8001000" y="3273552"/>
+            <a:off x="8001000" y="2712212"/>
             <a:ext cx="2011680" cy="274320"/>
           </a:xfrm>
           <a:prstGeom prst="rect">
@@ -9724,7 +9697,7 @@
                 <a:solidFill>
                   <a:srgbClr val="FFFFFF"/>
                 </a:solidFill>
-                <a:latin typeface="Consolas"/>
+                <a:latin typeface="Consolas" panose="020B0609020204030204"/>
               </a:defRPr>
             </a:pPr>
             <a:r>
@@ -9741,7 +9714,7 @@
         </p:nvSpPr>
         <p:spPr>
           <a:xfrm>
-            <a:off x="10149840" y="3273552"/>
+            <a:off x="10149840" y="2712212"/>
             <a:ext cx="1371600" cy="274320"/>
           </a:xfrm>
           <a:prstGeom prst="rect">
@@ -9760,7 +9733,7 @@
                 <a:solidFill>
                   <a:srgbClr val="06D6A0"/>
                 </a:solidFill>
-                <a:latin typeface="Segoe UI"/>
+                <a:latin typeface="Segoe UI" panose="020B0502040204020203"/>
               </a:defRPr>
             </a:pPr>
             <a:r>
@@ -9777,7 +9750,7 @@
         </p:nvSpPr>
         <p:spPr>
           <a:xfrm>
-            <a:off x="7498079" y="3794760"/>
+            <a:off x="7498079" y="3233420"/>
             <a:ext cx="4114800" cy="457200"/>
           </a:xfrm>
           <a:prstGeom prst="roundRect">
@@ -9825,7 +9798,7 @@
         </p:nvSpPr>
         <p:spPr>
           <a:xfrm>
-            <a:off x="7635240" y="3867912"/>
+            <a:off x="7635240" y="3306572"/>
             <a:ext cx="365760" cy="274320"/>
           </a:xfrm>
           <a:prstGeom prst="rect">
@@ -9844,7 +9817,7 @@
                 <a:solidFill>
                   <a:srgbClr val="06D6A0"/>
                 </a:solidFill>
-                <a:latin typeface="Segoe UI"/>
+                <a:latin typeface="Segoe UI" panose="020B0502040204020203"/>
               </a:defRPr>
             </a:pPr>
             <a:r>
@@ -9861,7 +9834,7 @@
         </p:nvSpPr>
         <p:spPr>
           <a:xfrm>
-            <a:off x="8001000" y="3867912"/>
+            <a:off x="8001000" y="3306572"/>
             <a:ext cx="2011680" cy="274320"/>
           </a:xfrm>
           <a:prstGeom prst="rect">
@@ -9880,7 +9853,7 @@
                 <a:solidFill>
                   <a:srgbClr val="FFFFFF"/>
                 </a:solidFill>
-                <a:latin typeface="Consolas"/>
+                <a:latin typeface="Consolas" panose="020B0609020204030204"/>
               </a:defRPr>
             </a:pPr>
             <a:r>
@@ -9897,7 +9870,7 @@
         </p:nvSpPr>
         <p:spPr>
           <a:xfrm>
-            <a:off x="10149840" y="3867912"/>
+            <a:off x="10149840" y="3306572"/>
             <a:ext cx="1371600" cy="274320"/>
           </a:xfrm>
           <a:prstGeom prst="rect">
@@ -9916,7 +9889,7 @@
                 <a:solidFill>
                   <a:srgbClr val="06D6A0"/>
                 </a:solidFill>
-                <a:latin typeface="Segoe UI"/>
+                <a:latin typeface="Segoe UI" panose="020B0502040204020203"/>
               </a:defRPr>
             </a:pPr>
             <a:r>
@@ -9933,7 +9906,7 @@
         </p:nvSpPr>
         <p:spPr>
           <a:xfrm>
-            <a:off x="7498079" y="4389120"/>
+            <a:off x="7498079" y="3827780"/>
             <a:ext cx="4114800" cy="457200"/>
           </a:xfrm>
           <a:prstGeom prst="roundRect">
@@ -9981,7 +9954,7 @@
         </p:nvSpPr>
         <p:spPr>
           <a:xfrm>
-            <a:off x="7635240" y="4462272"/>
+            <a:off x="7635240" y="3900932"/>
             <a:ext cx="365760" cy="274320"/>
           </a:xfrm>
           <a:prstGeom prst="rect">
@@ -10000,7 +9973,7 @@
                 <a:solidFill>
                   <a:srgbClr val="06D6A0"/>
                 </a:solidFill>
-                <a:latin typeface="Segoe UI"/>
+                <a:latin typeface="Segoe UI" panose="020B0502040204020203"/>
               </a:defRPr>
             </a:pPr>
             <a:r>
@@ -10017,7 +9990,7 @@
         </p:nvSpPr>
         <p:spPr>
           <a:xfrm>
-            <a:off x="8001000" y="4462272"/>
+            <a:off x="8001000" y="3900932"/>
             <a:ext cx="2011680" cy="274320"/>
           </a:xfrm>
           <a:prstGeom prst="rect">
@@ -10036,7 +10009,7 @@
                 <a:solidFill>
                   <a:srgbClr val="FFFFFF"/>
                 </a:solidFill>
-                <a:latin typeface="Consolas"/>
+                <a:latin typeface="Consolas" panose="020B0609020204030204"/>
               </a:defRPr>
             </a:pPr>
             <a:r>
@@ -10053,7 +10026,7 @@
         </p:nvSpPr>
         <p:spPr>
           <a:xfrm>
-            <a:off x="10149840" y="4462272"/>
+            <a:off x="10149840" y="3900932"/>
             <a:ext cx="1371600" cy="274320"/>
           </a:xfrm>
           <a:prstGeom prst="rect">
@@ -10072,7 +10045,7 @@
                 <a:solidFill>
                   <a:srgbClr val="06D6A0"/>
                 </a:solidFill>
-                <a:latin typeface="Segoe UI"/>
+                <a:latin typeface="Segoe UI" panose="020B0502040204020203"/>
               </a:defRPr>
             </a:pPr>
             <a:r>
@@ -10089,7 +10062,7 @@
         </p:nvSpPr>
         <p:spPr>
           <a:xfrm>
-            <a:off x="7498079" y="4983480"/>
+            <a:off x="7498079" y="4422140"/>
             <a:ext cx="4114800" cy="457200"/>
           </a:xfrm>
           <a:prstGeom prst="roundRect">
@@ -10137,7 +10110,7 @@
         </p:nvSpPr>
         <p:spPr>
           <a:xfrm>
-            <a:off x="7635240" y="5056632"/>
+            <a:off x="7635240" y="4495292"/>
             <a:ext cx="365760" cy="274320"/>
           </a:xfrm>
           <a:prstGeom prst="rect">
@@ -10156,7 +10129,7 @@
                 <a:solidFill>
                   <a:srgbClr val="06D6A0"/>
                 </a:solidFill>
-                <a:latin typeface="Segoe UI"/>
+                <a:latin typeface="Segoe UI" panose="020B0502040204020203"/>
               </a:defRPr>
             </a:pPr>
             <a:r>
@@ -10173,7 +10146,7 @@
         </p:nvSpPr>
         <p:spPr>
           <a:xfrm>
-            <a:off x="8001000" y="5056632"/>
+            <a:off x="8001000" y="4495292"/>
             <a:ext cx="2011680" cy="274320"/>
           </a:xfrm>
           <a:prstGeom prst="rect">
@@ -10192,7 +10165,7 @@
                 <a:solidFill>
                   <a:srgbClr val="FFFFFF"/>
                 </a:solidFill>
-                <a:latin typeface="Consolas"/>
+                <a:latin typeface="Consolas" panose="020B0609020204030204"/>
               </a:defRPr>
             </a:pPr>
             <a:r>
@@ -10209,7 +10182,7 @@
         </p:nvSpPr>
         <p:spPr>
           <a:xfrm>
-            <a:off x="10149840" y="5056632"/>
+            <a:off x="10149840" y="4495292"/>
             <a:ext cx="1371600" cy="274320"/>
           </a:xfrm>
           <a:prstGeom prst="rect">
@@ -10228,7 +10201,7 @@
                 <a:solidFill>
                   <a:srgbClr val="06D6A0"/>
                 </a:solidFill>
-                <a:latin typeface="Segoe UI"/>
+                <a:latin typeface="Segoe UI" panose="020B0502040204020203"/>
               </a:defRPr>
             </a:pPr>
             <a:r>
@@ -10245,7 +10218,7 @@
         </p:nvSpPr>
         <p:spPr>
           <a:xfrm>
-            <a:off x="7498079" y="5577840"/>
+            <a:off x="7498079" y="5016500"/>
             <a:ext cx="4114800" cy="457200"/>
           </a:xfrm>
           <a:prstGeom prst="roundRect">
@@ -10293,7 +10266,7 @@
         </p:nvSpPr>
         <p:spPr>
           <a:xfrm>
-            <a:off x="7635240" y="5650992"/>
+            <a:off x="7635240" y="5089652"/>
             <a:ext cx="365760" cy="274320"/>
           </a:xfrm>
           <a:prstGeom prst="rect">
@@ -10312,7 +10285,7 @@
                 <a:solidFill>
                   <a:srgbClr val="06D6A0"/>
                 </a:solidFill>
-                <a:latin typeface="Segoe UI"/>
+                <a:latin typeface="Segoe UI" panose="020B0502040204020203"/>
               </a:defRPr>
             </a:pPr>
             <a:r>
@@ -10329,7 +10302,7 @@
         </p:nvSpPr>
         <p:spPr>
           <a:xfrm>
-            <a:off x="8001000" y="5650992"/>
+            <a:off x="8001000" y="5089652"/>
             <a:ext cx="2011680" cy="274320"/>
           </a:xfrm>
           <a:prstGeom prst="rect">
@@ -10348,7 +10321,7 @@
                 <a:solidFill>
                   <a:srgbClr val="FFFFFF"/>
                 </a:solidFill>
-                <a:latin typeface="Consolas"/>
+                <a:latin typeface="Consolas" panose="020B0609020204030204"/>
               </a:defRPr>
             </a:pPr>
             <a:r>
@@ -10365,7 +10338,7 @@
         </p:nvSpPr>
         <p:spPr>
           <a:xfrm>
-            <a:off x="10149840" y="5650992"/>
+            <a:off x="10149840" y="5089652"/>
             <a:ext cx="1371600" cy="274320"/>
           </a:xfrm>
           <a:prstGeom prst="rect">
@@ -10384,7 +10357,7 @@
                 <a:solidFill>
                   <a:srgbClr val="06D6A0"/>
                 </a:solidFill>
-                <a:latin typeface="Segoe UI"/>
+                <a:latin typeface="Segoe UI" panose="020B0502040204020203"/>
               </a:defRPr>
             </a:pPr>
             <a:r>
@@ -10466,7 +10439,7 @@
                 <a:solidFill>
                   <a:srgbClr val="FFFFFF"/>
                 </a:solidFill>
-                <a:latin typeface="Segoe UI"/>
+                <a:latin typeface="Segoe UI" panose="020B0502040204020203"/>
               </a:defRPr>
             </a:pPr>
             <a:r>
@@ -10502,7 +10475,7 @@
                 <a:solidFill>
                   <a:srgbClr val="8D99AE"/>
                 </a:solidFill>
-                <a:latin typeface="Segoe UI"/>
+                <a:latin typeface="Segoe UI" panose="020B0502040204020203"/>
               </a:defRPr>
             </a:pPr>
             <a:r>
@@ -10520,7 +10493,7 @@
 </file>
 
 <file path=ppt/slides/slide13.xml><?xml version="1.0" encoding="utf-8"?>
-<p:sld xmlns:a="http://schemas.openxmlformats.org/drawingml/2006/main" xmlns:p="http://schemas.openxmlformats.org/presentationml/2006/main" xmlns:r="http://schemas.openxmlformats.org/officeDocument/2006/relationships">
+<p:sld xmlns:a="http://schemas.openxmlformats.org/drawingml/2006/main" xmlns:r="http://schemas.openxmlformats.org/officeDocument/2006/relationships" xmlns:p="http://schemas.openxmlformats.org/presentationml/2006/main">
   <p:cSld>
     <p:bg>
       <p:bgPr>
@@ -10546,7 +10519,7 @@
         <p:spPr>
           <a:xfrm>
             <a:off x="731520" y="457200"/>
-            <a:ext cx="7315200" cy="640080"/>
+            <a:ext cx="9462770" cy="583565"/>
           </a:xfrm>
           <a:prstGeom prst="rect">
             <a:avLst/>
@@ -10564,7 +10537,7 @@
                 <a:solidFill>
                   <a:srgbClr val="FFFFFF"/>
                 </a:solidFill>
-                <a:latin typeface="Segoe UI"/>
+                <a:latin typeface="Segoe UI" panose="020B0502040204020203"/>
               </a:defRPr>
             </a:pPr>
             <a:r>
@@ -10651,7 +10624,7 @@
                           <a:solidFill>
                             <a:srgbClr val="FFFFFF"/>
                           </a:solidFill>
-                          <a:latin typeface="Segoe UI"/>
+                          <a:latin typeface="Segoe UI" panose="020B0502040204020203"/>
                         </a:defRPr>
                       </a:pPr>
                       <a:r>
@@ -10675,7 +10648,7 @@
                           <a:solidFill>
                             <a:srgbClr val="FFFFFF"/>
                           </a:solidFill>
-                          <a:latin typeface="Segoe UI"/>
+                          <a:latin typeface="Segoe UI" panose="020B0502040204020203"/>
                         </a:defRPr>
                       </a:pPr>
                       <a:r>
@@ -10699,7 +10672,7 @@
                           <a:solidFill>
                             <a:srgbClr val="FFFFFF"/>
                           </a:solidFill>
-                          <a:latin typeface="Segoe UI"/>
+                          <a:latin typeface="Segoe UI" panose="020B0502040204020203"/>
                         </a:defRPr>
                       </a:pPr>
                       <a:r>
@@ -10725,7 +10698,7 @@
                           <a:solidFill>
                             <a:srgbClr val="E0E1DD"/>
                           </a:solidFill>
-                          <a:latin typeface="Segoe UI"/>
+                          <a:latin typeface="Segoe UI" panose="020B0502040204020203"/>
                         </a:defRPr>
                       </a:pPr>
                       <a:r>
@@ -10749,7 +10722,7 @@
                           <a:solidFill>
                             <a:srgbClr val="EF476F"/>
                           </a:solidFill>
-                          <a:latin typeface="Segoe UI"/>
+                          <a:latin typeface="Segoe UI" panose="020B0502040204020203"/>
                         </a:defRPr>
                       </a:pPr>
                       <a:r>
@@ -10773,7 +10746,7 @@
                           <a:solidFill>
                             <a:srgbClr val="06D6A0"/>
                           </a:solidFill>
-                          <a:latin typeface="Segoe UI"/>
+                          <a:latin typeface="Segoe UI" panose="020B0502040204020203"/>
                         </a:defRPr>
                       </a:pPr>
                       <a:r>
@@ -10799,7 +10772,7 @@
                           <a:solidFill>
                             <a:srgbClr val="E0E1DD"/>
                           </a:solidFill>
-                          <a:latin typeface="Segoe UI"/>
+                          <a:latin typeface="Segoe UI" panose="020B0502040204020203"/>
                         </a:defRPr>
                       </a:pPr>
                       <a:r>
@@ -10823,7 +10796,7 @@
                           <a:solidFill>
                             <a:srgbClr val="EF476F"/>
                           </a:solidFill>
-                          <a:latin typeface="Segoe UI"/>
+                          <a:latin typeface="Segoe UI" panose="020B0502040204020203"/>
                         </a:defRPr>
                       </a:pPr>
                       <a:r>
@@ -10847,7 +10820,7 @@
                           <a:solidFill>
                             <a:srgbClr val="06D6A0"/>
                           </a:solidFill>
-                          <a:latin typeface="Segoe UI"/>
+                          <a:latin typeface="Segoe UI" panose="020B0502040204020203"/>
                         </a:defRPr>
                       </a:pPr>
                       <a:r>
@@ -10873,7 +10846,7 @@
                           <a:solidFill>
                             <a:srgbClr val="E0E1DD"/>
                           </a:solidFill>
-                          <a:latin typeface="Segoe UI"/>
+                          <a:latin typeface="Segoe UI" panose="020B0502040204020203"/>
                         </a:defRPr>
                       </a:pPr>
                       <a:r>
@@ -10897,7 +10870,7 @@
                           <a:solidFill>
                             <a:srgbClr val="EF476F"/>
                           </a:solidFill>
-                          <a:latin typeface="Segoe UI"/>
+                          <a:latin typeface="Segoe UI" panose="020B0502040204020203"/>
                         </a:defRPr>
                       </a:pPr>
                       <a:r>
@@ -10921,7 +10894,7 @@
                           <a:solidFill>
                             <a:srgbClr val="06D6A0"/>
                           </a:solidFill>
-                          <a:latin typeface="Segoe UI"/>
+                          <a:latin typeface="Segoe UI" panose="020B0502040204020203"/>
                         </a:defRPr>
                       </a:pPr>
                       <a:r>
@@ -10947,7 +10920,7 @@
                           <a:solidFill>
                             <a:srgbClr val="E0E1DD"/>
                           </a:solidFill>
-                          <a:latin typeface="Segoe UI"/>
+                          <a:latin typeface="Segoe UI" panose="020B0502040204020203"/>
                         </a:defRPr>
                       </a:pPr>
                       <a:r>
@@ -10971,7 +10944,7 @@
                           <a:solidFill>
                             <a:srgbClr val="EF476F"/>
                           </a:solidFill>
-                          <a:latin typeface="Segoe UI"/>
+                          <a:latin typeface="Segoe UI" panose="020B0502040204020203"/>
                         </a:defRPr>
                       </a:pPr>
                       <a:r>
@@ -10995,7 +10968,7 @@
                           <a:solidFill>
                             <a:srgbClr val="06D6A0"/>
                           </a:solidFill>
-                          <a:latin typeface="Segoe UI"/>
+                          <a:latin typeface="Segoe UI" panose="020B0502040204020203"/>
                         </a:defRPr>
                       </a:pPr>
                       <a:r>
@@ -11021,7 +10994,7 @@
                           <a:solidFill>
                             <a:srgbClr val="E0E1DD"/>
                           </a:solidFill>
-                          <a:latin typeface="Segoe UI"/>
+                          <a:latin typeface="Segoe UI" panose="020B0502040204020203"/>
                         </a:defRPr>
                       </a:pPr>
                       <a:r>
@@ -11045,7 +11018,7 @@
                           <a:solidFill>
                             <a:srgbClr val="EF476F"/>
                           </a:solidFill>
-                          <a:latin typeface="Segoe UI"/>
+                          <a:latin typeface="Segoe UI" panose="020B0502040204020203"/>
                         </a:defRPr>
                       </a:pPr>
                       <a:r>
@@ -11069,7 +11042,7 @@
                           <a:solidFill>
                             <a:srgbClr val="06D6A0"/>
                           </a:solidFill>
-                          <a:latin typeface="Segoe UI"/>
+                          <a:latin typeface="Segoe UI" panose="020B0502040204020203"/>
                         </a:defRPr>
                       </a:pPr>
                       <a:r>
@@ -11095,7 +11068,7 @@
                           <a:solidFill>
                             <a:srgbClr val="E0E1DD"/>
                           </a:solidFill>
-                          <a:latin typeface="Segoe UI"/>
+                          <a:latin typeface="Segoe UI" panose="020B0502040204020203"/>
                         </a:defRPr>
                       </a:pPr>
                       <a:r>
@@ -11119,7 +11092,7 @@
                           <a:solidFill>
                             <a:srgbClr val="EF476F"/>
                           </a:solidFill>
-                          <a:latin typeface="Segoe UI"/>
+                          <a:latin typeface="Segoe UI" panose="020B0502040204020203"/>
                         </a:defRPr>
                       </a:pPr>
                       <a:r>
@@ -11143,7 +11116,7 @@
                           <a:solidFill>
                             <a:srgbClr val="06D6A0"/>
                           </a:solidFill>
-                          <a:latin typeface="Segoe UI"/>
+                          <a:latin typeface="Segoe UI" panose="020B0502040204020203"/>
                         </a:defRPr>
                       </a:pPr>
                       <a:r>
@@ -11169,7 +11142,7 @@
                           <a:solidFill>
                             <a:srgbClr val="E0E1DD"/>
                           </a:solidFill>
-                          <a:latin typeface="Segoe UI"/>
+                          <a:latin typeface="Segoe UI" panose="020B0502040204020203"/>
                         </a:defRPr>
                       </a:pPr>
                       <a:r>
@@ -11193,7 +11166,7 @@
                           <a:solidFill>
                             <a:srgbClr val="EF476F"/>
                           </a:solidFill>
-                          <a:latin typeface="Segoe UI"/>
+                          <a:latin typeface="Segoe UI" panose="020B0502040204020203"/>
                         </a:defRPr>
                       </a:pPr>
                       <a:r>
@@ -11217,7 +11190,7 @@
                           <a:solidFill>
                             <a:srgbClr val="06D6A0"/>
                           </a:solidFill>
-                          <a:latin typeface="Segoe UI"/>
+                          <a:latin typeface="Segoe UI" panose="020B0502040204020203"/>
                         </a:defRPr>
                       </a:pPr>
                       <a:r>
@@ -11243,7 +11216,7 @@
                           <a:solidFill>
                             <a:srgbClr val="E0E1DD"/>
                           </a:solidFill>
-                          <a:latin typeface="Segoe UI"/>
+                          <a:latin typeface="Segoe UI" panose="020B0502040204020203"/>
                         </a:defRPr>
                       </a:pPr>
                       <a:r>
@@ -11267,7 +11240,7 @@
                           <a:solidFill>
                             <a:srgbClr val="EF476F"/>
                           </a:solidFill>
-                          <a:latin typeface="Segoe UI"/>
+                          <a:latin typeface="Segoe UI" panose="020B0502040204020203"/>
                         </a:defRPr>
                       </a:pPr>
                       <a:r>
@@ -11291,7 +11264,7 @@
                           <a:solidFill>
                             <a:srgbClr val="06D6A0"/>
                           </a:solidFill>
-                          <a:latin typeface="Segoe UI"/>
+                          <a:latin typeface="Segoe UI" panose="020B0502040204020203"/>
                         </a:defRPr>
                       </a:pPr>
                       <a:r>
@@ -11317,7 +11290,7 @@
                           <a:solidFill>
                             <a:srgbClr val="E0E1DD"/>
                           </a:solidFill>
-                          <a:latin typeface="Segoe UI"/>
+                          <a:latin typeface="Segoe UI" panose="020B0502040204020203"/>
                         </a:defRPr>
                       </a:pPr>
                       <a:r>
@@ -11341,7 +11314,7 @@
                           <a:solidFill>
                             <a:srgbClr val="EF476F"/>
                           </a:solidFill>
-                          <a:latin typeface="Segoe UI"/>
+                          <a:latin typeface="Segoe UI" panose="020B0502040204020203"/>
                         </a:defRPr>
                       </a:pPr>
                       <a:r>
@@ -11365,7 +11338,7 @@
                           <a:solidFill>
                             <a:srgbClr val="06D6A0"/>
                           </a:solidFill>
-                          <a:latin typeface="Segoe UI"/>
+                          <a:latin typeface="Segoe UI" panose="020B0502040204020203"/>
                         </a:defRPr>
                       </a:pPr>
                       <a:r>
@@ -11391,7 +11364,7 @@
                           <a:solidFill>
                             <a:srgbClr val="E0E1DD"/>
                           </a:solidFill>
-                          <a:latin typeface="Segoe UI"/>
+                          <a:latin typeface="Segoe UI" panose="020B0502040204020203"/>
                         </a:defRPr>
                       </a:pPr>
                       <a:r>
@@ -11415,7 +11388,7 @@
                           <a:solidFill>
                             <a:srgbClr val="EF476F"/>
                           </a:solidFill>
-                          <a:latin typeface="Segoe UI"/>
+                          <a:latin typeface="Segoe UI" panose="020B0502040204020203"/>
                         </a:defRPr>
                       </a:pPr>
                       <a:r>
@@ -11439,7 +11412,7 @@
                           <a:solidFill>
                             <a:srgbClr val="06D6A0"/>
                           </a:solidFill>
-                          <a:latin typeface="Segoe UI"/>
+                          <a:latin typeface="Segoe UI" panose="020B0502040204020203"/>
                         </a:defRPr>
                       </a:pPr>
                       <a:r>
@@ -11485,7 +11458,7 @@
                 <a:solidFill>
                   <a:srgbClr val="8D99AE"/>
                 </a:solidFill>
-                <a:latin typeface="Segoe UI"/>
+                <a:latin typeface="Segoe UI" panose="020B0502040204020203"/>
               </a:defRPr>
             </a:pPr>
             <a:r>
@@ -11521,7 +11494,7 @@
                 <a:solidFill>
                   <a:srgbClr val="8D99AE"/>
                 </a:solidFill>
-                <a:latin typeface="Segoe UI"/>
+                <a:latin typeface="Segoe UI" panose="020B0502040204020203"/>
               </a:defRPr>
             </a:pPr>
             <a:r>
@@ -11539,7 +11512,7 @@
 </file>
 
 <file path=ppt/slides/slide14.xml><?xml version="1.0" encoding="utf-8"?>
-<p:sld xmlns:a="http://schemas.openxmlformats.org/drawingml/2006/main" xmlns:p="http://schemas.openxmlformats.org/presentationml/2006/main" xmlns:r="http://schemas.openxmlformats.org/officeDocument/2006/relationships">
+<p:sld xmlns:a="http://schemas.openxmlformats.org/drawingml/2006/main" xmlns:r="http://schemas.openxmlformats.org/officeDocument/2006/relationships" xmlns:p="http://schemas.openxmlformats.org/presentationml/2006/main">
   <p:cSld>
     <p:bg>
       <p:bgPr>
@@ -11583,7 +11556,7 @@
                 <a:solidFill>
                   <a:srgbClr val="FFFFFF"/>
                 </a:solidFill>
-                <a:latin typeface="Segoe UI"/>
+                <a:latin typeface="Segoe UI" panose="020B0502040204020203"/>
               </a:defRPr>
             </a:pPr>
             <a:r>
@@ -11663,7 +11636,7 @@
                 <a:solidFill>
                   <a:srgbClr val="EF476F"/>
                 </a:solidFill>
-                <a:latin typeface="Segoe UI"/>
+                <a:latin typeface="Segoe UI" panose="020B0502040204020203"/>
               </a:defRPr>
             </a:pPr>
             <a:r>
@@ -11699,7 +11672,7 @@
                 <a:solidFill>
                   <a:srgbClr val="FFBE0B"/>
                 </a:solidFill>
-                <a:latin typeface="Segoe UI"/>
+                <a:latin typeface="Segoe UI" panose="020B0502040204020203"/>
               </a:defRPr>
             </a:pPr>
             <a:r>
@@ -11735,7 +11708,7 @@
                 <a:solidFill>
                   <a:srgbClr val="E0E1DD"/>
                 </a:solidFill>
-                <a:latin typeface="Segoe UI"/>
+                <a:latin typeface="Segoe UI" panose="020B0502040204020203"/>
               </a:defRPr>
             </a:pPr>
             <a:r>
@@ -11771,7 +11744,7 @@
                 <a:solidFill>
                   <a:srgbClr val="FFBE0B"/>
                 </a:solidFill>
-                <a:latin typeface="Segoe UI"/>
+                <a:latin typeface="Segoe UI" panose="020B0502040204020203"/>
               </a:defRPr>
             </a:pPr>
             <a:r>
@@ -11807,7 +11780,7 @@
                 <a:solidFill>
                   <a:srgbClr val="E0E1DD"/>
                 </a:solidFill>
-                <a:latin typeface="Segoe UI"/>
+                <a:latin typeface="Segoe UI" panose="020B0502040204020203"/>
               </a:defRPr>
             </a:pPr>
             <a:r>
@@ -11843,7 +11816,7 @@
                 <a:solidFill>
                   <a:srgbClr val="FFBE0B"/>
                 </a:solidFill>
-                <a:latin typeface="Segoe UI"/>
+                <a:latin typeface="Segoe UI" panose="020B0502040204020203"/>
               </a:defRPr>
             </a:pPr>
             <a:r>
@@ -11879,7 +11852,7 @@
                 <a:solidFill>
                   <a:srgbClr val="E0E1DD"/>
                 </a:solidFill>
-                <a:latin typeface="Segoe UI"/>
+                <a:latin typeface="Segoe UI" panose="020B0502040204020203"/>
               </a:defRPr>
             </a:pPr>
             <a:r>
@@ -11915,7 +11888,7 @@
                 <a:solidFill>
                   <a:srgbClr val="FFBE0B"/>
                 </a:solidFill>
-                <a:latin typeface="Segoe UI"/>
+                <a:latin typeface="Segoe UI" panose="020B0502040204020203"/>
               </a:defRPr>
             </a:pPr>
             <a:r>
@@ -11951,7 +11924,7 @@
                 <a:solidFill>
                   <a:srgbClr val="E0E1DD"/>
                 </a:solidFill>
-                <a:latin typeface="Segoe UI"/>
+                <a:latin typeface="Segoe UI" panose="020B0502040204020203"/>
               </a:defRPr>
             </a:pPr>
             <a:r>
@@ -11987,7 +11960,7 @@
                 <a:solidFill>
                   <a:srgbClr val="FFBE0B"/>
                 </a:solidFill>
-                <a:latin typeface="Segoe UI"/>
+                <a:latin typeface="Segoe UI" panose="020B0502040204020203"/>
               </a:defRPr>
             </a:pPr>
             <a:r>
@@ -12023,7 +11996,7 @@
                 <a:solidFill>
                   <a:srgbClr val="E0E1DD"/>
                 </a:solidFill>
-                <a:latin typeface="Segoe UI"/>
+                <a:latin typeface="Segoe UI" panose="020B0502040204020203"/>
               </a:defRPr>
             </a:pPr>
             <a:r>
@@ -12059,7 +12032,7 @@
                 <a:solidFill>
                   <a:srgbClr val="FFBE0B"/>
                 </a:solidFill>
-                <a:latin typeface="Segoe UI"/>
+                <a:latin typeface="Segoe UI" panose="020B0502040204020203"/>
               </a:defRPr>
             </a:pPr>
             <a:r>
@@ -12095,7 +12068,7 @@
                 <a:solidFill>
                   <a:srgbClr val="E0E1DD"/>
                 </a:solidFill>
-                <a:latin typeface="Segoe UI"/>
+                <a:latin typeface="Segoe UI" panose="020B0502040204020203"/>
               </a:defRPr>
             </a:pPr>
             <a:r>
@@ -12131,7 +12104,7 @@
                 <a:solidFill>
                   <a:srgbClr val="06D6A0"/>
                 </a:solidFill>
-                <a:latin typeface="Segoe UI"/>
+                <a:latin typeface="Segoe UI" panose="020B0502040204020203"/>
               </a:defRPr>
             </a:pPr>
             <a:r>
@@ -12213,7 +12186,7 @@
                 <a:solidFill>
                   <a:srgbClr val="FFFFFF"/>
                 </a:solidFill>
-                <a:latin typeface="Segoe UI"/>
+                <a:latin typeface="Segoe UI" panose="020B0502040204020203"/>
               </a:defRPr>
             </a:pPr>
             <a:r>
@@ -12249,7 +12222,7 @@
                 <a:solidFill>
                   <a:srgbClr val="FFFFFF"/>
                 </a:solidFill>
-                <a:latin typeface="Segoe UI"/>
+                <a:latin typeface="Segoe UI" panose="020B0502040204020203"/>
               </a:defRPr>
             </a:pPr>
             <a:r>
@@ -12285,7 +12258,7 @@
                 <a:solidFill>
                   <a:srgbClr val="8D99AE"/>
                 </a:solidFill>
-                <a:latin typeface="Segoe UI"/>
+                <a:latin typeface="Segoe UI" panose="020B0502040204020203"/>
               </a:defRPr>
             </a:pPr>
             <a:r>
@@ -12367,7 +12340,7 @@
                 <a:solidFill>
                   <a:srgbClr val="FFFFFF"/>
                 </a:solidFill>
-                <a:latin typeface="Segoe UI"/>
+                <a:latin typeface="Segoe UI" panose="020B0502040204020203"/>
               </a:defRPr>
             </a:pPr>
             <a:r>
@@ -12403,7 +12376,7 @@
                 <a:solidFill>
                   <a:srgbClr val="FFFFFF"/>
                 </a:solidFill>
-                <a:latin typeface="Segoe UI"/>
+                <a:latin typeface="Segoe UI" panose="020B0502040204020203"/>
               </a:defRPr>
             </a:pPr>
             <a:r>
@@ -12439,7 +12412,7 @@
                 <a:solidFill>
                   <a:srgbClr val="8D99AE"/>
                 </a:solidFill>
-                <a:latin typeface="Segoe UI"/>
+                <a:latin typeface="Segoe UI" panose="020B0502040204020203"/>
               </a:defRPr>
             </a:pPr>
             <a:r>
@@ -12521,7 +12494,7 @@
                 <a:solidFill>
                   <a:srgbClr val="FFFFFF"/>
                 </a:solidFill>
-                <a:latin typeface="Segoe UI"/>
+                <a:latin typeface="Segoe UI" panose="020B0502040204020203"/>
               </a:defRPr>
             </a:pPr>
             <a:r>
@@ -12557,7 +12530,7 @@
                 <a:solidFill>
                   <a:srgbClr val="FFFFFF"/>
                 </a:solidFill>
-                <a:latin typeface="Segoe UI"/>
+                <a:latin typeface="Segoe UI" panose="020B0502040204020203"/>
               </a:defRPr>
             </a:pPr>
             <a:r>
@@ -12593,7 +12566,7 @@
                 <a:solidFill>
                   <a:srgbClr val="8D99AE"/>
                 </a:solidFill>
-                <a:latin typeface="Segoe UI"/>
+                <a:latin typeface="Segoe UI" panose="020B0502040204020203"/>
               </a:defRPr>
             </a:pPr>
             <a:r>
@@ -12675,7 +12648,7 @@
                 <a:solidFill>
                   <a:srgbClr val="FFFFFF"/>
                 </a:solidFill>
-                <a:latin typeface="Segoe UI"/>
+                <a:latin typeface="Segoe UI" panose="020B0502040204020203"/>
               </a:defRPr>
             </a:pPr>
             <a:r>
@@ -12711,7 +12684,7 @@
                 <a:solidFill>
                   <a:srgbClr val="FFFFFF"/>
                 </a:solidFill>
-                <a:latin typeface="Segoe UI"/>
+                <a:latin typeface="Segoe UI" panose="020B0502040204020203"/>
               </a:defRPr>
             </a:pPr>
             <a:r>
@@ -12747,7 +12720,7 @@
                 <a:solidFill>
                   <a:srgbClr val="8D99AE"/>
                 </a:solidFill>
-                <a:latin typeface="Segoe UI"/>
+                <a:latin typeface="Segoe UI" panose="020B0502040204020203"/>
               </a:defRPr>
             </a:pPr>
             <a:r>
@@ -12829,7 +12802,7 @@
                 <a:solidFill>
                   <a:srgbClr val="FFFFFF"/>
                 </a:solidFill>
-                <a:latin typeface="Segoe UI"/>
+                <a:latin typeface="Segoe UI" panose="020B0502040204020203"/>
               </a:defRPr>
             </a:pPr>
             <a:r>
@@ -12865,7 +12838,7 @@
                 <a:solidFill>
                   <a:srgbClr val="FFFFFF"/>
                 </a:solidFill>
-                <a:latin typeface="Segoe UI"/>
+                <a:latin typeface="Segoe UI" panose="020B0502040204020203"/>
               </a:defRPr>
             </a:pPr>
             <a:r>
@@ -12901,7 +12874,7 @@
                 <a:solidFill>
                   <a:srgbClr val="8D99AE"/>
                 </a:solidFill>
-                <a:latin typeface="Segoe UI"/>
+                <a:latin typeface="Segoe UI" panose="020B0502040204020203"/>
               </a:defRPr>
             </a:pPr>
             <a:r>
@@ -12983,7 +12956,7 @@
                 <a:solidFill>
                   <a:srgbClr val="FFFFFF"/>
                 </a:solidFill>
-                <a:latin typeface="Segoe UI"/>
+                <a:latin typeface="Segoe UI" panose="020B0502040204020203"/>
               </a:defRPr>
             </a:pPr>
             <a:r>
@@ -13019,7 +12992,7 @@
                 <a:solidFill>
                   <a:srgbClr val="FFFFFF"/>
                 </a:solidFill>
-                <a:latin typeface="Segoe UI"/>
+                <a:latin typeface="Segoe UI" panose="020B0502040204020203"/>
               </a:defRPr>
             </a:pPr>
             <a:r>
@@ -13055,7 +13028,7 @@
                 <a:solidFill>
                   <a:srgbClr val="8D99AE"/>
                 </a:solidFill>
-                <a:latin typeface="Segoe UI"/>
+                <a:latin typeface="Segoe UI" panose="020B0502040204020203"/>
               </a:defRPr>
             </a:pPr>
             <a:r>
@@ -13137,7 +13110,7 @@
                 <a:solidFill>
                   <a:srgbClr val="FFFFFF"/>
                 </a:solidFill>
-                <a:latin typeface="Segoe UI"/>
+                <a:latin typeface="Segoe UI" panose="020B0502040204020203"/>
               </a:defRPr>
             </a:pPr>
             <a:r>
@@ -13173,7 +13146,7 @@
                 <a:solidFill>
                   <a:srgbClr val="FFFFFF"/>
                 </a:solidFill>
-                <a:latin typeface="Segoe UI"/>
+                <a:latin typeface="Segoe UI" panose="020B0502040204020203"/>
               </a:defRPr>
             </a:pPr>
             <a:r>
@@ -13209,7 +13182,7 @@
                 <a:solidFill>
                   <a:srgbClr val="8D99AE"/>
                 </a:solidFill>
-                <a:latin typeface="Segoe UI"/>
+                <a:latin typeface="Segoe UI" panose="020B0502040204020203"/>
               </a:defRPr>
             </a:pPr>
             <a:r>
@@ -13245,7 +13218,7 @@
                 <a:solidFill>
                   <a:srgbClr val="8D99AE"/>
                 </a:solidFill>
-                <a:latin typeface="Segoe UI"/>
+                <a:latin typeface="Segoe UI" panose="020B0502040204020203"/>
               </a:defRPr>
             </a:pPr>
             <a:r>
@@ -13281,7 +13254,7 @@
                 <a:solidFill>
                   <a:srgbClr val="8D99AE"/>
                 </a:solidFill>
-                <a:latin typeface="Segoe UI"/>
+                <a:latin typeface="Segoe UI" panose="020B0502040204020203"/>
               </a:defRPr>
             </a:pPr>
             <a:r>
@@ -13299,7 +13272,7 @@
 </file>
 
 <file path=ppt/slides/slide15.xml><?xml version="1.0" encoding="utf-8"?>
-<p:sld xmlns:a="http://schemas.openxmlformats.org/drawingml/2006/main" xmlns:p="http://schemas.openxmlformats.org/presentationml/2006/main" xmlns:r="http://schemas.openxmlformats.org/officeDocument/2006/relationships">
+<p:sld xmlns:a="http://schemas.openxmlformats.org/drawingml/2006/main" xmlns:r="http://schemas.openxmlformats.org/officeDocument/2006/relationships" xmlns:p="http://schemas.openxmlformats.org/presentationml/2006/main">
   <p:cSld>
     <p:bg>
       <p:bgPr>
@@ -13389,7 +13362,7 @@
                 <a:solidFill>
                   <a:srgbClr val="FFFFFF"/>
                 </a:solidFill>
-                <a:latin typeface="Segoe UI"/>
+                <a:latin typeface="Segoe UI" panose="020B0502040204020203"/>
               </a:defRPr>
             </a:pPr>
             <a:r>
@@ -13469,7 +13442,7 @@
                 <a:solidFill>
                   <a:srgbClr val="06D6A0"/>
                 </a:solidFill>
-                <a:latin typeface="Segoe UI"/>
+                <a:latin typeface="Segoe UI" panose="020B0502040204020203"/>
               </a:defRPr>
             </a:pPr>
             <a:r>
@@ -13505,7 +13478,7 @@
                 <a:solidFill>
                   <a:srgbClr val="E0E1DD"/>
                 </a:solidFill>
-                <a:latin typeface="Segoe UI"/>
+                <a:latin typeface="Segoe UI" panose="020B0502040204020203"/>
               </a:defRPr>
             </a:pPr>
             <a:r>
@@ -13541,7 +13514,7 @@
                 <a:solidFill>
                   <a:srgbClr val="06D6A0"/>
                 </a:solidFill>
-                <a:latin typeface="Segoe UI"/>
+                <a:latin typeface="Segoe UI" panose="020B0502040204020203"/>
               </a:defRPr>
             </a:pPr>
             <a:r>
@@ -13577,7 +13550,7 @@
                 <a:solidFill>
                   <a:srgbClr val="E0E1DD"/>
                 </a:solidFill>
-                <a:latin typeface="Segoe UI"/>
+                <a:latin typeface="Segoe UI" panose="020B0502040204020203"/>
               </a:defRPr>
             </a:pPr>
             <a:r>
@@ -13613,7 +13586,7 @@
                 <a:solidFill>
                   <a:srgbClr val="06D6A0"/>
                 </a:solidFill>
-                <a:latin typeface="Segoe UI"/>
+                <a:latin typeface="Segoe UI" panose="020B0502040204020203"/>
               </a:defRPr>
             </a:pPr>
             <a:r>
@@ -13649,7 +13622,7 @@
                 <a:solidFill>
                   <a:srgbClr val="E0E1DD"/>
                 </a:solidFill>
-                <a:latin typeface="Segoe UI"/>
+                <a:latin typeface="Segoe UI" panose="020B0502040204020203"/>
               </a:defRPr>
             </a:pPr>
             <a:r>
@@ -13685,7 +13658,7 @@
                 <a:solidFill>
                   <a:srgbClr val="06D6A0"/>
                 </a:solidFill>
-                <a:latin typeface="Segoe UI"/>
+                <a:latin typeface="Segoe UI" panose="020B0502040204020203"/>
               </a:defRPr>
             </a:pPr>
             <a:r>
@@ -13721,7 +13694,7 @@
                 <a:solidFill>
                   <a:srgbClr val="E0E1DD"/>
                 </a:solidFill>
-                <a:latin typeface="Segoe UI"/>
+                <a:latin typeface="Segoe UI" panose="020B0502040204020203"/>
               </a:defRPr>
             </a:pPr>
             <a:r>
@@ -13757,7 +13730,7 @@
                 <a:solidFill>
                   <a:srgbClr val="06D6A0"/>
                 </a:solidFill>
-                <a:latin typeface="Segoe UI"/>
+                <a:latin typeface="Segoe UI" panose="020B0502040204020203"/>
               </a:defRPr>
             </a:pPr>
             <a:r>
@@ -13793,7 +13766,7 @@
                 <a:solidFill>
                   <a:srgbClr val="E0E1DD"/>
                 </a:solidFill>
-                <a:latin typeface="Segoe UI"/>
+                <a:latin typeface="Segoe UI" panose="020B0502040204020203"/>
               </a:defRPr>
             </a:pPr>
             <a:r>
@@ -13829,7 +13802,7 @@
                 <a:solidFill>
                   <a:srgbClr val="06D6A0"/>
                 </a:solidFill>
-                <a:latin typeface="Segoe UI"/>
+                <a:latin typeface="Segoe UI" panose="020B0502040204020203"/>
               </a:defRPr>
             </a:pPr>
             <a:r>
@@ -13865,7 +13838,7 @@
                 <a:solidFill>
                   <a:srgbClr val="E0E1DD"/>
                 </a:solidFill>
-                <a:latin typeface="Segoe UI"/>
+                <a:latin typeface="Segoe UI" panose="020B0502040204020203"/>
               </a:defRPr>
             </a:pPr>
             <a:r>
@@ -13901,7 +13874,7 @@
                 <a:solidFill>
                   <a:srgbClr val="06D6A0"/>
                 </a:solidFill>
-                <a:latin typeface="Segoe UI"/>
+                <a:latin typeface="Segoe UI" panose="020B0502040204020203"/>
               </a:defRPr>
             </a:pPr>
             <a:r>
@@ -13937,7 +13910,7 @@
                 <a:solidFill>
                   <a:srgbClr val="E0E1DD"/>
                 </a:solidFill>
-                <a:latin typeface="Segoe UI"/>
+                <a:latin typeface="Segoe UI" panose="020B0502040204020203"/>
               </a:defRPr>
             </a:pPr>
             <a:r>
@@ -13973,7 +13946,7 @@
                 <a:solidFill>
                   <a:srgbClr val="06D6A0"/>
                 </a:solidFill>
-                <a:latin typeface="Segoe UI"/>
+                <a:latin typeface="Segoe UI" panose="020B0502040204020203"/>
               </a:defRPr>
             </a:pPr>
             <a:r>
@@ -14009,7 +13982,7 @@
                 <a:solidFill>
                   <a:srgbClr val="E0E1DD"/>
                 </a:solidFill>
-                <a:latin typeface="Segoe UI"/>
+                <a:latin typeface="Segoe UI" panose="020B0502040204020203"/>
               </a:defRPr>
             </a:pPr>
             <a:r>
@@ -14093,7 +14066,7 @@
                 <a:solidFill>
                   <a:srgbClr val="48CAE4"/>
                 </a:solidFill>
-                <a:latin typeface="Segoe UI"/>
+                <a:latin typeface="Segoe UI" panose="020B0502040204020203"/>
               </a:defRPr>
             </a:pPr>
             <a:r>
@@ -14110,8 +14083,8 @@
         </p:nvSpPr>
         <p:spPr>
           <a:xfrm>
-            <a:off x="0" y="6035040"/>
-            <a:ext cx="12191695" cy="548640"/>
+            <a:off x="-635" y="6005830"/>
+            <a:ext cx="12191695" cy="521970"/>
           </a:xfrm>
           <a:prstGeom prst="rect">
             <a:avLst/>
@@ -14129,11 +14102,11 @@
                 <a:solidFill>
                   <a:srgbClr val="FFFFFF"/>
                 </a:solidFill>
-                <a:latin typeface="Segoe UI"/>
-              </a:defRPr>
-            </a:pPr>
-            <a:r>
-              <a:t>Thank You!  —  Questions?</a:t>
+                <a:latin typeface="Segoe UI" panose="020B0502040204020203"/>
+              </a:defRPr>
+            </a:pPr>
+            <a:r>
+              <a:t>Thank You! </a:t>
             </a:r>
           </a:p>
         </p:txBody>
@@ -14165,7 +14138,7 @@
                 <a:solidFill>
                   <a:srgbClr val="8D99AE"/>
                 </a:solidFill>
-                <a:latin typeface="Segoe UI"/>
+                <a:latin typeface="Segoe UI" panose="020B0502040204020203"/>
               </a:defRPr>
             </a:pPr>
             <a:r>
@@ -14183,7 +14156,7 @@
 </file>
 
 <file path=ppt/slides/slide2.xml><?xml version="1.0" encoding="utf-8"?>
-<p:sld xmlns:a="http://schemas.openxmlformats.org/drawingml/2006/main" xmlns:p="http://schemas.openxmlformats.org/presentationml/2006/main" xmlns:r="http://schemas.openxmlformats.org/officeDocument/2006/relationships">
+<p:sld xmlns:a="http://schemas.openxmlformats.org/drawingml/2006/main" xmlns:r="http://schemas.openxmlformats.org/officeDocument/2006/relationships" xmlns:p="http://schemas.openxmlformats.org/presentationml/2006/main">
   <p:cSld>
     <p:bg>
       <p:bgPr>
@@ -14227,7 +14200,7 @@
                 <a:solidFill>
                   <a:srgbClr val="FFFFFF"/>
                 </a:solidFill>
-                <a:latin typeface="Segoe UI"/>
+                <a:latin typeface="Segoe UI" panose="020B0502040204020203"/>
               </a:defRPr>
             </a:pPr>
             <a:r>
@@ -14307,7 +14280,7 @@
                 <a:solidFill>
                   <a:srgbClr val="48CAE4"/>
                 </a:solidFill>
-                <a:latin typeface="Segoe UI"/>
+                <a:latin typeface="Segoe UI" panose="020B0502040204020203"/>
               </a:defRPr>
             </a:pPr>
             <a:r>
@@ -14343,7 +14316,7 @@
                 <a:solidFill>
                   <a:srgbClr val="FFFFFF"/>
                 </a:solidFill>
-                <a:latin typeface="Segoe UI"/>
+                <a:latin typeface="Segoe UI" panose="020B0502040204020203"/>
               </a:defRPr>
             </a:pPr>
             <a:r>
@@ -14379,7 +14352,7 @@
                 <a:solidFill>
                   <a:srgbClr val="8D99AE"/>
                 </a:solidFill>
-                <a:latin typeface="Segoe UI"/>
+                <a:latin typeface="Segoe UI" panose="020B0502040204020203"/>
               </a:defRPr>
             </a:pPr>
             <a:r>
@@ -14415,7 +14388,7 @@
                 <a:solidFill>
                   <a:srgbClr val="48CAE4"/>
                 </a:solidFill>
-                <a:latin typeface="Segoe UI"/>
+                <a:latin typeface="Segoe UI" panose="020B0502040204020203"/>
               </a:defRPr>
             </a:pPr>
             <a:r>
@@ -14451,7 +14424,7 @@
                 <a:solidFill>
                   <a:srgbClr val="FFFFFF"/>
                 </a:solidFill>
-                <a:latin typeface="Segoe UI"/>
+                <a:latin typeface="Segoe UI" panose="020B0502040204020203"/>
               </a:defRPr>
             </a:pPr>
             <a:r>
@@ -14487,7 +14460,7 @@
                 <a:solidFill>
                   <a:srgbClr val="8D99AE"/>
                 </a:solidFill>
-                <a:latin typeface="Segoe UI"/>
+                <a:latin typeface="Segoe UI" panose="020B0502040204020203"/>
               </a:defRPr>
             </a:pPr>
             <a:r>
@@ -14523,7 +14496,7 @@
                 <a:solidFill>
                   <a:srgbClr val="48CAE4"/>
                 </a:solidFill>
-                <a:latin typeface="Segoe UI"/>
+                <a:latin typeface="Segoe UI" panose="020B0502040204020203"/>
               </a:defRPr>
             </a:pPr>
             <a:r>
@@ -14559,7 +14532,7 @@
                 <a:solidFill>
                   <a:srgbClr val="FFFFFF"/>
                 </a:solidFill>
-                <a:latin typeface="Segoe UI"/>
+                <a:latin typeface="Segoe UI" panose="020B0502040204020203"/>
               </a:defRPr>
             </a:pPr>
             <a:r>
@@ -14595,7 +14568,7 @@
                 <a:solidFill>
                   <a:srgbClr val="8D99AE"/>
                 </a:solidFill>
-                <a:latin typeface="Segoe UI"/>
+                <a:latin typeface="Segoe UI" panose="020B0502040204020203"/>
               </a:defRPr>
             </a:pPr>
             <a:r>
@@ -14631,7 +14604,7 @@
                 <a:solidFill>
                   <a:srgbClr val="48CAE4"/>
                 </a:solidFill>
-                <a:latin typeface="Segoe UI"/>
+                <a:latin typeface="Segoe UI" panose="020B0502040204020203"/>
               </a:defRPr>
             </a:pPr>
             <a:r>
@@ -14667,7 +14640,7 @@
                 <a:solidFill>
                   <a:srgbClr val="FFFFFF"/>
                 </a:solidFill>
-                <a:latin typeface="Segoe UI"/>
+                <a:latin typeface="Segoe UI" panose="020B0502040204020203"/>
               </a:defRPr>
             </a:pPr>
             <a:r>
@@ -14703,7 +14676,7 @@
                 <a:solidFill>
                   <a:srgbClr val="8D99AE"/>
                 </a:solidFill>
-                <a:latin typeface="Segoe UI"/>
+                <a:latin typeface="Segoe UI" panose="020B0502040204020203"/>
               </a:defRPr>
             </a:pPr>
             <a:r>
@@ -14739,7 +14712,7 @@
                 <a:solidFill>
                   <a:srgbClr val="48CAE4"/>
                 </a:solidFill>
-                <a:latin typeface="Segoe UI"/>
+                <a:latin typeface="Segoe UI" panose="020B0502040204020203"/>
               </a:defRPr>
             </a:pPr>
             <a:r>
@@ -14775,7 +14748,7 @@
                 <a:solidFill>
                   <a:srgbClr val="FFFFFF"/>
                 </a:solidFill>
-                <a:latin typeface="Segoe UI"/>
+                <a:latin typeface="Segoe UI" panose="020B0502040204020203"/>
               </a:defRPr>
             </a:pPr>
             <a:r>
@@ -14811,7 +14784,7 @@
                 <a:solidFill>
                   <a:srgbClr val="8D99AE"/>
                 </a:solidFill>
-                <a:latin typeface="Segoe UI"/>
+                <a:latin typeface="Segoe UI" panose="020B0502040204020203"/>
               </a:defRPr>
             </a:pPr>
             <a:r>
@@ -14847,7 +14820,7 @@
                 <a:solidFill>
                   <a:srgbClr val="48CAE4"/>
                 </a:solidFill>
-                <a:latin typeface="Segoe UI"/>
+                <a:latin typeface="Segoe UI" panose="020B0502040204020203"/>
               </a:defRPr>
             </a:pPr>
             <a:r>
@@ -14883,7 +14856,7 @@
                 <a:solidFill>
                   <a:srgbClr val="FFFFFF"/>
                 </a:solidFill>
-                <a:latin typeface="Segoe UI"/>
+                <a:latin typeface="Segoe UI" panose="020B0502040204020203"/>
               </a:defRPr>
             </a:pPr>
             <a:r>
@@ -14919,7 +14892,7 @@
                 <a:solidFill>
                   <a:srgbClr val="8D99AE"/>
                 </a:solidFill>
-                <a:latin typeface="Segoe UI"/>
+                <a:latin typeface="Segoe UI" panose="020B0502040204020203"/>
               </a:defRPr>
             </a:pPr>
             <a:r>
@@ -14955,7 +14928,7 @@
                 <a:solidFill>
                   <a:srgbClr val="48CAE4"/>
                 </a:solidFill>
-                <a:latin typeface="Segoe UI"/>
+                <a:latin typeface="Segoe UI" panose="020B0502040204020203"/>
               </a:defRPr>
             </a:pPr>
             <a:r>
@@ -14991,7 +14964,7 @@
                 <a:solidFill>
                   <a:srgbClr val="FFFFFF"/>
                 </a:solidFill>
-                <a:latin typeface="Segoe UI"/>
+                <a:latin typeface="Segoe UI" panose="020B0502040204020203"/>
               </a:defRPr>
             </a:pPr>
             <a:r>
@@ -15027,7 +15000,7 @@
                 <a:solidFill>
                   <a:srgbClr val="8D99AE"/>
                 </a:solidFill>
-                <a:latin typeface="Segoe UI"/>
+                <a:latin typeface="Segoe UI" panose="020B0502040204020203"/>
               </a:defRPr>
             </a:pPr>
             <a:r>
@@ -15063,7 +15036,7 @@
                 <a:solidFill>
                   <a:srgbClr val="48CAE4"/>
                 </a:solidFill>
-                <a:latin typeface="Segoe UI"/>
+                <a:latin typeface="Segoe UI" panose="020B0502040204020203"/>
               </a:defRPr>
             </a:pPr>
             <a:r>
@@ -15099,7 +15072,7 @@
                 <a:solidFill>
                   <a:srgbClr val="FFFFFF"/>
                 </a:solidFill>
-                <a:latin typeface="Segoe UI"/>
+                <a:latin typeface="Segoe UI" panose="020B0502040204020203"/>
               </a:defRPr>
             </a:pPr>
             <a:r>
@@ -15135,7 +15108,7 @@
                 <a:solidFill>
                   <a:srgbClr val="8D99AE"/>
                 </a:solidFill>
-                <a:latin typeface="Segoe UI"/>
+                <a:latin typeface="Segoe UI" panose="020B0502040204020203"/>
               </a:defRPr>
             </a:pPr>
             <a:r>
@@ -15171,7 +15144,7 @@
                 <a:solidFill>
                   <a:srgbClr val="48CAE4"/>
                 </a:solidFill>
-                <a:latin typeface="Segoe UI"/>
+                <a:latin typeface="Segoe UI" panose="020B0502040204020203"/>
               </a:defRPr>
             </a:pPr>
             <a:r>
@@ -15207,7 +15180,7 @@
                 <a:solidFill>
                   <a:srgbClr val="FFFFFF"/>
                 </a:solidFill>
-                <a:latin typeface="Segoe UI"/>
+                <a:latin typeface="Segoe UI" panose="020B0502040204020203"/>
               </a:defRPr>
             </a:pPr>
             <a:r>
@@ -15243,7 +15216,7 @@
                 <a:solidFill>
                   <a:srgbClr val="8D99AE"/>
                 </a:solidFill>
-                <a:latin typeface="Segoe UI"/>
+                <a:latin typeface="Segoe UI" panose="020B0502040204020203"/>
               </a:defRPr>
             </a:pPr>
             <a:r>
@@ -15279,7 +15252,7 @@
                 <a:solidFill>
                   <a:srgbClr val="48CAE4"/>
                 </a:solidFill>
-                <a:latin typeface="Segoe UI"/>
+                <a:latin typeface="Segoe UI" panose="020B0502040204020203"/>
               </a:defRPr>
             </a:pPr>
             <a:r>
@@ -15315,7 +15288,7 @@
                 <a:solidFill>
                   <a:srgbClr val="FFFFFF"/>
                 </a:solidFill>
-                <a:latin typeface="Segoe UI"/>
+                <a:latin typeface="Segoe UI" panose="020B0502040204020203"/>
               </a:defRPr>
             </a:pPr>
             <a:r>
@@ -15351,7 +15324,7 @@
                 <a:solidFill>
                   <a:srgbClr val="8D99AE"/>
                 </a:solidFill>
-                <a:latin typeface="Segoe UI"/>
+                <a:latin typeface="Segoe UI" panose="020B0502040204020203"/>
               </a:defRPr>
             </a:pPr>
             <a:r>
@@ -15387,7 +15360,7 @@
                 <a:solidFill>
                   <a:srgbClr val="48CAE4"/>
                 </a:solidFill>
-                <a:latin typeface="Segoe UI"/>
+                <a:latin typeface="Segoe UI" panose="020B0502040204020203"/>
               </a:defRPr>
             </a:pPr>
             <a:r>
@@ -15423,7 +15396,7 @@
                 <a:solidFill>
                   <a:srgbClr val="FFFFFF"/>
                 </a:solidFill>
-                <a:latin typeface="Segoe UI"/>
+                <a:latin typeface="Segoe UI" panose="020B0502040204020203"/>
               </a:defRPr>
             </a:pPr>
             <a:r>
@@ -15459,7 +15432,7 @@
                 <a:solidFill>
                   <a:srgbClr val="8D99AE"/>
                 </a:solidFill>
-                <a:latin typeface="Segoe UI"/>
+                <a:latin typeface="Segoe UI" panose="020B0502040204020203"/>
               </a:defRPr>
             </a:pPr>
             <a:r>
@@ -15495,7 +15468,7 @@
                 <a:solidFill>
                   <a:srgbClr val="48CAE4"/>
                 </a:solidFill>
-                <a:latin typeface="Segoe UI"/>
+                <a:latin typeface="Segoe UI" panose="020B0502040204020203"/>
               </a:defRPr>
             </a:pPr>
             <a:r>
@@ -15531,7 +15504,7 @@
                 <a:solidFill>
                   <a:srgbClr val="FFFFFF"/>
                 </a:solidFill>
-                <a:latin typeface="Segoe UI"/>
+                <a:latin typeface="Segoe UI" panose="020B0502040204020203"/>
               </a:defRPr>
             </a:pPr>
             <a:r>
@@ -15567,7 +15540,7 @@
                 <a:solidFill>
                   <a:srgbClr val="8D99AE"/>
                 </a:solidFill>
-                <a:latin typeface="Segoe UI"/>
+                <a:latin typeface="Segoe UI" panose="020B0502040204020203"/>
               </a:defRPr>
             </a:pPr>
             <a:r>
@@ -15603,7 +15576,7 @@
                 <a:solidFill>
                   <a:srgbClr val="48CAE4"/>
                 </a:solidFill>
-                <a:latin typeface="Segoe UI"/>
+                <a:latin typeface="Segoe UI" panose="020B0502040204020203"/>
               </a:defRPr>
             </a:pPr>
             <a:r>
@@ -15639,7 +15612,7 @@
                 <a:solidFill>
                   <a:srgbClr val="FFFFFF"/>
                 </a:solidFill>
-                <a:latin typeface="Segoe UI"/>
+                <a:latin typeface="Segoe UI" panose="020B0502040204020203"/>
               </a:defRPr>
             </a:pPr>
             <a:r>
@@ -15675,7 +15648,7 @@
                 <a:solidFill>
                   <a:srgbClr val="8D99AE"/>
                 </a:solidFill>
-                <a:latin typeface="Segoe UI"/>
+                <a:latin typeface="Segoe UI" panose="020B0502040204020203"/>
               </a:defRPr>
             </a:pPr>
             <a:r>
@@ -15711,7 +15684,7 @@
                 <a:solidFill>
                   <a:srgbClr val="48CAE4"/>
                 </a:solidFill>
-                <a:latin typeface="Segoe UI"/>
+                <a:latin typeface="Segoe UI" panose="020B0502040204020203"/>
               </a:defRPr>
             </a:pPr>
             <a:r>
@@ -15747,7 +15720,7 @@
                 <a:solidFill>
                   <a:srgbClr val="FFFFFF"/>
                 </a:solidFill>
-                <a:latin typeface="Segoe UI"/>
+                <a:latin typeface="Segoe UI" panose="020B0502040204020203"/>
               </a:defRPr>
             </a:pPr>
             <a:r>
@@ -15783,7 +15756,7 @@
                 <a:solidFill>
                   <a:srgbClr val="8D99AE"/>
                 </a:solidFill>
-                <a:latin typeface="Segoe UI"/>
+                <a:latin typeface="Segoe UI" panose="020B0502040204020203"/>
               </a:defRPr>
             </a:pPr>
             <a:r>
@@ -15819,7 +15792,7 @@
                 <a:solidFill>
                   <a:srgbClr val="8D99AE"/>
                 </a:solidFill>
-                <a:latin typeface="Segoe UI"/>
+                <a:latin typeface="Segoe UI" panose="020B0502040204020203"/>
               </a:defRPr>
             </a:pPr>
             <a:r>
@@ -15855,7 +15828,7 @@
                 <a:solidFill>
                   <a:srgbClr val="8D99AE"/>
                 </a:solidFill>
-                <a:latin typeface="Segoe UI"/>
+                <a:latin typeface="Segoe UI" panose="020B0502040204020203"/>
               </a:defRPr>
             </a:pPr>
             <a:r>
@@ -15873,7 +15846,7 @@
 </file>
 
 <file path=ppt/slides/slide3.xml><?xml version="1.0" encoding="utf-8"?>
-<p:sld xmlns:a="http://schemas.openxmlformats.org/drawingml/2006/main" xmlns:p="http://schemas.openxmlformats.org/presentationml/2006/main" xmlns:r="http://schemas.openxmlformats.org/officeDocument/2006/relationships">
+<p:sld xmlns:a="http://schemas.openxmlformats.org/drawingml/2006/main" xmlns:r="http://schemas.openxmlformats.org/officeDocument/2006/relationships" xmlns:p="http://schemas.openxmlformats.org/presentationml/2006/main">
   <p:cSld>
     <p:bg>
       <p:bgPr>
@@ -15917,7 +15890,7 @@
                 <a:solidFill>
                   <a:srgbClr val="FFFFFF"/>
                 </a:solidFill>
-                <a:latin typeface="Segoe UI"/>
+                <a:latin typeface="Segoe UI" panose="020B0502040204020203"/>
               </a:defRPr>
             </a:pPr>
             <a:r>
@@ -16045,7 +16018,7 @@
                 <a:solidFill>
                   <a:srgbClr val="FFFFFF"/>
                 </a:solidFill>
-                <a:latin typeface="Segoe UI"/>
+                <a:latin typeface="Segoe UI" panose="020B0502040204020203"/>
               </a:defRPr>
             </a:pPr>
             <a:r>
@@ -16081,7 +16054,7 @@
                 <a:solidFill>
                   <a:srgbClr val="48CAE4"/>
                 </a:solidFill>
-                <a:latin typeface="Segoe UI"/>
+                <a:latin typeface="Segoe UI" panose="020B0502040204020203"/>
               </a:defRPr>
             </a:pPr>
             <a:r>
@@ -16117,7 +16090,7 @@
                 <a:solidFill>
                   <a:srgbClr val="E0E1DD"/>
                 </a:solidFill>
-                <a:latin typeface="Segoe UI"/>
+                <a:latin typeface="Segoe UI" panose="020B0502040204020203"/>
               </a:defRPr>
             </a:pPr>
             <a:r>
@@ -16201,7 +16174,7 @@
                 <a:solidFill>
                   <a:srgbClr val="FFFFFF"/>
                 </a:solidFill>
-                <a:latin typeface="Segoe UI"/>
+                <a:latin typeface="Segoe UI" panose="020B0502040204020203"/>
               </a:defRPr>
             </a:pPr>
             <a:r>
@@ -16237,7 +16210,7 @@
                 <a:solidFill>
                   <a:srgbClr val="48CAE4"/>
                 </a:solidFill>
-                <a:latin typeface="Segoe UI"/>
+                <a:latin typeface="Segoe UI" panose="020B0502040204020203"/>
               </a:defRPr>
             </a:pPr>
             <a:r>
@@ -16273,7 +16246,7 @@
                 <a:solidFill>
                   <a:srgbClr val="E0E1DD"/>
                 </a:solidFill>
-                <a:latin typeface="Segoe UI"/>
+                <a:latin typeface="Segoe UI" panose="020B0502040204020203"/>
               </a:defRPr>
             </a:pPr>
             <a:r>
@@ -16357,7 +16330,7 @@
                 <a:solidFill>
                   <a:srgbClr val="FFFFFF"/>
                 </a:solidFill>
-                <a:latin typeface="Segoe UI"/>
+                <a:latin typeface="Segoe UI" panose="020B0502040204020203"/>
               </a:defRPr>
             </a:pPr>
             <a:r>
@@ -16393,7 +16366,7 @@
                 <a:solidFill>
                   <a:srgbClr val="48CAE4"/>
                 </a:solidFill>
-                <a:latin typeface="Segoe UI"/>
+                <a:latin typeface="Segoe UI" panose="020B0502040204020203"/>
               </a:defRPr>
             </a:pPr>
             <a:r>
@@ -16429,7 +16402,7 @@
                 <a:solidFill>
                   <a:srgbClr val="E0E1DD"/>
                 </a:solidFill>
-                <a:latin typeface="Segoe UI"/>
+                <a:latin typeface="Segoe UI" panose="020B0502040204020203"/>
               </a:defRPr>
             </a:pPr>
             <a:r>
@@ -16513,7 +16486,7 @@
                 <a:solidFill>
                   <a:srgbClr val="FFFFFF"/>
                 </a:solidFill>
-                <a:latin typeface="Segoe UI"/>
+                <a:latin typeface="Segoe UI" panose="020B0502040204020203"/>
               </a:defRPr>
             </a:pPr>
             <a:r>
@@ -16549,7 +16522,7 @@
                 <a:solidFill>
                   <a:srgbClr val="48CAE4"/>
                 </a:solidFill>
-                <a:latin typeface="Segoe UI"/>
+                <a:latin typeface="Segoe UI" panose="020B0502040204020203"/>
               </a:defRPr>
             </a:pPr>
             <a:r>
@@ -16585,7 +16558,7 @@
                 <a:solidFill>
                   <a:srgbClr val="E0E1DD"/>
                 </a:solidFill>
-                <a:latin typeface="Segoe UI"/>
+                <a:latin typeface="Segoe UI" panose="020B0502040204020203"/>
               </a:defRPr>
             </a:pPr>
             <a:r>
@@ -16669,7 +16642,7 @@
                 <a:solidFill>
                   <a:srgbClr val="FFFFFF"/>
                 </a:solidFill>
-                <a:latin typeface="Segoe UI"/>
+                <a:latin typeface="Segoe UI" panose="020B0502040204020203"/>
               </a:defRPr>
             </a:pPr>
             <a:r>
@@ -16705,7 +16678,7 @@
                 <a:solidFill>
                   <a:srgbClr val="48CAE4"/>
                 </a:solidFill>
-                <a:latin typeface="Segoe UI"/>
+                <a:latin typeface="Segoe UI" panose="020B0502040204020203"/>
               </a:defRPr>
             </a:pPr>
             <a:r>
@@ -16741,7 +16714,7 @@
                 <a:solidFill>
                   <a:srgbClr val="E0E1DD"/>
                 </a:solidFill>
-                <a:latin typeface="Segoe UI"/>
+                <a:latin typeface="Segoe UI" panose="020B0502040204020203"/>
               </a:defRPr>
             </a:pPr>
             <a:r>
@@ -16825,7 +16798,7 @@
                 <a:solidFill>
                   <a:srgbClr val="FFFFFF"/>
                 </a:solidFill>
-                <a:latin typeface="Segoe UI"/>
+                <a:latin typeface="Segoe UI" panose="020B0502040204020203"/>
               </a:defRPr>
             </a:pPr>
             <a:r>
@@ -16861,7 +16834,7 @@
                 <a:solidFill>
                   <a:srgbClr val="48CAE4"/>
                 </a:solidFill>
-                <a:latin typeface="Segoe UI"/>
+                <a:latin typeface="Segoe UI" panose="020B0502040204020203"/>
               </a:defRPr>
             </a:pPr>
             <a:r>
@@ -16897,7 +16870,7 @@
                 <a:solidFill>
                   <a:srgbClr val="E0E1DD"/>
                 </a:solidFill>
-                <a:latin typeface="Segoe UI"/>
+                <a:latin typeface="Segoe UI" panose="020B0502040204020203"/>
               </a:defRPr>
             </a:pPr>
             <a:r>
@@ -16933,7 +16906,7 @@
                 <a:solidFill>
                   <a:srgbClr val="8D99AE"/>
                 </a:solidFill>
-                <a:latin typeface="Segoe UI"/>
+                <a:latin typeface="Segoe UI" panose="020B0502040204020203"/>
               </a:defRPr>
             </a:pPr>
             <a:r>
@@ -16969,7 +16942,7 @@
                 <a:solidFill>
                   <a:srgbClr val="8D99AE"/>
                 </a:solidFill>
-                <a:latin typeface="Segoe UI"/>
+                <a:latin typeface="Segoe UI" panose="020B0502040204020203"/>
               </a:defRPr>
             </a:pPr>
             <a:r>
@@ -17005,7 +16978,7 @@
                 <a:solidFill>
                   <a:srgbClr val="8D99AE"/>
                 </a:solidFill>
-                <a:latin typeface="Segoe UI"/>
+                <a:latin typeface="Segoe UI" panose="020B0502040204020203"/>
               </a:defRPr>
             </a:pPr>
             <a:r>
@@ -17023,7 +16996,7 @@
 </file>
 
 <file path=ppt/slides/slide4.xml><?xml version="1.0" encoding="utf-8"?>
-<p:sld xmlns:a="http://schemas.openxmlformats.org/drawingml/2006/main" xmlns:p="http://schemas.openxmlformats.org/presentationml/2006/main" xmlns:r="http://schemas.openxmlformats.org/officeDocument/2006/relationships">
+<p:sld xmlns:a="http://schemas.openxmlformats.org/drawingml/2006/main" xmlns:r="http://schemas.openxmlformats.org/officeDocument/2006/relationships" xmlns:p="http://schemas.openxmlformats.org/presentationml/2006/main">
   <p:cSld>
     <p:bg>
       <p:bgPr>
@@ -17067,7 +17040,7 @@
                 <a:solidFill>
                   <a:srgbClr val="FFFFFF"/>
                 </a:solidFill>
-                <a:latin typeface="Segoe UI"/>
+                <a:latin typeface="Segoe UI" panose="020B0502040204020203"/>
               </a:defRPr>
             </a:pPr>
             <a:r>
@@ -17147,7 +17120,7 @@
                 <a:solidFill>
                   <a:srgbClr val="06D6A0"/>
                 </a:solidFill>
-                <a:latin typeface="Segoe UI"/>
+                <a:latin typeface="Segoe UI" panose="020B0502040204020203"/>
               </a:defRPr>
             </a:pPr>
             <a:r>
@@ -17183,7 +17156,7 @@
                 <a:solidFill>
                   <a:srgbClr val="FFFFFF"/>
                 </a:solidFill>
-                <a:latin typeface="Segoe UI"/>
+                <a:latin typeface="Segoe UI" panose="020B0502040204020203"/>
               </a:defRPr>
             </a:pPr>
             <a:r>
@@ -17219,7 +17192,7 @@
                 <a:solidFill>
                   <a:srgbClr val="E0E1DD"/>
                 </a:solidFill>
-                <a:latin typeface="Segoe UI"/>
+                <a:latin typeface="Segoe UI" panose="020B0502040204020203"/>
               </a:defRPr>
             </a:pPr>
             <a:r>
@@ -17301,7 +17274,7 @@
                 <a:solidFill>
                   <a:srgbClr val="06D6A0"/>
                 </a:solidFill>
-                <a:latin typeface="Segoe UI"/>
+                <a:latin typeface="Segoe UI" panose="020B0502040204020203"/>
               </a:defRPr>
             </a:pPr>
             <a:r>
@@ -17337,7 +17310,7 @@
                 <a:solidFill>
                   <a:srgbClr val="FFFFFF"/>
                 </a:solidFill>
-                <a:latin typeface="Segoe UI"/>
+                <a:latin typeface="Segoe UI" panose="020B0502040204020203"/>
               </a:defRPr>
             </a:pPr>
             <a:r>
@@ -17373,7 +17346,7 @@
                 <a:solidFill>
                   <a:srgbClr val="E0E1DD"/>
                 </a:solidFill>
-                <a:latin typeface="Segoe UI"/>
+                <a:latin typeface="Segoe UI" panose="020B0502040204020203"/>
               </a:defRPr>
             </a:pPr>
             <a:r>
@@ -17455,7 +17428,7 @@
                 <a:solidFill>
                   <a:srgbClr val="06D6A0"/>
                 </a:solidFill>
-                <a:latin typeface="Segoe UI"/>
+                <a:latin typeface="Segoe UI" panose="020B0502040204020203"/>
               </a:defRPr>
             </a:pPr>
             <a:r>
@@ -17491,7 +17464,7 @@
                 <a:solidFill>
                   <a:srgbClr val="FFFFFF"/>
                 </a:solidFill>
-                <a:latin typeface="Segoe UI"/>
+                <a:latin typeface="Segoe UI" panose="020B0502040204020203"/>
               </a:defRPr>
             </a:pPr>
             <a:r>
@@ -17527,7 +17500,7 @@
                 <a:solidFill>
                   <a:srgbClr val="E0E1DD"/>
                 </a:solidFill>
-                <a:latin typeface="Segoe UI"/>
+                <a:latin typeface="Segoe UI" panose="020B0502040204020203"/>
               </a:defRPr>
             </a:pPr>
             <a:r>
@@ -17609,7 +17582,7 @@
                 <a:solidFill>
                   <a:srgbClr val="06D6A0"/>
                 </a:solidFill>
-                <a:latin typeface="Segoe UI"/>
+                <a:latin typeface="Segoe UI" panose="020B0502040204020203"/>
               </a:defRPr>
             </a:pPr>
             <a:r>
@@ -17645,7 +17618,7 @@
                 <a:solidFill>
                   <a:srgbClr val="FFFFFF"/>
                 </a:solidFill>
-                <a:latin typeface="Segoe UI"/>
+                <a:latin typeface="Segoe UI" panose="020B0502040204020203"/>
               </a:defRPr>
             </a:pPr>
             <a:r>
@@ -17681,7 +17654,7 @@
                 <a:solidFill>
                   <a:srgbClr val="E0E1DD"/>
                 </a:solidFill>
-                <a:latin typeface="Segoe UI"/>
+                <a:latin typeface="Segoe UI" panose="020B0502040204020203"/>
               </a:defRPr>
             </a:pPr>
             <a:r>
@@ -17763,7 +17736,7 @@
                 <a:solidFill>
                   <a:srgbClr val="06D6A0"/>
                 </a:solidFill>
-                <a:latin typeface="Segoe UI"/>
+                <a:latin typeface="Segoe UI" panose="020B0502040204020203"/>
               </a:defRPr>
             </a:pPr>
             <a:r>
@@ -17799,7 +17772,7 @@
                 <a:solidFill>
                   <a:srgbClr val="FFFFFF"/>
                 </a:solidFill>
-                <a:latin typeface="Segoe UI"/>
+                <a:latin typeface="Segoe UI" panose="020B0502040204020203"/>
               </a:defRPr>
             </a:pPr>
             <a:r>
@@ -17835,7 +17808,7 @@
                 <a:solidFill>
                   <a:srgbClr val="E0E1DD"/>
                 </a:solidFill>
-                <a:latin typeface="Segoe UI"/>
+                <a:latin typeface="Segoe UI" panose="020B0502040204020203"/>
               </a:defRPr>
             </a:pPr>
             <a:r>
@@ -17917,7 +17890,7 @@
                 <a:solidFill>
                   <a:srgbClr val="06D6A0"/>
                 </a:solidFill>
-                <a:latin typeface="Segoe UI"/>
+                <a:latin typeface="Segoe UI" panose="020B0502040204020203"/>
               </a:defRPr>
             </a:pPr>
             <a:r>
@@ -17953,7 +17926,7 @@
                 <a:solidFill>
                   <a:srgbClr val="FFFFFF"/>
                 </a:solidFill>
-                <a:latin typeface="Segoe UI"/>
+                <a:latin typeface="Segoe UI" panose="020B0502040204020203"/>
               </a:defRPr>
             </a:pPr>
             <a:r>
@@ -17989,7 +17962,7 @@
                 <a:solidFill>
                   <a:srgbClr val="E0E1DD"/>
                 </a:solidFill>
-                <a:latin typeface="Segoe UI"/>
+                <a:latin typeface="Segoe UI" panose="020B0502040204020203"/>
               </a:defRPr>
             </a:pPr>
             <a:r>
@@ -18071,7 +18044,7 @@
                 <a:solidFill>
                   <a:srgbClr val="06D6A0"/>
                 </a:solidFill>
-                <a:latin typeface="Segoe UI"/>
+                <a:latin typeface="Segoe UI" panose="020B0502040204020203"/>
               </a:defRPr>
             </a:pPr>
             <a:r>
@@ -18107,7 +18080,7 @@
                 <a:solidFill>
                   <a:srgbClr val="FFFFFF"/>
                 </a:solidFill>
-                <a:latin typeface="Segoe UI"/>
+                <a:latin typeface="Segoe UI" panose="020B0502040204020203"/>
               </a:defRPr>
             </a:pPr>
             <a:r>
@@ -18143,7 +18116,7 @@
                 <a:solidFill>
                   <a:srgbClr val="E0E1DD"/>
                 </a:solidFill>
-                <a:latin typeface="Segoe UI"/>
+                <a:latin typeface="Segoe UI" panose="020B0502040204020203"/>
               </a:defRPr>
             </a:pPr>
             <a:r>
@@ -18179,7 +18152,7 @@
                 <a:solidFill>
                   <a:srgbClr val="8D99AE"/>
                 </a:solidFill>
-                <a:latin typeface="Segoe UI"/>
+                <a:latin typeface="Segoe UI" panose="020B0502040204020203"/>
               </a:defRPr>
             </a:pPr>
             <a:r>
@@ -18215,7 +18188,7 @@
                 <a:solidFill>
                   <a:srgbClr val="8D99AE"/>
                 </a:solidFill>
-                <a:latin typeface="Segoe UI"/>
+                <a:latin typeface="Segoe UI" panose="020B0502040204020203"/>
               </a:defRPr>
             </a:pPr>
             <a:r>
@@ -18233,7 +18206,7 @@
 </file>
 
 <file path=ppt/slides/slide5.xml><?xml version="1.0" encoding="utf-8"?>
-<p:sld xmlns:a="http://schemas.openxmlformats.org/drawingml/2006/main" xmlns:p="http://schemas.openxmlformats.org/presentationml/2006/main" xmlns:r="http://schemas.openxmlformats.org/officeDocument/2006/relationships">
+<p:sld xmlns:a="http://schemas.openxmlformats.org/drawingml/2006/main" xmlns:r="http://schemas.openxmlformats.org/officeDocument/2006/relationships" xmlns:p="http://schemas.openxmlformats.org/presentationml/2006/main">
   <p:cSld>
     <p:bg>
       <p:bgPr>
@@ -18277,7 +18250,7 @@
                 <a:solidFill>
                   <a:srgbClr val="FFFFFF"/>
                 </a:solidFill>
-                <a:latin typeface="Segoe UI"/>
+                <a:latin typeface="Segoe UI" panose="020B0502040204020203"/>
               </a:defRPr>
             </a:pPr>
             <a:r>
@@ -18357,7 +18330,7 @@
                 <a:solidFill>
                   <a:srgbClr val="48CAE4"/>
                 </a:solidFill>
-                <a:latin typeface="Segoe UI"/>
+                <a:latin typeface="Segoe UI" panose="020B0502040204020203"/>
               </a:defRPr>
             </a:pPr>
             <a:r>
@@ -18400,7 +18373,7 @@
                           <a:solidFill>
                             <a:srgbClr val="FFFFFF"/>
                           </a:solidFill>
-                          <a:latin typeface="Segoe UI"/>
+                          <a:latin typeface="Segoe UI" panose="020B0502040204020203"/>
                         </a:defRPr>
                       </a:pPr>
                       <a:r>
@@ -18424,7 +18397,7 @@
                           <a:solidFill>
                             <a:srgbClr val="FFFFFF"/>
                           </a:solidFill>
-                          <a:latin typeface="Segoe UI"/>
+                          <a:latin typeface="Segoe UI" panose="020B0502040204020203"/>
                         </a:defRPr>
                       </a:pPr>
                       <a:r>
@@ -18448,7 +18421,7 @@
                           <a:solidFill>
                             <a:srgbClr val="FFFFFF"/>
                           </a:solidFill>
-                          <a:latin typeface="Segoe UI"/>
+                          <a:latin typeface="Segoe UI" panose="020B0502040204020203"/>
                         </a:defRPr>
                       </a:pPr>
                       <a:r>
@@ -18474,7 +18447,7 @@
                           <a:solidFill>
                             <a:srgbClr val="E0E1DD"/>
                           </a:solidFill>
-                          <a:latin typeface="Segoe UI"/>
+                          <a:latin typeface="Segoe UI" panose="020B0502040204020203"/>
                         </a:defRPr>
                       </a:pPr>
                       <a:r>
@@ -18498,7 +18471,7 @@
                           <a:solidFill>
                             <a:srgbClr val="E0E1DD"/>
                           </a:solidFill>
-                          <a:latin typeface="Segoe UI"/>
+                          <a:latin typeface="Segoe UI" panose="020B0502040204020203"/>
                         </a:defRPr>
                       </a:pPr>
                       <a:r>
@@ -18522,7 +18495,7 @@
                           <a:solidFill>
                             <a:srgbClr val="E0E1DD"/>
                           </a:solidFill>
-                          <a:latin typeface="Segoe UI"/>
+                          <a:latin typeface="Segoe UI" panose="020B0502040204020203"/>
                         </a:defRPr>
                       </a:pPr>
                       <a:r>
@@ -18548,7 +18521,7 @@
                           <a:solidFill>
                             <a:srgbClr val="E0E1DD"/>
                           </a:solidFill>
-                          <a:latin typeface="Segoe UI"/>
+                          <a:latin typeface="Segoe UI" panose="020B0502040204020203"/>
                         </a:defRPr>
                       </a:pPr>
                       <a:r>
@@ -18572,7 +18545,7 @@
                           <a:solidFill>
                             <a:srgbClr val="E0E1DD"/>
                           </a:solidFill>
-                          <a:latin typeface="Segoe UI"/>
+                          <a:latin typeface="Segoe UI" panose="020B0502040204020203"/>
                         </a:defRPr>
                       </a:pPr>
                       <a:r>
@@ -18596,7 +18569,7 @@
                           <a:solidFill>
                             <a:srgbClr val="E0E1DD"/>
                           </a:solidFill>
-                          <a:latin typeface="Segoe UI"/>
+                          <a:latin typeface="Segoe UI" panose="020B0502040204020203"/>
                         </a:defRPr>
                       </a:pPr>
                       <a:r>
@@ -18622,7 +18595,7 @@
                           <a:solidFill>
                             <a:srgbClr val="E0E1DD"/>
                           </a:solidFill>
-                          <a:latin typeface="Segoe UI"/>
+                          <a:latin typeface="Segoe UI" panose="020B0502040204020203"/>
                         </a:defRPr>
                       </a:pPr>
                       <a:r>
@@ -18646,7 +18619,7 @@
                           <a:solidFill>
                             <a:srgbClr val="E0E1DD"/>
                           </a:solidFill>
-                          <a:latin typeface="Segoe UI"/>
+                          <a:latin typeface="Segoe UI" panose="020B0502040204020203"/>
                         </a:defRPr>
                       </a:pPr>
                       <a:r>
@@ -18670,7 +18643,7 @@
                           <a:solidFill>
                             <a:srgbClr val="E0E1DD"/>
                           </a:solidFill>
-                          <a:latin typeface="Segoe UI"/>
+                          <a:latin typeface="Segoe UI" panose="020B0502040204020203"/>
                         </a:defRPr>
                       </a:pPr>
                       <a:r>
@@ -18696,7 +18669,7 @@
                           <a:solidFill>
                             <a:srgbClr val="E0E1DD"/>
                           </a:solidFill>
-                          <a:latin typeface="Segoe UI"/>
+                          <a:latin typeface="Segoe UI" panose="020B0502040204020203"/>
                         </a:defRPr>
                       </a:pPr>
                       <a:r>
@@ -18720,7 +18693,7 @@
                           <a:solidFill>
                             <a:srgbClr val="E0E1DD"/>
                           </a:solidFill>
-                          <a:latin typeface="Segoe UI"/>
+                          <a:latin typeface="Segoe UI" panose="020B0502040204020203"/>
                         </a:defRPr>
                       </a:pPr>
                       <a:r>
@@ -18744,7 +18717,7 @@
                           <a:solidFill>
                             <a:srgbClr val="E0E1DD"/>
                           </a:solidFill>
-                          <a:latin typeface="Segoe UI"/>
+                          <a:latin typeface="Segoe UI" panose="020B0502040204020203"/>
                         </a:defRPr>
                       </a:pPr>
                       <a:r>
@@ -18790,7 +18763,7 @@
                 <a:solidFill>
                   <a:srgbClr val="48CAE4"/>
                 </a:solidFill>
-                <a:latin typeface="Segoe UI"/>
+                <a:latin typeface="Segoe UI" panose="020B0502040204020203"/>
               </a:defRPr>
             </a:pPr>
             <a:r>
@@ -18834,7 +18807,7 @@
                           <a:solidFill>
                             <a:srgbClr val="FFFFFF"/>
                           </a:solidFill>
-                          <a:latin typeface="Segoe UI"/>
+                          <a:latin typeface="Segoe UI" panose="020B0502040204020203"/>
                         </a:defRPr>
                       </a:pPr>
                       <a:r>
@@ -18858,7 +18831,7 @@
                           <a:solidFill>
                             <a:srgbClr val="FFFFFF"/>
                           </a:solidFill>
-                          <a:latin typeface="Segoe UI"/>
+                          <a:latin typeface="Segoe UI" panose="020B0502040204020203"/>
                         </a:defRPr>
                       </a:pPr>
                       <a:r>
@@ -18882,7 +18855,7 @@
                           <a:solidFill>
                             <a:srgbClr val="FFFFFF"/>
                           </a:solidFill>
-                          <a:latin typeface="Segoe UI"/>
+                          <a:latin typeface="Segoe UI" panose="020B0502040204020203"/>
                         </a:defRPr>
                       </a:pPr>
                       <a:r>
@@ -18906,7 +18879,7 @@
                           <a:solidFill>
                             <a:srgbClr val="FFFFFF"/>
                           </a:solidFill>
-                          <a:latin typeface="Segoe UI"/>
+                          <a:latin typeface="Segoe UI" panose="020B0502040204020203"/>
                         </a:defRPr>
                       </a:pPr>
                       <a:r>
@@ -18932,7 +18905,7 @@
                           <a:solidFill>
                             <a:srgbClr val="E0E1DD"/>
                           </a:solidFill>
-                          <a:latin typeface="Segoe UI"/>
+                          <a:latin typeface="Segoe UI" panose="020B0502040204020203"/>
                         </a:defRPr>
                       </a:pPr>
                       <a:r>
@@ -18956,7 +18929,7 @@
                           <a:solidFill>
                             <a:srgbClr val="E0E1DD"/>
                           </a:solidFill>
-                          <a:latin typeface="Segoe UI"/>
+                          <a:latin typeface="Segoe UI" panose="020B0502040204020203"/>
                         </a:defRPr>
                       </a:pPr>
                       <a:r>
@@ -18980,7 +18953,7 @@
                           <a:solidFill>
                             <a:srgbClr val="E0E1DD"/>
                           </a:solidFill>
-                          <a:latin typeface="Segoe UI"/>
+                          <a:latin typeface="Segoe UI" panose="020B0502040204020203"/>
                         </a:defRPr>
                       </a:pPr>
                       <a:r>
@@ -19004,7 +18977,7 @@
                           <a:solidFill>
                             <a:srgbClr val="E0E1DD"/>
                           </a:solidFill>
-                          <a:latin typeface="Segoe UI"/>
+                          <a:latin typeface="Segoe UI" panose="020B0502040204020203"/>
                         </a:defRPr>
                       </a:pPr>
                       <a:r>
@@ -19030,7 +19003,7 @@
                           <a:solidFill>
                             <a:srgbClr val="E0E1DD"/>
                           </a:solidFill>
-                          <a:latin typeface="Segoe UI"/>
+                          <a:latin typeface="Segoe UI" panose="020B0502040204020203"/>
                         </a:defRPr>
                       </a:pPr>
                       <a:r>
@@ -19054,7 +19027,7 @@
                           <a:solidFill>
                             <a:srgbClr val="E0E1DD"/>
                           </a:solidFill>
-                          <a:latin typeface="Segoe UI"/>
+                          <a:latin typeface="Segoe UI" panose="020B0502040204020203"/>
                         </a:defRPr>
                       </a:pPr>
                       <a:r>
@@ -19078,7 +19051,7 @@
                           <a:solidFill>
                             <a:srgbClr val="E0E1DD"/>
                           </a:solidFill>
-                          <a:latin typeface="Segoe UI"/>
+                          <a:latin typeface="Segoe UI" panose="020B0502040204020203"/>
                         </a:defRPr>
                       </a:pPr>
                       <a:r>
@@ -19102,7 +19075,7 @@
                           <a:solidFill>
                             <a:srgbClr val="E0E1DD"/>
                           </a:solidFill>
-                          <a:latin typeface="Segoe UI"/>
+                          <a:latin typeface="Segoe UI" panose="020B0502040204020203"/>
                         </a:defRPr>
                       </a:pPr>
                       <a:r>
@@ -19128,7 +19101,7 @@
                           <a:solidFill>
                             <a:srgbClr val="E0E1DD"/>
                           </a:solidFill>
-                          <a:latin typeface="Segoe UI"/>
+                          <a:latin typeface="Segoe UI" panose="020B0502040204020203"/>
                         </a:defRPr>
                       </a:pPr>
                       <a:r>
@@ -19152,7 +19125,7 @@
                           <a:solidFill>
                             <a:srgbClr val="E0E1DD"/>
                           </a:solidFill>
-                          <a:latin typeface="Segoe UI"/>
+                          <a:latin typeface="Segoe UI" panose="020B0502040204020203"/>
                         </a:defRPr>
                       </a:pPr>
                       <a:r>
@@ -19176,7 +19149,7 @@
                           <a:solidFill>
                             <a:srgbClr val="E0E1DD"/>
                           </a:solidFill>
-                          <a:latin typeface="Segoe UI"/>
+                          <a:latin typeface="Segoe UI" panose="020B0502040204020203"/>
                         </a:defRPr>
                       </a:pPr>
                       <a:r>
@@ -19200,7 +19173,7 @@
                           <a:solidFill>
                             <a:srgbClr val="E0E1DD"/>
                           </a:solidFill>
-                          <a:latin typeface="Segoe UI"/>
+                          <a:latin typeface="Segoe UI" panose="020B0502040204020203"/>
                         </a:defRPr>
                       </a:pPr>
                       <a:r>
@@ -19226,7 +19199,7 @@
                           <a:solidFill>
                             <a:srgbClr val="E0E1DD"/>
                           </a:solidFill>
-                          <a:latin typeface="Segoe UI"/>
+                          <a:latin typeface="Segoe UI" panose="020B0502040204020203"/>
                         </a:defRPr>
                       </a:pPr>
                       <a:r>
@@ -19250,7 +19223,7 @@
                           <a:solidFill>
                             <a:srgbClr val="E0E1DD"/>
                           </a:solidFill>
-                          <a:latin typeface="Segoe UI"/>
+                          <a:latin typeface="Segoe UI" panose="020B0502040204020203"/>
                         </a:defRPr>
                       </a:pPr>
                       <a:r>
@@ -19274,7 +19247,7 @@
                           <a:solidFill>
                             <a:srgbClr val="E0E1DD"/>
                           </a:solidFill>
-                          <a:latin typeface="Segoe UI"/>
+                          <a:latin typeface="Segoe UI" panose="020B0502040204020203"/>
                         </a:defRPr>
                       </a:pPr>
                       <a:r>
@@ -19298,7 +19271,7 @@
                           <a:solidFill>
                             <a:srgbClr val="E0E1DD"/>
                           </a:solidFill>
-                          <a:latin typeface="Segoe UI"/>
+                          <a:latin typeface="Segoe UI" panose="020B0502040204020203"/>
                         </a:defRPr>
                       </a:pPr>
                       <a:r>
@@ -19374,7 +19347,7 @@
         <p:spPr>
           <a:xfrm>
             <a:off x="1005840" y="4846320"/>
-            <a:ext cx="10241280" cy="365760"/>
+            <a:ext cx="10241280" cy="352425"/>
           </a:xfrm>
           <a:prstGeom prst="rect">
             <a:avLst/>
@@ -19392,11 +19365,18 @@
                 <a:solidFill>
                   <a:srgbClr val="48CAE4"/>
                 </a:solidFill>
-                <a:latin typeface="Segoe UI"/>
-              </a:defRPr>
-            </a:pPr>
-            <a:r>
-              <a:t>🔑 Key Concept: Terraform State File</a:t>
+                <a:latin typeface="Segoe UI" panose="020B0502040204020203"/>
+              </a:defRPr>
+            </a:pPr>
+            <a:r>
+              <a:t>🔑 </a:t>
+            </a:r>
+            <a:r>
+              <a:rPr lang="en-IN"/>
+              <a:t> </a:t>
+            </a:r>
+            <a:r>
+              <a:t>Key Concept: Terraform State File</a:t>
             </a:r>
           </a:p>
         </p:txBody>
@@ -19428,7 +19408,7 @@
                 <a:solidFill>
                   <a:srgbClr val="E0E1DD"/>
                 </a:solidFill>
-                <a:latin typeface="Segoe UI"/>
+                <a:latin typeface="Segoe UI" panose="020B0502040204020203"/>
               </a:defRPr>
             </a:pPr>
             <a:r>
@@ -19464,7 +19444,7 @@
                 <a:solidFill>
                   <a:srgbClr val="8D99AE"/>
                 </a:solidFill>
-                <a:latin typeface="Segoe UI"/>
+                <a:latin typeface="Segoe UI" panose="020B0502040204020203"/>
               </a:defRPr>
             </a:pPr>
             <a:r>
@@ -19500,7 +19480,7 @@
                 <a:solidFill>
                   <a:srgbClr val="8D99AE"/>
                 </a:solidFill>
-                <a:latin typeface="Segoe UI"/>
+                <a:latin typeface="Segoe UI" panose="020B0502040204020203"/>
               </a:defRPr>
             </a:pPr>
             <a:r>
@@ -19518,7 +19498,7 @@
 </file>
 
 <file path=ppt/slides/slide6.xml><?xml version="1.0" encoding="utf-8"?>
-<p:sld xmlns:a="http://schemas.openxmlformats.org/drawingml/2006/main" xmlns:p="http://schemas.openxmlformats.org/presentationml/2006/main" xmlns:r="http://schemas.openxmlformats.org/officeDocument/2006/relationships">
+<p:sld xmlns:a="http://schemas.openxmlformats.org/drawingml/2006/main" xmlns:r="http://schemas.openxmlformats.org/officeDocument/2006/relationships" xmlns:p="http://schemas.openxmlformats.org/presentationml/2006/main">
   <p:cSld>
     <p:bg>
       <p:bgPr>
@@ -19562,7 +19542,7 @@
                 <a:solidFill>
                   <a:srgbClr val="FFFFFF"/>
                 </a:solidFill>
-                <a:latin typeface="Segoe UI"/>
+                <a:latin typeface="Segoe UI" panose="020B0502040204020203"/>
               </a:defRPr>
             </a:pPr>
             <a:r>
@@ -19598,7 +19578,7 @@
                 <a:solidFill>
                   <a:srgbClr val="8D99AE"/>
                 </a:solidFill>
-                <a:latin typeface="Segoe UI"/>
+                <a:latin typeface="Segoe UI" panose="020B0502040204020203"/>
               </a:defRPr>
             </a:pPr>
             <a:r>
@@ -19726,7 +19706,7 @@
                 <a:solidFill>
                   <a:srgbClr val="48CAE4"/>
                 </a:solidFill>
-                <a:latin typeface="Segoe UI"/>
+                <a:latin typeface="Segoe UI" panose="020B0502040204020203"/>
               </a:defRPr>
             </a:pPr>
             <a:r>
@@ -19810,7 +19790,7 @@
                 <a:solidFill>
                   <a:srgbClr val="06D6A0"/>
                 </a:solidFill>
-                <a:latin typeface="Segoe UI"/>
+                <a:latin typeface="Segoe UI" panose="020B0502040204020203"/>
               </a:defRPr>
             </a:pPr>
             <a:r>
@@ -19894,7 +19874,7 @@
                 <a:solidFill>
                   <a:srgbClr val="E0E1DD"/>
                 </a:solidFill>
-                <a:latin typeface="Segoe UI"/>
+                <a:latin typeface="Segoe UI" panose="020B0502040204020203"/>
               </a:defRPr>
             </a:pPr>
             <a:r>
@@ -19930,7 +19910,7 @@
                 <a:solidFill>
                   <a:srgbClr val="E0E1DD"/>
                 </a:solidFill>
-                <a:latin typeface="Segoe UI"/>
+                <a:latin typeface="Segoe UI" panose="020B0502040204020203"/>
               </a:defRPr>
             </a:pPr>
             <a:r>
@@ -19966,7 +19946,7 @@
                 <a:solidFill>
                   <a:srgbClr val="E0E1DD"/>
                 </a:solidFill>
-                <a:latin typeface="Segoe UI"/>
+                <a:latin typeface="Segoe UI" panose="020B0502040204020203"/>
               </a:defRPr>
             </a:pPr>
             <a:r>
@@ -20002,7 +19982,7 @@
                 <a:solidFill>
                   <a:srgbClr val="E0E1DD"/>
                 </a:solidFill>
-                <a:latin typeface="Segoe UI"/>
+                <a:latin typeface="Segoe UI" panose="020B0502040204020203"/>
               </a:defRPr>
             </a:pPr>
             <a:r>
@@ -20084,7 +20064,7 @@
                 <a:solidFill>
                   <a:srgbClr val="FFFFFF"/>
                 </a:solidFill>
-                <a:latin typeface="Segoe UI"/>
+                <a:latin typeface="Segoe UI" panose="020B0502040204020203"/>
               </a:defRPr>
             </a:pPr>
             <a:r>
@@ -20168,7 +20148,7 @@
                 <a:solidFill>
                   <a:srgbClr val="FFBE0B"/>
                 </a:solidFill>
-                <a:latin typeface="Segoe UI"/>
+                <a:latin typeface="Segoe UI" panose="020B0502040204020203"/>
               </a:defRPr>
             </a:pPr>
             <a:r>
@@ -20204,7 +20184,7 @@
                 <a:solidFill>
                   <a:srgbClr val="E0E1DD"/>
                 </a:solidFill>
-                <a:latin typeface="Segoe UI"/>
+                <a:latin typeface="Segoe UI" panose="020B0502040204020203"/>
               </a:defRPr>
             </a:pPr>
             <a:r>
@@ -20240,7 +20220,7 @@
                 <a:solidFill>
                   <a:srgbClr val="E0E1DD"/>
                 </a:solidFill>
-                <a:latin typeface="Segoe UI"/>
+                <a:latin typeface="Segoe UI" panose="020B0502040204020203"/>
               </a:defRPr>
             </a:pPr>
             <a:r>
@@ -20276,7 +20256,7 @@
                 <a:solidFill>
                   <a:srgbClr val="E0E1DD"/>
                 </a:solidFill>
-                <a:latin typeface="Segoe UI"/>
+                <a:latin typeface="Segoe UI" panose="020B0502040204020203"/>
               </a:defRPr>
             </a:pPr>
             <a:r>
@@ -20312,7 +20292,7 @@
                 <a:solidFill>
                   <a:srgbClr val="E0E1DD"/>
                 </a:solidFill>
-                <a:latin typeface="Segoe UI"/>
+                <a:latin typeface="Segoe UI" panose="020B0502040204020203"/>
               </a:defRPr>
             </a:pPr>
             <a:r>
@@ -20348,7 +20328,7 @@
                 <a:solidFill>
                   <a:srgbClr val="E0E1DD"/>
                 </a:solidFill>
-                <a:latin typeface="Segoe UI"/>
+                <a:latin typeface="Segoe UI" panose="020B0502040204020203"/>
               </a:defRPr>
             </a:pPr>
             <a:r>
@@ -20430,7 +20410,7 @@
                 <a:solidFill>
                   <a:srgbClr val="FFFFFF"/>
                 </a:solidFill>
-                <a:latin typeface="Segoe UI"/>
+                <a:latin typeface="Segoe UI" panose="020B0502040204020203"/>
               </a:defRPr>
             </a:pPr>
             <a:r>
@@ -20514,7 +20494,7 @@
                 <a:solidFill>
                   <a:srgbClr val="FFBE0B"/>
                 </a:solidFill>
-                <a:latin typeface="Segoe UI"/>
+                <a:latin typeface="Segoe UI" panose="020B0502040204020203"/>
               </a:defRPr>
             </a:pPr>
             <a:r>
@@ -20550,7 +20530,7 @@
                 <a:solidFill>
                   <a:srgbClr val="8D99AE"/>
                 </a:solidFill>
-                <a:latin typeface="Segoe UI"/>
+                <a:latin typeface="Segoe UI" panose="020B0502040204020203"/>
               </a:defRPr>
             </a:pPr>
             <a:r>
@@ -20568,7 +20548,7 @@
 </file>
 
 <file path=ppt/slides/slide7.xml><?xml version="1.0" encoding="utf-8"?>
-<p:sld xmlns:a="http://schemas.openxmlformats.org/drawingml/2006/main" xmlns:p="http://schemas.openxmlformats.org/presentationml/2006/main" xmlns:r="http://schemas.openxmlformats.org/officeDocument/2006/relationships">
+<p:sld xmlns:a="http://schemas.openxmlformats.org/drawingml/2006/main" xmlns:r="http://schemas.openxmlformats.org/officeDocument/2006/relationships" xmlns:p="http://schemas.openxmlformats.org/presentationml/2006/main">
   <p:cSld>
     <p:bg>
       <p:bgPr>
@@ -20612,7 +20592,7 @@
                 <a:solidFill>
                   <a:srgbClr val="FFFFFF"/>
                 </a:solidFill>
-                <a:latin typeface="Segoe UI"/>
+                <a:latin typeface="Segoe UI" panose="020B0502040204020203"/>
               </a:defRPr>
             </a:pPr>
             <a:r>
@@ -20699,7 +20679,7 @@
                           <a:solidFill>
                             <a:srgbClr val="FFFFFF"/>
                           </a:solidFill>
-                          <a:latin typeface="Segoe UI"/>
+                          <a:latin typeface="Segoe UI" panose="020B0502040204020203"/>
                         </a:defRPr>
                       </a:pPr>
                       <a:r>
@@ -20723,7 +20703,7 @@
                           <a:solidFill>
                             <a:srgbClr val="FFFFFF"/>
                           </a:solidFill>
-                          <a:latin typeface="Segoe UI"/>
+                          <a:latin typeface="Segoe UI" panose="020B0502040204020203"/>
                         </a:defRPr>
                       </a:pPr>
                       <a:r>
@@ -20747,7 +20727,7 @@
                           <a:solidFill>
                             <a:srgbClr val="FFFFFF"/>
                           </a:solidFill>
-                          <a:latin typeface="Segoe UI"/>
+                          <a:latin typeface="Segoe UI" panose="020B0502040204020203"/>
                         </a:defRPr>
                       </a:pPr>
                       <a:r>
@@ -20773,7 +20753,7 @@
                           <a:solidFill>
                             <a:srgbClr val="E0E1DD"/>
                           </a:solidFill>
-                          <a:latin typeface="Segoe UI"/>
+                          <a:latin typeface="Segoe UI" panose="020B0502040204020203"/>
                         </a:defRPr>
                       </a:pPr>
                       <a:r>
@@ -20797,7 +20777,7 @@
                           <a:solidFill>
                             <a:srgbClr val="E0E1DD"/>
                           </a:solidFill>
-                          <a:latin typeface="Segoe UI"/>
+                          <a:latin typeface="Segoe UI" panose="020B0502040204020203"/>
                         </a:defRPr>
                       </a:pPr>
                       <a:r>
@@ -20821,7 +20801,7 @@
                           <a:solidFill>
                             <a:srgbClr val="E0E1DD"/>
                           </a:solidFill>
-                          <a:latin typeface="Segoe UI"/>
+                          <a:latin typeface="Segoe UI" panose="020B0502040204020203"/>
                         </a:defRPr>
                       </a:pPr>
                       <a:r>
@@ -20847,7 +20827,7 @@
                           <a:solidFill>
                             <a:srgbClr val="E0E1DD"/>
                           </a:solidFill>
-                          <a:latin typeface="Segoe UI"/>
+                          <a:latin typeface="Segoe UI" panose="020B0502040204020203"/>
                         </a:defRPr>
                       </a:pPr>
                       <a:r>
@@ -20871,7 +20851,7 @@
                           <a:solidFill>
                             <a:srgbClr val="E0E1DD"/>
                           </a:solidFill>
-                          <a:latin typeface="Segoe UI"/>
+                          <a:latin typeface="Segoe UI" panose="020B0502040204020203"/>
                         </a:defRPr>
                       </a:pPr>
                       <a:r>
@@ -20895,7 +20875,7 @@
                           <a:solidFill>
                             <a:srgbClr val="E0E1DD"/>
                           </a:solidFill>
-                          <a:latin typeface="Segoe UI"/>
+                          <a:latin typeface="Segoe UI" panose="020B0502040204020203"/>
                         </a:defRPr>
                       </a:pPr>
                       <a:r>
@@ -20921,7 +20901,7 @@
                           <a:solidFill>
                             <a:srgbClr val="E0E1DD"/>
                           </a:solidFill>
-                          <a:latin typeface="Segoe UI"/>
+                          <a:latin typeface="Segoe UI" panose="020B0502040204020203"/>
                         </a:defRPr>
                       </a:pPr>
                       <a:r>
@@ -20945,7 +20925,7 @@
                           <a:solidFill>
                             <a:srgbClr val="E0E1DD"/>
                           </a:solidFill>
-                          <a:latin typeface="Segoe UI"/>
+                          <a:latin typeface="Segoe UI" panose="020B0502040204020203"/>
                         </a:defRPr>
                       </a:pPr>
                       <a:r>
@@ -20969,7 +20949,7 @@
                           <a:solidFill>
                             <a:srgbClr val="E0E1DD"/>
                           </a:solidFill>
-                          <a:latin typeface="Segoe UI"/>
+                          <a:latin typeface="Segoe UI" panose="020B0502040204020203"/>
                         </a:defRPr>
                       </a:pPr>
                       <a:r>
@@ -20995,7 +20975,7 @@
                           <a:solidFill>
                             <a:srgbClr val="E0E1DD"/>
                           </a:solidFill>
-                          <a:latin typeface="Segoe UI"/>
+                          <a:latin typeface="Segoe UI" panose="020B0502040204020203"/>
                         </a:defRPr>
                       </a:pPr>
                       <a:r>
@@ -21019,7 +20999,7 @@
                           <a:solidFill>
                             <a:srgbClr val="E0E1DD"/>
                           </a:solidFill>
-                          <a:latin typeface="Segoe UI"/>
+                          <a:latin typeface="Segoe UI" panose="020B0502040204020203"/>
                         </a:defRPr>
                       </a:pPr>
                       <a:r>
@@ -21043,7 +21023,7 @@
                           <a:solidFill>
                             <a:srgbClr val="E0E1DD"/>
                           </a:solidFill>
-                          <a:latin typeface="Segoe UI"/>
+                          <a:latin typeface="Segoe UI" panose="020B0502040204020203"/>
                         </a:defRPr>
                       </a:pPr>
                       <a:r>
@@ -21069,7 +21049,7 @@
                           <a:solidFill>
                             <a:srgbClr val="E0E1DD"/>
                           </a:solidFill>
-                          <a:latin typeface="Segoe UI"/>
+                          <a:latin typeface="Segoe UI" panose="020B0502040204020203"/>
                         </a:defRPr>
                       </a:pPr>
                       <a:r>
@@ -21093,7 +21073,7 @@
                           <a:solidFill>
                             <a:srgbClr val="E0E1DD"/>
                           </a:solidFill>
-                          <a:latin typeface="Segoe UI"/>
+                          <a:latin typeface="Segoe UI" panose="020B0502040204020203"/>
                         </a:defRPr>
                       </a:pPr>
                       <a:r>
@@ -21117,7 +21097,7 @@
                           <a:solidFill>
                             <a:srgbClr val="E0E1DD"/>
                           </a:solidFill>
-                          <a:latin typeface="Segoe UI"/>
+                          <a:latin typeface="Segoe UI" panose="020B0502040204020203"/>
                         </a:defRPr>
                       </a:pPr>
                       <a:r>
@@ -21143,7 +21123,7 @@
                           <a:solidFill>
                             <a:srgbClr val="E0E1DD"/>
                           </a:solidFill>
-                          <a:latin typeface="Segoe UI"/>
+                          <a:latin typeface="Segoe UI" panose="020B0502040204020203"/>
                         </a:defRPr>
                       </a:pPr>
                       <a:r>
@@ -21167,7 +21147,7 @@
                           <a:solidFill>
                             <a:srgbClr val="E0E1DD"/>
                           </a:solidFill>
-                          <a:latin typeface="Segoe UI"/>
+                          <a:latin typeface="Segoe UI" panose="020B0502040204020203"/>
                         </a:defRPr>
                       </a:pPr>
                       <a:r>
@@ -21191,7 +21171,7 @@
                           <a:solidFill>
                             <a:srgbClr val="E0E1DD"/>
                           </a:solidFill>
-                          <a:latin typeface="Segoe UI"/>
+                          <a:latin typeface="Segoe UI" panose="020B0502040204020203"/>
                         </a:defRPr>
                       </a:pPr>
                       <a:r>
@@ -21217,7 +21197,7 @@
                           <a:solidFill>
                             <a:srgbClr val="E0E1DD"/>
                           </a:solidFill>
-                          <a:latin typeface="Segoe UI"/>
+                          <a:latin typeface="Segoe UI" panose="020B0502040204020203"/>
                         </a:defRPr>
                       </a:pPr>
                       <a:r>
@@ -21241,7 +21221,7 @@
                           <a:solidFill>
                             <a:srgbClr val="E0E1DD"/>
                           </a:solidFill>
-                          <a:latin typeface="Segoe UI"/>
+                          <a:latin typeface="Segoe UI" panose="020B0502040204020203"/>
                         </a:defRPr>
                       </a:pPr>
                       <a:r>
@@ -21265,7 +21245,7 @@
                           <a:solidFill>
                             <a:srgbClr val="E0E1DD"/>
                           </a:solidFill>
-                          <a:latin typeface="Segoe UI"/>
+                          <a:latin typeface="Segoe UI" panose="020B0502040204020203"/>
                         </a:defRPr>
                       </a:pPr>
                       <a:r>
@@ -21291,7 +21271,7 @@
                           <a:solidFill>
                             <a:srgbClr val="E0E1DD"/>
                           </a:solidFill>
-                          <a:latin typeface="Segoe UI"/>
+                          <a:latin typeface="Segoe UI" panose="020B0502040204020203"/>
                         </a:defRPr>
                       </a:pPr>
                       <a:r>
@@ -21315,7 +21295,7 @@
                           <a:solidFill>
                             <a:srgbClr val="E0E1DD"/>
                           </a:solidFill>
-                          <a:latin typeface="Segoe UI"/>
+                          <a:latin typeface="Segoe UI" panose="020B0502040204020203"/>
                         </a:defRPr>
                       </a:pPr>
                       <a:r>
@@ -21339,7 +21319,7 @@
                           <a:solidFill>
                             <a:srgbClr val="E0E1DD"/>
                           </a:solidFill>
-                          <a:latin typeface="Segoe UI"/>
+                          <a:latin typeface="Segoe UI" panose="020B0502040204020203"/>
                         </a:defRPr>
                       </a:pPr>
                       <a:r>
@@ -21365,7 +21345,7 @@
                           <a:solidFill>
                             <a:srgbClr val="E0E1DD"/>
                           </a:solidFill>
-                          <a:latin typeface="Segoe UI"/>
+                          <a:latin typeface="Segoe UI" panose="020B0502040204020203"/>
                         </a:defRPr>
                       </a:pPr>
                       <a:r>
@@ -21389,7 +21369,7 @@
                           <a:solidFill>
                             <a:srgbClr val="E0E1DD"/>
                           </a:solidFill>
-                          <a:latin typeface="Segoe UI"/>
+                          <a:latin typeface="Segoe UI" panose="020B0502040204020203"/>
                         </a:defRPr>
                       </a:pPr>
                       <a:r>
@@ -21413,7 +21393,7 @@
                           <a:solidFill>
                             <a:srgbClr val="E0E1DD"/>
                           </a:solidFill>
-                          <a:latin typeface="Segoe UI"/>
+                          <a:latin typeface="Segoe UI" panose="020B0502040204020203"/>
                         </a:defRPr>
                       </a:pPr>
                       <a:r>
@@ -21505,7 +21485,7 @@
                 <a:solidFill>
                   <a:srgbClr val="FFFFFF"/>
                 </a:solidFill>
-                <a:latin typeface="Segoe UI"/>
+                <a:latin typeface="Segoe UI" panose="020B0502040204020203"/>
               </a:defRPr>
             </a:pPr>
             <a:r>
@@ -21541,7 +21521,7 @@
                 <a:solidFill>
                   <a:srgbClr val="8D99AE"/>
                 </a:solidFill>
-                <a:latin typeface="Segoe UI"/>
+                <a:latin typeface="Segoe UI" panose="020B0502040204020203"/>
               </a:defRPr>
             </a:pPr>
             <a:r>
@@ -21577,7 +21557,7 @@
                 <a:solidFill>
                   <a:srgbClr val="8D99AE"/>
                 </a:solidFill>
-                <a:latin typeface="Segoe UI"/>
+                <a:latin typeface="Segoe UI" panose="020B0502040204020203"/>
               </a:defRPr>
             </a:pPr>
             <a:r>
@@ -21595,7 +21575,7 @@
 </file>
 
 <file path=ppt/slides/slide8.xml><?xml version="1.0" encoding="utf-8"?>
-<p:sld xmlns:a="http://schemas.openxmlformats.org/drawingml/2006/main" xmlns:p="http://schemas.openxmlformats.org/presentationml/2006/main" xmlns:r="http://schemas.openxmlformats.org/officeDocument/2006/relationships">
+<p:sld xmlns:a="http://schemas.openxmlformats.org/drawingml/2006/main" xmlns:r="http://schemas.openxmlformats.org/officeDocument/2006/relationships" xmlns:p="http://schemas.openxmlformats.org/presentationml/2006/main">
   <p:cSld>
     <p:bg>
       <p:bgPr>
@@ -21639,7 +21619,7 @@
                 <a:solidFill>
                   <a:srgbClr val="FFFFFF"/>
                 </a:solidFill>
-                <a:latin typeface="Segoe UI"/>
+                <a:latin typeface="Segoe UI" panose="020B0502040204020203"/>
               </a:defRPr>
             </a:pPr>
             <a:r>
@@ -21701,7 +21681,7 @@
         <p:spPr>
           <a:xfrm>
             <a:off x="731520" y="1371600"/>
-            <a:ext cx="5486400" cy="4389120"/>
+            <a:ext cx="5486400" cy="4677410"/>
           </a:xfrm>
           <a:prstGeom prst="roundRect">
             <a:avLst>
@@ -21767,7 +21747,7 @@
                 <a:solidFill>
                   <a:srgbClr val="48CAE4"/>
                 </a:solidFill>
-                <a:latin typeface="Consolas"/>
+                <a:latin typeface="Consolas" panose="020B0609020204030204"/>
               </a:defRPr>
             </a:pPr>
             <a:r>
@@ -21803,7 +21783,7 @@
                 <a:solidFill>
                   <a:srgbClr val="48CAE4"/>
                 </a:solidFill>
-                <a:latin typeface="Consolas"/>
+                <a:latin typeface="Consolas" panose="020B0609020204030204"/>
               </a:defRPr>
             </a:pPr>
             <a:r>
@@ -21839,7 +21819,7 @@
                 <a:solidFill>
                   <a:srgbClr val="E0E1DD"/>
                 </a:solidFill>
-                <a:latin typeface="Consolas"/>
+                <a:latin typeface="Consolas" panose="020B0609020204030204"/>
               </a:defRPr>
             </a:pPr>
             <a:r>
@@ -21875,7 +21855,7 @@
                 <a:solidFill>
                   <a:srgbClr val="E0E1DD"/>
                 </a:solidFill>
-                <a:latin typeface="Consolas"/>
+                <a:latin typeface="Consolas" panose="020B0609020204030204"/>
               </a:defRPr>
             </a:pPr>
             <a:r>
@@ -21911,7 +21891,7 @@
                 <a:solidFill>
                   <a:srgbClr val="E0E1DD"/>
                 </a:solidFill>
-                <a:latin typeface="Consolas"/>
+                <a:latin typeface="Consolas" panose="020B0609020204030204"/>
               </a:defRPr>
             </a:pPr>
             <a:r>
@@ -21947,7 +21927,7 @@
                 <a:solidFill>
                   <a:srgbClr val="E0E1DD"/>
                 </a:solidFill>
-                <a:latin typeface="Consolas"/>
+                <a:latin typeface="Consolas" panose="020B0609020204030204"/>
               </a:defRPr>
             </a:pPr>
             <a:r>
@@ -21983,7 +21963,7 @@
                 <a:solidFill>
                   <a:srgbClr val="E0E1DD"/>
                 </a:solidFill>
-                <a:latin typeface="Consolas"/>
+                <a:latin typeface="Consolas" panose="020B0609020204030204"/>
               </a:defRPr>
             </a:pPr>
             <a:r>
@@ -22019,7 +21999,7 @@
                 <a:solidFill>
                   <a:srgbClr val="E0E1DD"/>
                 </a:solidFill>
-                <a:latin typeface="Consolas"/>
+                <a:latin typeface="Consolas" panose="020B0609020204030204"/>
               </a:defRPr>
             </a:pPr>
             <a:r>
@@ -22055,7 +22035,7 @@
                 <a:solidFill>
                   <a:srgbClr val="E0E1DD"/>
                 </a:solidFill>
-                <a:latin typeface="Consolas"/>
+                <a:latin typeface="Consolas" panose="020B0609020204030204"/>
               </a:defRPr>
             </a:pPr>
             <a:r>
@@ -22091,7 +22071,7 @@
                 <a:solidFill>
                   <a:srgbClr val="E0E1DD"/>
                 </a:solidFill>
-                <a:latin typeface="Consolas"/>
+                <a:latin typeface="Consolas" panose="020B0609020204030204"/>
               </a:defRPr>
             </a:pPr>
             <a:r>
@@ -22127,7 +22107,7 @@
                 <a:solidFill>
                   <a:srgbClr val="E0E1DD"/>
                 </a:solidFill>
-                <a:latin typeface="Consolas"/>
+                <a:latin typeface="Consolas" panose="020B0609020204030204"/>
               </a:defRPr>
             </a:pPr>
             <a:r>
@@ -22163,7 +22143,7 @@
                 <a:solidFill>
                   <a:srgbClr val="E0E1DD"/>
                 </a:solidFill>
-                <a:latin typeface="Consolas"/>
+                <a:latin typeface="Consolas" panose="020B0609020204030204"/>
               </a:defRPr>
             </a:pPr>
             <a:r>
@@ -22199,7 +22179,7 @@
                 <a:solidFill>
                   <a:srgbClr val="E0E1DD"/>
                 </a:solidFill>
-                <a:latin typeface="Consolas"/>
+                <a:latin typeface="Consolas" panose="020B0609020204030204"/>
               </a:defRPr>
             </a:pPr>
             <a:r>
@@ -22235,7 +22215,7 @@
                 <a:solidFill>
                   <a:srgbClr val="E0E1DD"/>
                 </a:solidFill>
-                <a:latin typeface="Consolas"/>
+                <a:latin typeface="Consolas" panose="020B0609020204030204"/>
               </a:defRPr>
             </a:pPr>
             <a:r>
@@ -22271,7 +22251,7 @@
                 <a:solidFill>
                   <a:srgbClr val="E0E1DD"/>
                 </a:solidFill>
-                <a:latin typeface="Consolas"/>
+                <a:latin typeface="Consolas" panose="020B0609020204030204"/>
               </a:defRPr>
             </a:pPr>
             <a:r>
@@ -22307,7 +22287,7 @@
                 <a:solidFill>
                   <a:srgbClr val="48CAE4"/>
                 </a:solidFill>
-                <a:latin typeface="Consolas"/>
+                <a:latin typeface="Consolas" panose="020B0609020204030204"/>
               </a:defRPr>
             </a:pPr>
             <a:r>
@@ -22343,7 +22323,7 @@
                 <a:solidFill>
                   <a:srgbClr val="E0E1DD"/>
                 </a:solidFill>
-                <a:latin typeface="Consolas"/>
+                <a:latin typeface="Consolas" panose="020B0609020204030204"/>
               </a:defRPr>
             </a:pPr>
             <a:r>
@@ -22379,7 +22359,7 @@
                 <a:solidFill>
                   <a:srgbClr val="E0E1DD"/>
                 </a:solidFill>
-                <a:latin typeface="Consolas"/>
+                <a:latin typeface="Consolas" panose="020B0609020204030204"/>
               </a:defRPr>
             </a:pPr>
             <a:r>
@@ -22415,7 +22395,7 @@
                 <a:solidFill>
                   <a:srgbClr val="E0E1DD"/>
                 </a:solidFill>
-                <a:latin typeface="Consolas"/>
+                <a:latin typeface="Consolas" panose="020B0609020204030204"/>
               </a:defRPr>
             </a:pPr>
             <a:r>
@@ -22451,7 +22431,7 @@
                 <a:solidFill>
                   <a:srgbClr val="48CAE4"/>
                 </a:solidFill>
-                <a:latin typeface="Segoe UI"/>
+                <a:latin typeface="Segoe UI" panose="020B0502040204020203"/>
               </a:defRPr>
             </a:pPr>
             <a:r>
@@ -22516,7 +22496,7 @@
         </p:nvSpPr>
         <p:spPr>
           <a:xfrm>
-            <a:off x="6766560" y="2057400"/>
+            <a:off x="6766560" y="2240280"/>
             <a:ext cx="457200" cy="320040"/>
           </a:xfrm>
           <a:prstGeom prst="rect">
@@ -22535,7 +22515,7 @@
                 <a:solidFill>
                   <a:srgbClr val="FFFFFF"/>
                 </a:solidFill>
-                <a:latin typeface="Segoe UI"/>
+                <a:latin typeface="Segoe UI" panose="020B0502040204020203"/>
               </a:defRPr>
             </a:pPr>
             <a:r>
@@ -22552,7 +22532,7 @@
         </p:nvSpPr>
         <p:spPr>
           <a:xfrm>
-            <a:off x="7315200" y="2057400"/>
+            <a:off x="7315200" y="2011680"/>
             <a:ext cx="4114800" cy="320040"/>
           </a:xfrm>
           <a:prstGeom prst="rect">
@@ -22571,7 +22551,7 @@
                 <a:solidFill>
                   <a:srgbClr val="FFFFFF"/>
                 </a:solidFill>
-                <a:latin typeface="Segoe UI"/>
+                <a:latin typeface="Segoe UI" panose="020B0502040204020203"/>
               </a:defRPr>
             </a:pPr>
             <a:r>
@@ -22588,7 +22568,7 @@
         </p:nvSpPr>
         <p:spPr>
           <a:xfrm>
-            <a:off x="7315200" y="2377440"/>
+            <a:off x="7315200" y="2331720"/>
             <a:ext cx="4114800" cy="365760"/>
           </a:xfrm>
           <a:prstGeom prst="rect">
@@ -22607,7 +22587,7 @@
                 <a:solidFill>
                   <a:srgbClr val="8D99AE"/>
                 </a:solidFill>
-                <a:latin typeface="Segoe UI"/>
+                <a:latin typeface="Segoe UI" panose="020B0502040204020203"/>
               </a:defRPr>
             </a:pPr>
             <a:r>
@@ -22672,7 +22652,7 @@
         </p:nvSpPr>
         <p:spPr>
           <a:xfrm>
-            <a:off x="6766560" y="2971800"/>
+            <a:off x="6758305" y="3154680"/>
             <a:ext cx="457200" cy="320040"/>
           </a:xfrm>
           <a:prstGeom prst="rect">
@@ -22691,7 +22671,7 @@
                 <a:solidFill>
                   <a:srgbClr val="FFFFFF"/>
                 </a:solidFill>
-                <a:latin typeface="Segoe UI"/>
+                <a:latin typeface="Segoe UI" panose="020B0502040204020203"/>
               </a:defRPr>
             </a:pPr>
             <a:r>
@@ -22708,7 +22688,7 @@
         </p:nvSpPr>
         <p:spPr>
           <a:xfrm>
-            <a:off x="7315200" y="2971800"/>
+            <a:off x="7315200" y="2926080"/>
             <a:ext cx="4114800" cy="320040"/>
           </a:xfrm>
           <a:prstGeom prst="rect">
@@ -22727,7 +22707,7 @@
                 <a:solidFill>
                   <a:srgbClr val="FFFFFF"/>
                 </a:solidFill>
-                <a:latin typeface="Segoe UI"/>
+                <a:latin typeface="Segoe UI" panose="020B0502040204020203"/>
               </a:defRPr>
             </a:pPr>
             <a:r>
@@ -22744,7 +22724,7 @@
         </p:nvSpPr>
         <p:spPr>
           <a:xfrm>
-            <a:off x="7315200" y="3291840"/>
+            <a:off x="7315200" y="3246120"/>
             <a:ext cx="4114800" cy="365760"/>
           </a:xfrm>
           <a:prstGeom prst="rect">
@@ -22763,7 +22743,7 @@
                 <a:solidFill>
                   <a:srgbClr val="8D99AE"/>
                 </a:solidFill>
-                <a:latin typeface="Segoe UI"/>
+                <a:latin typeface="Segoe UI" panose="020B0502040204020203"/>
               </a:defRPr>
             </a:pPr>
             <a:r>
@@ -22828,7 +22808,7 @@
         </p:nvSpPr>
         <p:spPr>
           <a:xfrm>
-            <a:off x="6766560" y="3886200"/>
+            <a:off x="6766560" y="4069080"/>
             <a:ext cx="457200" cy="320040"/>
           </a:xfrm>
           <a:prstGeom prst="rect">
@@ -22847,7 +22827,7 @@
                 <a:solidFill>
                   <a:srgbClr val="FFFFFF"/>
                 </a:solidFill>
-                <a:latin typeface="Segoe UI"/>
+                <a:latin typeface="Segoe UI" panose="020B0502040204020203"/>
               </a:defRPr>
             </a:pPr>
             <a:r>
@@ -22883,7 +22863,7 @@
                 <a:solidFill>
                   <a:srgbClr val="FFFFFF"/>
                 </a:solidFill>
-                <a:latin typeface="Segoe UI"/>
+                <a:latin typeface="Segoe UI" panose="020B0502040204020203"/>
               </a:defRPr>
             </a:pPr>
             <a:r>
@@ -22919,7 +22899,7 @@
                 <a:solidFill>
                   <a:srgbClr val="8D99AE"/>
                 </a:solidFill>
-                <a:latin typeface="Segoe UI"/>
+                <a:latin typeface="Segoe UI" panose="020B0502040204020203"/>
               </a:defRPr>
             </a:pPr>
             <a:r>
@@ -22984,7 +22964,7 @@
         </p:nvSpPr>
         <p:spPr>
           <a:xfrm>
-            <a:off x="6766560" y="4800600"/>
+            <a:off x="6766560" y="4983480"/>
             <a:ext cx="457200" cy="320040"/>
           </a:xfrm>
           <a:prstGeom prst="rect">
@@ -23003,7 +22983,7 @@
                 <a:solidFill>
                   <a:srgbClr val="FFFFFF"/>
                 </a:solidFill>
-                <a:latin typeface="Segoe UI"/>
+                <a:latin typeface="Segoe UI" panose="020B0502040204020203"/>
               </a:defRPr>
             </a:pPr>
             <a:r>
@@ -23039,7 +23019,7 @@
                 <a:solidFill>
                   <a:srgbClr val="FFFFFF"/>
                 </a:solidFill>
-                <a:latin typeface="Segoe UI"/>
+                <a:latin typeface="Segoe UI" panose="020B0502040204020203"/>
               </a:defRPr>
             </a:pPr>
             <a:r>
@@ -23075,7 +23055,7 @@
                 <a:solidFill>
                   <a:srgbClr val="8D99AE"/>
                 </a:solidFill>
-                <a:latin typeface="Segoe UI"/>
+                <a:latin typeface="Segoe UI" panose="020B0502040204020203"/>
               </a:defRPr>
             </a:pPr>
             <a:r>
@@ -23093,7 +23073,7 @@
         <p:spPr>
           <a:xfrm>
             <a:off x="6583680" y="5669280"/>
-            <a:ext cx="5029200" cy="777240"/>
+            <a:ext cx="5029200" cy="731520"/>
           </a:xfrm>
           <a:prstGeom prst="roundRect">
             <a:avLst>
@@ -23140,7 +23120,7 @@
         </p:nvSpPr>
         <p:spPr>
           <a:xfrm>
-            <a:off x="6766560" y="5715000"/>
+            <a:off x="6766560" y="5806440"/>
             <a:ext cx="457200" cy="320040"/>
           </a:xfrm>
           <a:prstGeom prst="rect">
@@ -23159,7 +23139,7 @@
                 <a:solidFill>
                   <a:srgbClr val="FFFFFF"/>
                 </a:solidFill>
-                <a:latin typeface="Segoe UI"/>
+                <a:latin typeface="Segoe UI" panose="020B0502040204020203"/>
               </a:defRPr>
             </a:pPr>
             <a:r>
@@ -23176,7 +23156,7 @@
         </p:nvSpPr>
         <p:spPr>
           <a:xfrm>
-            <a:off x="7315200" y="5715000"/>
+            <a:off x="7315200" y="5669280"/>
             <a:ext cx="4114800" cy="320040"/>
           </a:xfrm>
           <a:prstGeom prst="rect">
@@ -23195,7 +23175,7 @@
                 <a:solidFill>
                   <a:srgbClr val="FFFFFF"/>
                 </a:solidFill>
-                <a:latin typeface="Segoe UI"/>
+                <a:latin typeface="Segoe UI" panose="020B0502040204020203"/>
               </a:defRPr>
             </a:pPr>
             <a:r>
@@ -23212,7 +23192,7 @@
         </p:nvSpPr>
         <p:spPr>
           <a:xfrm>
-            <a:off x="7315200" y="6035040"/>
+            <a:off x="7315200" y="5989320"/>
             <a:ext cx="4114800" cy="365760"/>
           </a:xfrm>
           <a:prstGeom prst="rect">
@@ -23231,7 +23211,7 @@
                 <a:solidFill>
                   <a:srgbClr val="8D99AE"/>
                 </a:solidFill>
-                <a:latin typeface="Segoe UI"/>
+                <a:latin typeface="Segoe UI" panose="020B0502040204020203"/>
               </a:defRPr>
             </a:pPr>
             <a:r>
@@ -23267,7 +23247,7 @@
                 <a:solidFill>
                   <a:srgbClr val="8D99AE"/>
                 </a:solidFill>
-                <a:latin typeface="Segoe UI"/>
+                <a:latin typeface="Segoe UI" panose="020B0502040204020203"/>
               </a:defRPr>
             </a:pPr>
             <a:r>
@@ -23303,7 +23283,7 @@
                 <a:solidFill>
                   <a:srgbClr val="8D99AE"/>
                 </a:solidFill>
-                <a:latin typeface="Segoe UI"/>
+                <a:latin typeface="Segoe UI" panose="020B0502040204020203"/>
               </a:defRPr>
             </a:pPr>
             <a:r>
@@ -23321,7 +23301,7 @@
 </file>
 
 <file path=ppt/slides/slide9.xml><?xml version="1.0" encoding="utf-8"?>
-<p:sld xmlns:a="http://schemas.openxmlformats.org/drawingml/2006/main" xmlns:p="http://schemas.openxmlformats.org/presentationml/2006/main" xmlns:r="http://schemas.openxmlformats.org/officeDocument/2006/relationships">
+<p:sld xmlns:a="http://schemas.openxmlformats.org/drawingml/2006/main" xmlns:r="http://schemas.openxmlformats.org/officeDocument/2006/relationships" xmlns:p="http://schemas.openxmlformats.org/presentationml/2006/main">
   <p:cSld>
     <p:bg>
       <p:bgPr>
@@ -23365,7 +23345,7 @@
                 <a:solidFill>
                   <a:srgbClr val="FFFFFF"/>
                 </a:solidFill>
-                <a:latin typeface="Segoe UI"/>
+                <a:latin typeface="Segoe UI" panose="020B0502040204020203"/>
               </a:defRPr>
             </a:pPr>
             <a:r>
@@ -23489,7 +23469,7 @@
                 <a:solidFill>
                   <a:srgbClr val="FFFFFF"/>
                 </a:solidFill>
-                <a:latin typeface="Segoe UI"/>
+                <a:latin typeface="Segoe UI" panose="020B0502040204020203"/>
               </a:defRPr>
             </a:pPr>
             <a:r>
@@ -23573,7 +23553,7 @@
                 <a:solidFill>
                   <a:srgbClr val="06D6A0"/>
                 </a:solidFill>
-                <a:latin typeface="Consolas"/>
+                <a:latin typeface="Consolas" panose="020B0609020204030204"/>
               </a:defRPr>
             </a:pPr>
             <a:r>
@@ -23609,7 +23589,7 @@
                 <a:solidFill>
                   <a:srgbClr val="8D99AE"/>
                 </a:solidFill>
-                <a:latin typeface="Segoe UI"/>
+                <a:latin typeface="Segoe UI" panose="020B0502040204020203"/>
               </a:defRPr>
             </a:pPr>
             <a:r>
@@ -23645,7 +23625,7 @@
                 <a:solidFill>
                   <a:srgbClr val="E0E1DD"/>
                 </a:solidFill>
-                <a:latin typeface="Segoe UI"/>
+                <a:latin typeface="Segoe UI" panose="020B0502040204020203"/>
               </a:defRPr>
             </a:pPr>
             <a:r>
@@ -23729,7 +23709,7 @@
                 <a:solidFill>
                   <a:srgbClr val="06D6A0"/>
                 </a:solidFill>
-                <a:latin typeface="Segoe UI"/>
+                <a:latin typeface="Segoe UI" panose="020B0502040204020203"/>
               </a:defRPr>
             </a:pPr>
             <a:r>
@@ -23853,7 +23833,7 @@
                 <a:solidFill>
                   <a:srgbClr val="FFFFFF"/>
                 </a:solidFill>
-                <a:latin typeface="Segoe UI"/>
+                <a:latin typeface="Segoe UI" panose="020B0502040204020203"/>
               </a:defRPr>
             </a:pPr>
             <a:r>
@@ -23937,7 +23917,7 @@
                 <a:solidFill>
                   <a:srgbClr val="06D6A0"/>
                 </a:solidFill>
-                <a:latin typeface="Consolas"/>
+                <a:latin typeface="Consolas" panose="020B0609020204030204"/>
               </a:defRPr>
             </a:pPr>
             <a:r>
@@ -23973,7 +23953,7 @@
                 <a:solidFill>
                   <a:srgbClr val="8D99AE"/>
                 </a:solidFill>
-                <a:latin typeface="Segoe UI"/>
+                <a:latin typeface="Segoe UI" panose="020B0502040204020203"/>
               </a:defRPr>
             </a:pPr>
             <a:r>
@@ -24009,7 +23989,7 @@
                 <a:solidFill>
                   <a:srgbClr val="E0E1DD"/>
                 </a:solidFill>
-                <a:latin typeface="Segoe UI"/>
+                <a:latin typeface="Segoe UI" panose="020B0502040204020203"/>
               </a:defRPr>
             </a:pPr>
             <a:r>
@@ -24093,7 +24073,7 @@
                 <a:solidFill>
                   <a:srgbClr val="06D6A0"/>
                 </a:solidFill>
-                <a:latin typeface="Segoe UI"/>
+                <a:latin typeface="Segoe UI" panose="020B0502040204020203"/>
               </a:defRPr>
             </a:pPr>
             <a:r>
@@ -24217,7 +24197,7 @@
                 <a:solidFill>
                   <a:srgbClr val="FFFFFF"/>
                 </a:solidFill>
-                <a:latin typeface="Segoe UI"/>
+                <a:latin typeface="Segoe UI" panose="020B0502040204020203"/>
               </a:defRPr>
             </a:pPr>
             <a:r>
@@ -24301,7 +24281,7 @@
                 <a:solidFill>
                   <a:srgbClr val="06D6A0"/>
                 </a:solidFill>
-                <a:latin typeface="Consolas"/>
+                <a:latin typeface="Consolas" panose="020B0609020204030204"/>
               </a:defRPr>
             </a:pPr>
             <a:r>
@@ -24337,7 +24317,7 @@
                 <a:solidFill>
                   <a:srgbClr val="8D99AE"/>
                 </a:solidFill>
-                <a:latin typeface="Segoe UI"/>
+                <a:latin typeface="Segoe UI" panose="020B0502040204020203"/>
               </a:defRPr>
             </a:pPr>
             <a:r>
@@ -24373,7 +24353,7 @@
                 <a:solidFill>
                   <a:srgbClr val="E0E1DD"/>
                 </a:solidFill>
-                <a:latin typeface="Segoe UI"/>
+                <a:latin typeface="Segoe UI" panose="020B0502040204020203"/>
               </a:defRPr>
             </a:pPr>
             <a:r>
@@ -24457,7 +24437,7 @@
                 <a:solidFill>
                   <a:srgbClr val="06D6A0"/>
                 </a:solidFill>
-                <a:latin typeface="Segoe UI"/>
+                <a:latin typeface="Segoe UI" panose="020B0502040204020203"/>
               </a:defRPr>
             </a:pPr>
             <a:r>
@@ -24581,7 +24561,7 @@
                 <a:solidFill>
                   <a:srgbClr val="FFFFFF"/>
                 </a:solidFill>
-                <a:latin typeface="Segoe UI"/>
+                <a:latin typeface="Segoe UI" panose="020B0502040204020203"/>
               </a:defRPr>
             </a:pPr>
             <a:r>
@@ -24665,7 +24645,7 @@
                 <a:solidFill>
                   <a:srgbClr val="06D6A0"/>
                 </a:solidFill>
-                <a:latin typeface="Consolas"/>
+                <a:latin typeface="Consolas" panose="020B0609020204030204"/>
               </a:defRPr>
             </a:pPr>
             <a:r>
@@ -24701,7 +24681,7 @@
                 <a:solidFill>
                   <a:srgbClr val="8D99AE"/>
                 </a:solidFill>
-                <a:latin typeface="Segoe UI"/>
+                <a:latin typeface="Segoe UI" panose="020B0502040204020203"/>
               </a:defRPr>
             </a:pPr>
             <a:r>
@@ -24737,7 +24717,7 @@
                 <a:solidFill>
                   <a:srgbClr val="E0E1DD"/>
                 </a:solidFill>
-                <a:latin typeface="Segoe UI"/>
+                <a:latin typeface="Segoe UI" panose="020B0502040204020203"/>
               </a:defRPr>
             </a:pPr>
             <a:r>
@@ -24821,7 +24801,7 @@
                 <a:solidFill>
                   <a:srgbClr val="06D6A0"/>
                 </a:solidFill>
-                <a:latin typeface="Segoe UI"/>
+                <a:latin typeface="Segoe UI" panose="020B0502040204020203"/>
               </a:defRPr>
             </a:pPr>
             <a:r>
@@ -24945,7 +24925,7 @@
                 <a:solidFill>
                   <a:srgbClr val="FFFFFF"/>
                 </a:solidFill>
-                <a:latin typeface="Segoe UI"/>
+                <a:latin typeface="Segoe UI" panose="020B0502040204020203"/>
               </a:defRPr>
             </a:pPr>
             <a:r>
@@ -25029,7 +25009,7 @@
                 <a:solidFill>
                   <a:srgbClr val="06D6A0"/>
                 </a:solidFill>
-                <a:latin typeface="Consolas"/>
+                <a:latin typeface="Consolas" panose="020B0609020204030204"/>
               </a:defRPr>
             </a:pPr>
             <a:r>
@@ -25065,7 +25045,7 @@
                 <a:solidFill>
                   <a:srgbClr val="8D99AE"/>
                 </a:solidFill>
-                <a:latin typeface="Segoe UI"/>
+                <a:latin typeface="Segoe UI" panose="020B0502040204020203"/>
               </a:defRPr>
             </a:pPr>
             <a:r>
@@ -25101,7 +25081,7 @@
                 <a:solidFill>
                   <a:srgbClr val="E0E1DD"/>
                 </a:solidFill>
-                <a:latin typeface="Segoe UI"/>
+                <a:latin typeface="Segoe UI" panose="020B0502040204020203"/>
               </a:defRPr>
             </a:pPr>
             <a:r>
@@ -25185,7 +25165,7 @@
                 <a:solidFill>
                   <a:srgbClr val="06D6A0"/>
                 </a:solidFill>
-                <a:latin typeface="Segoe UI"/>
+                <a:latin typeface="Segoe UI" panose="020B0502040204020203"/>
               </a:defRPr>
             </a:pPr>
             <a:r>
@@ -25309,7 +25289,7 @@
                 <a:solidFill>
                   <a:srgbClr val="FFFFFF"/>
                 </a:solidFill>
-                <a:latin typeface="Segoe UI"/>
+                <a:latin typeface="Segoe UI" panose="020B0502040204020203"/>
               </a:defRPr>
             </a:pPr>
             <a:r>
@@ -25393,7 +25373,7 @@
                 <a:solidFill>
                   <a:srgbClr val="06D6A0"/>
                 </a:solidFill>
-                <a:latin typeface="Consolas"/>
+                <a:latin typeface="Consolas" panose="020B0609020204030204"/>
               </a:defRPr>
             </a:pPr>
             <a:r>
@@ -25429,7 +25409,7 @@
                 <a:solidFill>
                   <a:srgbClr val="8D99AE"/>
                 </a:solidFill>
-                <a:latin typeface="Segoe UI"/>
+                <a:latin typeface="Segoe UI" panose="020B0502040204020203"/>
               </a:defRPr>
             </a:pPr>
             <a:r>
@@ -25465,7 +25445,7 @@
                 <a:solidFill>
                   <a:srgbClr val="E0E1DD"/>
                 </a:solidFill>
-                <a:latin typeface="Segoe UI"/>
+                <a:latin typeface="Segoe UI" panose="020B0502040204020203"/>
               </a:defRPr>
             </a:pPr>
             <a:r>
@@ -25549,7 +25529,7 @@
                 <a:solidFill>
                   <a:srgbClr val="06D6A0"/>
                 </a:solidFill>
-                <a:latin typeface="Segoe UI"/>
+                <a:latin typeface="Segoe UI" panose="020B0502040204020203"/>
               </a:defRPr>
             </a:pPr>
             <a:r>
@@ -25585,7 +25565,7 @@
                 <a:solidFill>
                   <a:srgbClr val="8D99AE"/>
                 </a:solidFill>
-                <a:latin typeface="Segoe UI"/>
+                <a:latin typeface="Segoe UI" panose="020B0502040204020203"/>
               </a:defRPr>
             </a:pPr>
             <a:r>
@@ -25621,7 +25601,7 @@
                 <a:solidFill>
                   <a:srgbClr val="8D99AE"/>
                 </a:solidFill>
-                <a:latin typeface="Segoe UI"/>
+                <a:latin typeface="Segoe UI" panose="020B0502040204020203"/>
               </a:defRPr>
             </a:pPr>
             <a:r>
@@ -25954,7 +25934,11 @@
       </a:style>
     </a:lnDef>
   </a:objectDefaults>
-  <a:extraClrSchemeLst/>
+  <a:extLst>
+    <a:ext uri="{05A4C25C-085E-4340-85A3-A5531E510DB2}">
+      <thm15:themeFamily xmlns:thm15="http://schemas.microsoft.com/office/thememl/2012/main" name="Office Theme" id="{62F939B6-93AF-4DB8-9C6B-D6C7DFDC589F}" vid="{4A3C46E8-61CC-4603-A589-7422A47A8E4A}"/>
+    </a:ext>
+  </a:extLst>
 </a:theme>
 </file>
 
@@ -26274,6 +26258,10 @@
       </a:style>
     </a:lnDef>
   </a:objectDefaults>
-  <a:extraClrSchemeLst/>
+  <a:extLst>
+    <a:ext uri="{05A4C25C-085E-4340-85A3-A5531E510DB2}">
+      <thm15:themeFamily xmlns:thm15="http://schemas.microsoft.com/office/thememl/2012/main" name="Office Theme" id="{62F939B6-93AF-4DB8-9C6B-D6C7DFDC589F}" vid="{4A3C46E8-61CC-4603-A589-7422A47A8E4A}"/>
+    </a:ext>
+  </a:extLst>
 </a:theme>
 </file>